--- a/slides/BreakBite_Lab2_Presentation.pptx
+++ b/slides/BreakBite_Lab2_Presentation.pptx
@@ -30,8 +30,11 @@
     <p:sldId id="278" r:id="rId24"/>
     <p:sldId id="279" r:id="rId25"/>
     <p:sldId id="280" r:id="rId26"/>
+    <p:sldId id="294" r:id="rId45"/>
     <p:sldId id="281" r:id="rId27"/>
     <p:sldId id="282" r:id="rId28"/>
+    <p:sldId id="295" r:id="rId46"/>
+    <p:sldId id="296" r:id="rId47"/>
     <p:sldId id="283" r:id="rId29"/>
     <p:sldId id="284" r:id="rId30"/>
     <p:sldId id="285" r:id="rId31"/>
@@ -41,6 +44,7 @@
     <p:sldId id="289" r:id="rId35"/>
     <p:sldId id="290" r:id="rId36"/>
     <p:sldId id="291" r:id="rId37"/>
+    <p:sldId id="297" r:id="rId48"/>
     <p:sldId id="292" r:id="rId38"/>
     <p:sldId id="293" r:id="rId39"/>
   </p:sldIdLst>
@@ -5582,7 +5586,7 @@
               <a:buNone/>
             </a:pPr>
             <a:r>
-              <a:rPr lang="en-US" sz="1500" b="1" dirty="0">
+              <a:rPr lang="en-US" sz="1200" b="1" dirty="0">
                 <a:solidFill>
                   <a:srgbClr val="E0C375"/>
                 </a:solidFill>
@@ -5590,7 +5594,7 @@
                 <a:ea typeface="Calibri" pitchFamily="34" charset="-122"/>
                 <a:cs typeface="Calibri" pitchFamily="34" charset="-120"/>
               </a:rPr>
-              <a:t>Người trình bày: </a:t>
+              <a:t>Nhóm 2 · SE1919 — Nguyễn Viết Bảo (SE183398) · Đỗ Hoàng Gia Bảo (SE193119) · Nguyễn Quốc Hoàng Pháp (SE190175) · Nguyễn Hoàng An (SE193905) · Nguyễn Thành Danh (SE193274)</a:t>
             </a:r>
             <a:pPr algn="l" indent="0" marL="0">
               <a:spcAft>
@@ -5598,17 +5602,6 @@
               </a:spcAft>
               <a:buNone/>
             </a:pPr>
-            <a:r>
-              <a:rPr lang="en-US" sz="1500" dirty="0">
-                <a:solidFill>
-                  <a:srgbClr val="FFFFFF"/>
-                </a:solidFill>
-                <a:latin typeface="Calibri" pitchFamily="34" charset="0"/>
-                <a:ea typeface="Calibri" pitchFamily="34" charset="-122"/>
-                <a:cs typeface="Calibri" pitchFamily="34" charset="-120"/>
-              </a:rPr>
-              <a:t>[Họ tên] — [MSSV]</a:t>
-            </a:r>
             <a:endParaRPr lang="en-US" sz="1500" dirty="0"/>
           </a:p>
           <a:p>
@@ -5643,15 +5636,9 @@
                 <a:latin typeface="Calibri" pitchFamily="34" charset="0"/>
                 <a:ea typeface="Calibri" pitchFamily="34" charset="-122"/>
                 <a:cs typeface="Calibri" pitchFamily="34" charset="-120"/>
-                <a:hlinkClick r:id="rId2" invalidUrl="" action="" tgtFrame="" tooltip="" history="1" highlightClick="0" endSnd="0">
-                  <a:extLst>
-                    <a:ext uri="{A12FA001-AC4F-418D-AE19-62706E023703}">
-                      <ahyp:hlinkClr xmlns:ahyp="http://schemas.microsoft.com/office/drawing/2018/hyperlinkcolor" val="tx"/>
-                    </a:ext>
-                  </a:extLst>
-                </a:hlinkClick>
-              </a:rPr>
-              <a:t>github.com/Mikan382/prm393-lab2</a:t>
+                <a:hlinkClick r:id="rId2"/>
+              </a:rPr>
+              <a:t>github.com/baonv0817/PRM323-Lab2-Group2</a:t>
             </a:r>
             <a:endParaRPr lang="en-US" sz="1500" dirty="0"/>
           </a:p>
@@ -5687,13 +5674,7 @@
                 <a:latin typeface="Calibri" pitchFamily="34" charset="0"/>
                 <a:ea typeface="Calibri" pitchFamily="34" charset="-122"/>
                 <a:cs typeface="Calibri" pitchFamily="34" charset="-120"/>
-                <a:hlinkClick r:id="rId3" invalidUrl="" action="" tgtFrame="" tooltip="" history="1" highlightClick="0" endSnd="0">
-                  <a:extLst>
-                    <a:ext uri="{A12FA001-AC4F-418D-AE19-62706E023703}">
-                      <ahyp:hlinkClr xmlns:ahyp="http://schemas.microsoft.com/office/drawing/2018/hyperlinkcolor" val="tx"/>
-                    </a:ext>
-                  </a:extLst>
-                </a:hlinkClick>
+                <a:hlinkClick r:id="rId3"/>
               </a:rPr>
               <a:t>Mở file thiết kế (quyền xem)</a:t>
             </a:r>
@@ -10503,7 +10484,7 @@
                 <a:ea typeface="Calibri" pitchFamily="34" charset="-122"/>
                 <a:cs typeface="Calibri" pitchFamily="34" charset="-120"/>
               </a:rPr>
-              <a:t>CẤU TRÚC ĐIỀU HƯỚNG — 8 MÀN HÌNH</a:t>
+              <a:t>CẤU TRÚC ĐIỀU HƯỚNG — 30 MÀN KHÁCH + 15 MÀN NGƯỜI BÁN</a:t>
             </a:r>
             <a:endParaRPr lang="en-US" sz="1200" dirty="0"/>
           </a:p>
@@ -11577,7 +11558,7 @@
                 <a:ea typeface="Cambria" pitchFamily="34" charset="-122"/>
                 <a:cs typeface="Cambria" pitchFamily="34" charset="-120"/>
               </a:rPr>
-              <a:t>Biến thể trạng thái &amp; dialog (không tính màn)</a:t>
+              <a:t>Các màn còn lại (S09–S30) và app người bán</a:t>
             </a:r>
             <a:endParaRPr lang="en-US" sz="1700" dirty="0"/>
           </a:p>
@@ -11620,7 +11601,7 @@
                 <a:ea typeface="Calibri" pitchFamily="34" charset="-122"/>
                 <a:cs typeface="Calibri" pitchFamily="34" charset="-120"/>
               </a:rPr>
-              <a:t>S05-EMPTY · S05-VOUCHER-ERR (mã sai)</a:t>
+              <a:t>S09–S14 · sửa/huỷ đơn, lịch sử, yêu thích, đặt lại</a:t>
             </a:r>
             <a:endParaRPr lang="en-US" sz="1350" dirty="0"/>
           </a:p>
@@ -11641,7 +11622,7 @@
                 <a:ea typeface="Calibri" pitchFamily="34" charset="-122"/>
                 <a:cs typeface="Calibri" pitchFamily="34" charset="-120"/>
               </a:rPr>
-              <a:t>S06-LOADING · S06-ERR (lỗi &amp; phục hồi)</a:t>
+              <a:t>S15–S20 · tài khoản, thông báo, nhận món (QR)</a:t>
             </a:r>
             <a:endParaRPr lang="en-US" sz="1350" dirty="0"/>
           </a:p>
@@ -11662,7 +11643,7 @@
                 <a:ea typeface="Calibri" pitchFamily="34" charset="-122"/>
                 <a:cs typeface="Calibri" pitchFamily="34" charset="-120"/>
               </a:rPr>
-              <a:t>S07-CASH (trả tại quầy) · S07-DIALOG (huỷ đơn)</a:t>
+              <a:t>S21–S25 · quán đóng, món hết, đánh giá, sự cố, hẹn giờ</a:t>
             </a:r>
             <a:endParaRPr lang="en-US" sz="1350" dirty="0"/>
           </a:p>
@@ -11683,7 +11664,28 @@
                 <a:ea typeface="Calibri" pitchFamily="34" charset="-122"/>
                 <a:cs typeface="Calibri" pitchFamily="34" charset="-120"/>
               </a:rPr>
-              <a:t>S08-EMPTY (chưa có đơn)</a:t>
+              <a:t>S26–S30 · đăng nhập, chọn kiosk, tìm kiếm, mã giảm giá, mất mạng</a:t>
+            </a:r>
+            <a:endParaRPr lang="en-US" sz="1350" dirty="0"/>
+          </a:p>
+          <a:p>
+            <a:pPr marL="342900" indent="-342900">
+              <a:spcAft>
+                <a:spcPts val="500"/>
+              </a:spcAft>
+              <a:buSzPct val="100000"/>
+              <a:buChar char="•"/>
+            </a:pPr>
+            <a:r>
+              <a:rPr lang="en-US" sz="1350" dirty="0">
+                <a:solidFill>
+                  <a:srgbClr val="2E1B12"/>
+                </a:solidFill>
+                <a:latin typeface="Calibri" pitchFamily="34" charset="0"/>
+                <a:ea typeface="Calibri" pitchFamily="34" charset="-122"/>
+                <a:cs typeface="Calibri" pitchFamily="34" charset="-120"/>
+              </a:rPr>
+              <a:t>K01–K15 · app người bán (quầy)</a:t>
             </a:r>
             <a:endParaRPr lang="en-US" sz="1350" dirty="0"/>
           </a:p>
@@ -24844,7 +24846,7 @@
                 <a:ea typeface="Calibri" pitchFamily="34" charset="-122"/>
                 <a:cs typeface="Calibri" pitchFamily="34" charset="-120"/>
               </a:rPr>
-              <a:t>BỐ CỤC &amp; PHÂN CẤP — 4/8 MÀN CHÍNH</a:t>
+              <a:t>BỐ CỤC &amp; PHÂN CẤP — 4/8 MÀN ĐẶT MÓN (BẢN V2)</a:t>
             </a:r>
             <a:endParaRPr lang="en-US" sz="1200" dirty="0"/>
           </a:p>
@@ -24922,7 +24924,7 @@
                 <a:ea typeface="Calibri" pitchFamily="34" charset="-122"/>
                 <a:cs typeface="Calibri" pitchFamily="34" charset="-120"/>
               </a:rPr>
-              <a:t>26</a:t>
+              <a:t>27</a:t>
             </a:r>
             <a:endParaRPr lang="en-US" sz="1050" dirty="0"/>
           </a:p>
@@ -24954,6 +24956,10 @@
             <a:prstDash val="solid"/>
           </a:ln>
         </p:spPr>
+        <p:txBody>
+          <a:bodyPr/>
+          <a:p/>
+        </p:txBody>
       </p:sp>
       <p:sp>
         <p:nvSpPr>
@@ -25078,6 +25084,10 @@
             <a:prstDash val="solid"/>
           </a:ln>
         </p:spPr>
+        <p:txBody>
+          <a:bodyPr/>
+          <a:p/>
+        </p:txBody>
       </p:sp>
       <p:pic>
         <p:nvPicPr>
@@ -25124,6 +25134,10 @@
             <a:prstDash val="solid"/>
           </a:ln>
         </p:spPr>
+        <p:txBody>
+          <a:bodyPr/>
+          <a:p/>
+        </p:txBody>
       </p:sp>
       <p:sp>
         <p:nvSpPr>
@@ -25229,6 +25243,10 @@
             <a:prstDash val="solid"/>
           </a:ln>
         </p:spPr>
+        <p:txBody>
+          <a:bodyPr/>
+          <a:p/>
+        </p:txBody>
       </p:sp>
       <p:sp>
         <p:nvSpPr>
@@ -25353,6 +25371,10 @@
             <a:prstDash val="solid"/>
           </a:ln>
         </p:spPr>
+        <p:txBody>
+          <a:bodyPr/>
+          <a:p/>
+        </p:txBody>
       </p:sp>
       <p:pic>
         <p:nvPicPr>
@@ -25399,6 +25421,10 @@
             <a:prstDash val="solid"/>
           </a:ln>
         </p:spPr>
+        <p:txBody>
+          <a:bodyPr/>
+          <a:p/>
+        </p:txBody>
       </p:sp>
       <p:sp>
         <p:nvSpPr>
@@ -25504,6 +25530,10 @@
             <a:prstDash val="solid"/>
           </a:ln>
         </p:spPr>
+        <p:txBody>
+          <a:bodyPr/>
+          <a:p/>
+        </p:txBody>
       </p:sp>
       <p:sp>
         <p:nvSpPr>
@@ -25609,6 +25639,10 @@
             <a:prstDash val="dash"/>
           </a:ln>
         </p:spPr>
+        <p:txBody>
+          <a:bodyPr/>
+          <a:p/>
+        </p:txBody>
       </p:sp>
       <p:sp>
         <p:nvSpPr>
@@ -25643,7 +25677,7 @@
                 <a:ea typeface="Calibri" pitchFamily="34" charset="-122"/>
                 <a:cs typeface="Calibri" pitchFamily="34" charset="-120"/>
               </a:rPr>
-              <a:t>Chưa có</a:t>
+              <a:t>Xem Figma</a:t>
             </a:r>
             <a:endParaRPr lang="en-US" sz="1200" dirty="0"/>
           </a:p>
@@ -25660,7 +25694,7 @@
                 <a:ea typeface="Calibri" pitchFamily="34" charset="-122"/>
                 <a:cs typeface="Calibri" pitchFamily="34" charset="-120"/>
               </a:rPr>
-              <a:t>wireframe</a:t>
+              <a:t>Page 02</a:t>
             </a:r>
             <a:endParaRPr lang="en-US" sz="1200" dirty="0"/>
           </a:p>
@@ -25711,6 +25745,10 @@
             <a:prstDash val="solid"/>
           </a:ln>
         </p:spPr>
+        <p:txBody>
+          <a:bodyPr/>
+          <a:p/>
+        </p:txBody>
       </p:sp>
       <p:sp>
         <p:nvSpPr>
@@ -25816,6 +25854,10 @@
             <a:prstDash val="solid"/>
           </a:ln>
         </p:spPr>
+        <p:txBody>
+          <a:bodyPr/>
+          <a:p/>
+        </p:txBody>
       </p:sp>
       <p:sp>
         <p:nvSpPr>
@@ -25921,6 +25963,10 @@
             <a:prstDash val="dash"/>
           </a:ln>
         </p:spPr>
+        <p:txBody>
+          <a:bodyPr/>
+          <a:p/>
+        </p:txBody>
       </p:sp>
       <p:sp>
         <p:nvSpPr>
@@ -25955,7 +26001,7 @@
                 <a:ea typeface="Calibri" pitchFamily="34" charset="-122"/>
                 <a:cs typeface="Calibri" pitchFamily="34" charset="-120"/>
               </a:rPr>
-              <a:t>Chưa có</a:t>
+              <a:t>Xem Figma</a:t>
             </a:r>
             <a:endParaRPr lang="en-US" sz="1200" dirty="0"/>
           </a:p>
@@ -25972,7 +26018,7 @@
                 <a:ea typeface="Calibri" pitchFamily="34" charset="-122"/>
                 <a:cs typeface="Calibri" pitchFamily="34" charset="-120"/>
               </a:rPr>
-              <a:t>wireframe</a:t>
+              <a:t>Page 02</a:t>
             </a:r>
             <a:endParaRPr lang="en-US" sz="1200" dirty="0"/>
           </a:p>
@@ -26023,6 +26069,10 @@
             <a:prstDash val="solid"/>
           </a:ln>
         </p:spPr>
+        <p:txBody>
+          <a:bodyPr/>
+          <a:p/>
+        </p:txBody>
       </p:sp>
       <p:sp>
         <p:nvSpPr>
@@ -26245,7 +26295,7 @@
                 <a:ea typeface="Calibri" pitchFamily="34" charset="-122"/>
                 <a:cs typeface="Calibri" pitchFamily="34" charset="-120"/>
               </a:rPr>
-              <a:t>NHẤT QUÁN CÁC MÀN CHỨC NĂNG — 4/8 MÀN CÒN LẠI</a:t>
+              <a:t>NHẤT QUÁN CÁC MÀN ĐẶT MÓN CÒN LẠI (BẢN V2)</a:t>
             </a:r>
             <a:endParaRPr lang="en-US" sz="1200" dirty="0"/>
           </a:p>
@@ -26323,7 +26373,7 @@
                 <a:ea typeface="Calibri" pitchFamily="34" charset="-122"/>
                 <a:cs typeface="Calibri" pitchFamily="34" charset="-120"/>
               </a:rPr>
-              <a:t>27</a:t>
+              <a:t>28</a:t>
             </a:r>
             <a:endParaRPr lang="en-US" sz="1050" dirty="0"/>
           </a:p>
@@ -26355,6 +26405,10 @@
             <a:prstDash val="solid"/>
           </a:ln>
         </p:spPr>
+        <p:txBody>
+          <a:bodyPr/>
+          <a:p/>
+        </p:txBody>
       </p:sp>
       <p:sp>
         <p:nvSpPr>
@@ -26479,6 +26533,10 @@
             <a:prstDash val="solid"/>
           </a:ln>
         </p:spPr>
+        <p:txBody>
+          <a:bodyPr/>
+          <a:p/>
+        </p:txBody>
       </p:sp>
       <p:pic>
         <p:nvPicPr>
@@ -26525,6 +26583,10 @@
             <a:prstDash val="solid"/>
           </a:ln>
         </p:spPr>
+        <p:txBody>
+          <a:bodyPr/>
+          <a:p/>
+        </p:txBody>
       </p:sp>
       <p:sp>
         <p:nvSpPr>
@@ -26630,6 +26692,10 @@
             <a:prstDash val="solid"/>
           </a:ln>
         </p:spPr>
+        <p:txBody>
+          <a:bodyPr/>
+          <a:p/>
+        </p:txBody>
       </p:sp>
       <p:sp>
         <p:nvSpPr>
@@ -26735,6 +26801,10 @@
             <a:prstDash val="dash"/>
           </a:ln>
         </p:spPr>
+        <p:txBody>
+          <a:bodyPr/>
+          <a:p/>
+        </p:txBody>
       </p:sp>
       <p:sp>
         <p:nvSpPr>
@@ -26769,7 +26839,7 @@
                 <a:ea typeface="Calibri" pitchFamily="34" charset="-122"/>
                 <a:cs typeface="Calibri" pitchFamily="34" charset="-120"/>
               </a:rPr>
-              <a:t>Chưa có</a:t>
+              <a:t>Xem Figma</a:t>
             </a:r>
             <a:endParaRPr lang="en-US" sz="1200" dirty="0"/>
           </a:p>
@@ -26786,7 +26856,7 @@
                 <a:ea typeface="Calibri" pitchFamily="34" charset="-122"/>
                 <a:cs typeface="Calibri" pitchFamily="34" charset="-120"/>
               </a:rPr>
-              <a:t>wireframe</a:t>
+              <a:t>Page 02</a:t>
             </a:r>
             <a:endParaRPr lang="en-US" sz="1200" dirty="0"/>
           </a:p>
@@ -26837,6 +26907,10 @@
             <a:prstDash val="solid"/>
           </a:ln>
         </p:spPr>
+        <p:txBody>
+          <a:bodyPr/>
+          <a:p/>
+        </p:txBody>
       </p:sp>
       <p:sp>
         <p:nvSpPr>
@@ -26942,6 +27016,10 @@
             <a:prstDash val="solid"/>
           </a:ln>
         </p:spPr>
+        <p:txBody>
+          <a:bodyPr/>
+          <a:p/>
+        </p:txBody>
       </p:sp>
       <p:sp>
         <p:nvSpPr>
@@ -27047,6 +27125,10 @@
             <a:prstDash val="dash"/>
           </a:ln>
         </p:spPr>
+        <p:txBody>
+          <a:bodyPr/>
+          <a:p/>
+        </p:txBody>
       </p:sp>
       <p:sp>
         <p:nvSpPr>
@@ -27081,7 +27163,7 @@
                 <a:ea typeface="Calibri" pitchFamily="34" charset="-122"/>
                 <a:cs typeface="Calibri" pitchFamily="34" charset="-120"/>
               </a:rPr>
-              <a:t>Chưa có</a:t>
+              <a:t>Xem Figma</a:t>
             </a:r>
             <a:endParaRPr lang="en-US" sz="1200" dirty="0"/>
           </a:p>
@@ -27098,7 +27180,7 @@
                 <a:ea typeface="Calibri" pitchFamily="34" charset="-122"/>
                 <a:cs typeface="Calibri" pitchFamily="34" charset="-120"/>
               </a:rPr>
-              <a:t>wireframe</a:t>
+              <a:t>Page 02</a:t>
             </a:r>
             <a:endParaRPr lang="en-US" sz="1200" dirty="0"/>
           </a:p>
@@ -27149,6 +27231,10 @@
             <a:prstDash val="solid"/>
           </a:ln>
         </p:spPr>
+        <p:txBody>
+          <a:bodyPr/>
+          <a:p/>
+        </p:txBody>
       </p:sp>
       <p:sp>
         <p:nvSpPr>
@@ -27254,6 +27340,10 @@
             <a:prstDash val="solid"/>
           </a:ln>
         </p:spPr>
+        <p:txBody>
+          <a:bodyPr/>
+          <a:p/>
+        </p:txBody>
       </p:sp>
       <p:sp>
         <p:nvSpPr>
@@ -27359,6 +27449,10 @@
             <a:prstDash val="dash"/>
           </a:ln>
         </p:spPr>
+        <p:txBody>
+          <a:bodyPr/>
+          <a:p/>
+        </p:txBody>
       </p:sp>
       <p:sp>
         <p:nvSpPr>
@@ -27393,7 +27487,7 @@
                 <a:ea typeface="Calibri" pitchFamily="34" charset="-122"/>
                 <a:cs typeface="Calibri" pitchFamily="34" charset="-120"/>
               </a:rPr>
-              <a:t>Chưa có</a:t>
+              <a:t>Xem Figma</a:t>
             </a:r>
             <a:endParaRPr lang="en-US" sz="1200" dirty="0"/>
           </a:p>
@@ -27410,7 +27504,7 @@
                 <a:ea typeface="Calibri" pitchFamily="34" charset="-122"/>
                 <a:cs typeface="Calibri" pitchFamily="34" charset="-120"/>
               </a:rPr>
-              <a:t>wireframe</a:t>
+              <a:t>Page 02</a:t>
             </a:r>
             <a:endParaRPr lang="en-US" sz="1200" dirty="0"/>
           </a:p>
@@ -27461,6 +27555,10 @@
             <a:prstDash val="solid"/>
           </a:ln>
         </p:spPr>
+        <p:txBody>
+          <a:bodyPr/>
+          <a:p/>
+        </p:txBody>
       </p:sp>
       <p:sp>
         <p:nvSpPr>
@@ -27761,7 +27859,7 @@
                 <a:ea typeface="Calibri" pitchFamily="34" charset="-122"/>
                 <a:cs typeface="Calibri" pitchFamily="34" charset="-120"/>
               </a:rPr>
-              <a:t>28</a:t>
+              <a:t>31</a:t>
             </a:r>
             <a:endParaRPr lang="en-US" sz="1050" dirty="0"/>
           </a:p>
@@ -28592,7 +28690,7 @@
                 <a:ea typeface="Calibri" pitchFamily="34" charset="-122"/>
                 <a:cs typeface="Calibri" pitchFamily="34" charset="-120"/>
               </a:rPr>
-              <a:t>29</a:t>
+              <a:t>32</a:t>
             </a:r>
             <a:endParaRPr lang="en-US" sz="1050" dirty="0"/>
           </a:p>
@@ -30911,7 +31009,7 @@
                 <a:ea typeface="Calibri" pitchFamily="34" charset="-122"/>
                 <a:cs typeface="Calibri" pitchFamily="34" charset="-120"/>
               </a:rPr>
-              <a:t>FTACODE MOBILE — APP ĐẶT TRƯỚC, NHẬN TẠI QUẦY TRONG TRƯỜNG</a:t>
+              <a:t>BREAKBITE — APP ĐẶT TRƯỚC, NHẬN TẠI QUẦY TRONG TRƯỜNG</a:t>
             </a:r>
             <a:endParaRPr lang="en-US" sz="1200" dirty="0"/>
           </a:p>
@@ -31265,7 +31363,7 @@
                 <a:ea typeface="Cambria" pitchFamily="34" charset="-122"/>
                 <a:cs typeface="Cambria" pitchFamily="34" charset="-120"/>
               </a:rPr>
-              <a:t>Phạm vi Lab 2</a:t>
+              <a:t>Phạm vi</a:t>
             </a:r>
             <a:endParaRPr lang="en-US" sz="1600" dirty="0"/>
           </a:p>
@@ -31308,7 +31406,7 @@
                 <a:ea typeface="Calibri" pitchFamily="34" charset="-122"/>
                 <a:cs typeface="Calibri" pitchFamily="34" charset="-120"/>
               </a:rPr>
-              <a:t>8 màn hình 360 × 800 dp · 3 user flow có nhánh lỗi</a:t>
+              <a:t>30 màn app khách + 15 màn app người bán · 360 × 800 dp, có bản 412 dp</a:t>
             </a:r>
             <a:endParaRPr lang="en-US" sz="1400" dirty="0"/>
           </a:p>
@@ -31329,7 +31427,7 @@
                 <a:ea typeface="Calibri" pitchFamily="34" charset="-122"/>
                 <a:cs typeface="Calibri" pitchFamily="34" charset="-120"/>
               </a:rPr>
-              <a:t>Design system: Variables + 5 component set có variant · prototype Figma</a:t>
+              <a:t>Design system: Variables + component set có variant · prototype Figma nối cả hai app</a:t>
             </a:r>
             <a:endParaRPr lang="en-US" sz="1400" dirty="0"/>
           </a:p>
@@ -32732,7 +32830,7 @@
                 <a:ea typeface="Calibri" pitchFamily="34" charset="-122"/>
                 <a:cs typeface="Calibri" pitchFamily="34" charset="-120"/>
               </a:rPr>
-              <a:t>30</a:t>
+              <a:t>33</a:t>
             </a:r>
             <a:endParaRPr lang="en-US" sz="1050" dirty="0"/>
           </a:p>
@@ -33955,7 +34053,7 @@
                 <a:ea typeface="Calibri" pitchFamily="34" charset="-122"/>
                 <a:cs typeface="Calibri" pitchFamily="34" charset="-120"/>
               </a:rPr>
-              <a:t>31</a:t>
+              <a:t>34</a:t>
             </a:r>
             <a:endParaRPr lang="en-US" sz="1050" dirty="0"/>
           </a:p>
@@ -35076,7 +35174,7 @@
                 <a:ea typeface="Calibri" pitchFamily="34" charset="-122"/>
                 <a:cs typeface="Calibri" pitchFamily="34" charset="-120"/>
               </a:rPr>
-              <a:t>360 DP ĐÃ CÓ · 412 DP CHƯA DỰNG (MÀN HIỆN LÀ VECTOR PHẲNG)</a:t>
+              <a:t>360 DP VÀ 412 DP ĐỀU ĐÃ DỰNG (RÀNG BUỘC CONSTRAINTS)</a:t>
             </a:r>
             <a:endParaRPr lang="en-US" sz="1200" dirty="0"/>
           </a:p>
@@ -35115,7 +35213,7 @@
                 <a:ea typeface="Calibri" pitchFamily="34" charset="-122"/>
                 <a:cs typeface="Calibri" pitchFamily="34" charset="-120"/>
               </a:rPr>
-              <a:t>Minh chứng: Figma Page 03 · assets/figma/</a:t>
+              <a:t>Minh chứng: Figma Page 03 (khung ' v2 · 412') · assets/figma/final-ui-v2/412/</a:t>
             </a:r>
             <a:endParaRPr lang="en-US" sz="1050" dirty="0"/>
           </a:p>
@@ -35154,7 +35252,7 @@
                 <a:ea typeface="Calibri" pitchFamily="34" charset="-122"/>
                 <a:cs typeface="Calibri" pitchFamily="34" charset="-120"/>
               </a:rPr>
-              <a:t>32</a:t>
+              <a:t>35</a:t>
             </a:r>
             <a:endParaRPr lang="en-US" sz="1050" dirty="0"/>
           </a:p>
@@ -35274,89 +35372,6 @@
       </p:sp>
       <p:sp>
         <p:nvSpPr>
-          <p:cNvPr id="12" name="Shape 8"/>
-          <p:cNvSpPr/>
-          <p:nvPr/>
-        </p:nvSpPr>
-        <p:spPr>
-          <a:xfrm>
-            <a:off x="2423160" y="2011680"/>
-            <a:ext cx="1554480" cy="3383280"/>
-          </a:xfrm>
-          <a:prstGeom prst="roundRect">
-            <a:avLst>
-              <a:gd name="adj" fmla="val 5882"/>
-            </a:avLst>
-          </a:prstGeom>
-          <a:solidFill>
-            <a:srgbClr val="FFFFFF"/>
-          </a:solidFill>
-          <a:ln w="15875">
-            <a:solidFill>
-              <a:srgbClr val="B45309"/>
-            </a:solidFill>
-            <a:prstDash val="dash"/>
-          </a:ln>
-        </p:spPr>
-      </p:sp>
-      <p:sp>
-        <p:nvSpPr>
-          <p:cNvPr id="13" name="Text 9"/>
-          <p:cNvSpPr txBox="1"/>
-          <p:nvPr/>
-        </p:nvSpPr>
-        <p:spPr>
-          <a:xfrm>
-            <a:off x="2514600" y="2011680"/>
-            <a:ext cx="1371600" cy="3383280"/>
-          </a:xfrm>
-          <a:prstGeom prst="rect">
-            <a:avLst/>
-          </a:prstGeom>
-          <a:noFill/>
-          <a:ln/>
-        </p:spPr>
-        <p:txBody>
-          <a:bodyPr wrap="square" lIns="0" tIns="0" rIns="0" bIns="0" rtlCol="0" anchor="ctr"/>
-          <a:lstStyle/>
-          <a:p>
-            <a:pPr algn="ctr" indent="0" marL="0">
-              <a:buNone/>
-            </a:pPr>
-            <a:r>
-              <a:rPr lang="en-US" sz="1200" dirty="0">
-                <a:solidFill>
-                  <a:srgbClr val="B45309"/>
-                </a:solidFill>
-                <a:latin typeface="Calibri" pitchFamily="34" charset="0"/>
-                <a:ea typeface="Calibri" pitchFamily="34" charset="-122"/>
-                <a:cs typeface="Calibri" pitchFamily="34" charset="-120"/>
-              </a:rPr>
-              <a:t>412 dp</a:t>
-            </a:r>
-            <a:endParaRPr lang="en-US" sz="1200" dirty="0"/>
-          </a:p>
-          <a:p>
-            <a:pPr algn="ctr" indent="0" marL="0">
-              <a:buNone/>
-            </a:pPr>
-            <a:r>
-              <a:rPr lang="en-US" sz="1200" dirty="0">
-                <a:solidFill>
-                  <a:srgbClr val="B45309"/>
-                </a:solidFill>
-                <a:latin typeface="Calibri" pitchFamily="34" charset="0"/>
-                <a:ea typeface="Calibri" pitchFamily="34" charset="-122"/>
-                <a:cs typeface="Calibri" pitchFamily="34" charset="-120"/>
-              </a:rPr>
-              <a:t>chưa dựng</a:t>
-            </a:r>
-            <a:endParaRPr lang="en-US" sz="1200" dirty="0"/>
-          </a:p>
-        </p:txBody>
-      </p:sp>
-      <p:sp>
-        <p:nvSpPr>
           <p:cNvPr id="14" name="Text 10"/>
           <p:cNvSpPr txBox="1"/>
           <p:nvPr/>
@@ -35454,7 +35469,7 @@
                 <a:ea typeface="Cambria" pitchFamily="34" charset="-122"/>
                 <a:cs typeface="Cambria" pitchFamily="34" charset="-120"/>
               </a:rPr>
-              <a:t>S04 Chi tiết món</a:t>
+              <a:t>S06 Thanh toán</a:t>
             </a:r>
             <a:endParaRPr lang="en-US" sz="1500" dirty="0"/>
           </a:p>
@@ -35505,89 +35520,6 @@
             <a:prstDash val="solid"/>
           </a:ln>
         </p:spPr>
-      </p:sp>
-      <p:sp>
-        <p:nvSpPr>
-          <p:cNvPr id="19" name="Shape 14"/>
-          <p:cNvSpPr/>
-          <p:nvPr/>
-        </p:nvSpPr>
-        <p:spPr>
-          <a:xfrm>
-            <a:off x="6172200" y="2011680"/>
-            <a:ext cx="1554480" cy="3383280"/>
-          </a:xfrm>
-          <a:prstGeom prst="roundRect">
-            <a:avLst>
-              <a:gd name="adj" fmla="val 5882"/>
-            </a:avLst>
-          </a:prstGeom>
-          <a:solidFill>
-            <a:srgbClr val="FFFFFF"/>
-          </a:solidFill>
-          <a:ln w="15875">
-            <a:solidFill>
-              <a:srgbClr val="B45309"/>
-            </a:solidFill>
-            <a:prstDash val="dash"/>
-          </a:ln>
-        </p:spPr>
-      </p:sp>
-      <p:sp>
-        <p:nvSpPr>
-          <p:cNvPr id="20" name="Text 15"/>
-          <p:cNvSpPr txBox="1"/>
-          <p:nvPr/>
-        </p:nvSpPr>
-        <p:spPr>
-          <a:xfrm>
-            <a:off x="6263640" y="2011680"/>
-            <a:ext cx="1371600" cy="3383280"/>
-          </a:xfrm>
-          <a:prstGeom prst="rect">
-            <a:avLst/>
-          </a:prstGeom>
-          <a:noFill/>
-          <a:ln/>
-        </p:spPr>
-        <p:txBody>
-          <a:bodyPr wrap="square" lIns="0" tIns="0" rIns="0" bIns="0" rtlCol="0" anchor="ctr"/>
-          <a:lstStyle/>
-          <a:p>
-            <a:pPr algn="ctr" indent="0" marL="0">
-              <a:buNone/>
-            </a:pPr>
-            <a:r>
-              <a:rPr lang="en-US" sz="1200" dirty="0">
-                <a:solidFill>
-                  <a:srgbClr val="B45309"/>
-                </a:solidFill>
-                <a:latin typeface="Calibri" pitchFamily="34" charset="0"/>
-                <a:ea typeface="Calibri" pitchFamily="34" charset="-122"/>
-                <a:cs typeface="Calibri" pitchFamily="34" charset="-120"/>
-              </a:rPr>
-              <a:t>412 dp</a:t>
-            </a:r>
-            <a:endParaRPr lang="en-US" sz="1200" dirty="0"/>
-          </a:p>
-          <a:p>
-            <a:pPr algn="ctr" indent="0" marL="0">
-              <a:buNone/>
-            </a:pPr>
-            <a:r>
-              <a:rPr lang="en-US" sz="1200" dirty="0">
-                <a:solidFill>
-                  <a:srgbClr val="B45309"/>
-                </a:solidFill>
-                <a:latin typeface="Calibri" pitchFamily="34" charset="0"/>
-                <a:ea typeface="Calibri" pitchFamily="34" charset="-122"/>
-                <a:cs typeface="Calibri" pitchFamily="34" charset="-120"/>
-              </a:rPr>
-              <a:t>chưa dựng</a:t>
-            </a:r>
-            <a:endParaRPr lang="en-US" sz="1200" dirty="0"/>
-          </a:p>
-        </p:txBody>
       </p:sp>
       <p:sp>
         <p:nvSpPr>
@@ -35742,89 +35674,6 @@
       </p:sp>
       <p:sp>
         <p:nvSpPr>
-          <p:cNvPr id="26" name="Shape 20"/>
-          <p:cNvSpPr/>
-          <p:nvPr/>
-        </p:nvSpPr>
-        <p:spPr>
-          <a:xfrm>
-            <a:off x="9921240" y="2011680"/>
-            <a:ext cx="1554480" cy="3383280"/>
-          </a:xfrm>
-          <a:prstGeom prst="roundRect">
-            <a:avLst>
-              <a:gd name="adj" fmla="val 5882"/>
-            </a:avLst>
-          </a:prstGeom>
-          <a:solidFill>
-            <a:srgbClr val="FFFFFF"/>
-          </a:solidFill>
-          <a:ln w="15875">
-            <a:solidFill>
-              <a:srgbClr val="B45309"/>
-            </a:solidFill>
-            <a:prstDash val="dash"/>
-          </a:ln>
-        </p:spPr>
-      </p:sp>
-      <p:sp>
-        <p:nvSpPr>
-          <p:cNvPr id="27" name="Text 21"/>
-          <p:cNvSpPr txBox="1"/>
-          <p:nvPr/>
-        </p:nvSpPr>
-        <p:spPr>
-          <a:xfrm>
-            <a:off x="10012680" y="2011680"/>
-            <a:ext cx="1371600" cy="3383280"/>
-          </a:xfrm>
-          <a:prstGeom prst="rect">
-            <a:avLst/>
-          </a:prstGeom>
-          <a:noFill/>
-          <a:ln/>
-        </p:spPr>
-        <p:txBody>
-          <a:bodyPr wrap="square" lIns="0" tIns="0" rIns="0" bIns="0" rtlCol="0" anchor="ctr"/>
-          <a:lstStyle/>
-          <a:p>
-            <a:pPr algn="ctr" indent="0" marL="0">
-              <a:buNone/>
-            </a:pPr>
-            <a:r>
-              <a:rPr lang="en-US" sz="1200" dirty="0">
-                <a:solidFill>
-                  <a:srgbClr val="B45309"/>
-                </a:solidFill>
-                <a:latin typeface="Calibri" pitchFamily="34" charset="0"/>
-                <a:ea typeface="Calibri" pitchFamily="34" charset="-122"/>
-                <a:cs typeface="Calibri" pitchFamily="34" charset="-120"/>
-              </a:rPr>
-              <a:t>412 dp</a:t>
-            </a:r>
-            <a:endParaRPr lang="en-US" sz="1200" dirty="0"/>
-          </a:p>
-          <a:p>
-            <a:pPr algn="ctr" indent="0" marL="0">
-              <a:buNone/>
-            </a:pPr>
-            <a:r>
-              <a:rPr lang="en-US" sz="1200" dirty="0">
-                <a:solidFill>
-                  <a:srgbClr val="B45309"/>
-                </a:solidFill>
-                <a:latin typeface="Calibri" pitchFamily="34" charset="0"/>
-                <a:ea typeface="Calibri" pitchFamily="34" charset="-122"/>
-                <a:cs typeface="Calibri" pitchFamily="34" charset="-120"/>
-              </a:rPr>
-              <a:t>chưa dựng</a:t>
-            </a:r>
-            <a:endParaRPr lang="en-US" sz="1200" dirty="0"/>
-          </a:p>
-        </p:txBody>
-      </p:sp>
-      <p:sp>
-        <p:nvSpPr>
           <p:cNvPr id="28" name="Text 22"/>
           <p:cNvSpPr txBox="1"/>
           <p:nvPr/>
@@ -35859,6 +35708,183 @@
               <a:t>360 dp</a:t>
             </a:r>
             <a:endParaRPr lang="en-US" sz="1050" dirty="0"/>
+          </a:p>
+        </p:txBody>
+      </p:sp>
+      <p:pic>
+        <p:nvPicPr>
+          <p:cNvPr id="29" name="Picture 28" descr="S02.png"/>
+          <p:cNvPicPr>
+            <a:picLocks noChangeAspect="1"/>
+          </p:cNvPicPr>
+          <p:nvPr/>
+        </p:nvPicPr>
+        <p:blipFill>
+          <a:blip r:embed="rId6"/>
+          <a:stretch>
+            <a:fillRect/>
+          </a:stretch>
+        </p:blipFill>
+        <p:spPr>
+          <a:xfrm>
+            <a:off x="2423160" y="2194116"/>
+            <a:ext cx="1554480" cy="3018407"/>
+          </a:xfrm>
+          <a:prstGeom prst="rect">
+            <a:avLst/>
+          </a:prstGeom>
+        </p:spPr>
+      </p:pic>
+      <p:pic>
+        <p:nvPicPr>
+          <p:cNvPr id="30" name="Picture 29" descr="S06.png"/>
+          <p:cNvPicPr>
+            <a:picLocks noChangeAspect="1"/>
+          </p:cNvPicPr>
+          <p:nvPr/>
+        </p:nvPicPr>
+        <p:blipFill>
+          <a:blip r:embed="rId7"/>
+          <a:stretch>
+            <a:fillRect/>
+          </a:stretch>
+        </p:blipFill>
+        <p:spPr>
+          <a:xfrm>
+            <a:off x="6172200" y="2194116"/>
+            <a:ext cx="1554480" cy="3018407"/>
+          </a:xfrm>
+          <a:prstGeom prst="rect">
+            <a:avLst/>
+          </a:prstGeom>
+        </p:spPr>
+      </p:pic>
+      <p:pic>
+        <p:nvPicPr>
+          <p:cNvPr id="31" name="Picture 30" descr="S05.png"/>
+          <p:cNvPicPr>
+            <a:picLocks noChangeAspect="1"/>
+          </p:cNvPicPr>
+          <p:nvPr/>
+        </p:nvPicPr>
+        <p:blipFill>
+          <a:blip r:embed="rId8"/>
+          <a:stretch>
+            <a:fillRect/>
+          </a:stretch>
+        </p:blipFill>
+        <p:spPr>
+          <a:xfrm>
+            <a:off x="9921240" y="2194116"/>
+            <a:ext cx="1554480" cy="3018407"/>
+          </a:xfrm>
+          <a:prstGeom prst="rect">
+            <a:avLst/>
+          </a:prstGeom>
+        </p:spPr>
+      </p:pic>
+      <p:sp>
+        <p:nvSpPr>
+          <p:cNvPr id="32" name="TextBox 31"/>
+          <p:cNvSpPr txBox="1"/>
+          <p:nvPr/>
+        </p:nvSpPr>
+        <p:spPr>
+          <a:xfrm>
+            <a:off x="2423160" y="5486400"/>
+            <a:ext cx="1554480" cy="274320"/>
+          </a:xfrm>
+          <a:prstGeom prst="rect">
+            <a:avLst/>
+          </a:prstGeom>
+          <a:noFill/>
+        </p:spPr>
+        <p:txBody>
+          <a:bodyPr wrap="none" lIns="0" rIns="0" tIns="0" bIns="0">
+            <a:spAutoFit/>
+          </a:bodyPr>
+          <a:lstStyle/>
+          <a:p>
+            <a:pPr algn="ctr"/>
+            <a:r>
+              <a:rPr sz="1200">
+                <a:solidFill>
+                  <a:srgbClr val="8A5D48"/>
+                </a:solidFill>
+                <a:latin typeface="Cambria"/>
+              </a:rPr>
+              <a:t>412 dp</a:t>
+            </a:r>
+          </a:p>
+        </p:txBody>
+      </p:sp>
+      <p:sp>
+        <p:nvSpPr>
+          <p:cNvPr id="33" name="TextBox 32"/>
+          <p:cNvSpPr txBox="1"/>
+          <p:nvPr/>
+        </p:nvSpPr>
+        <p:spPr>
+          <a:xfrm>
+            <a:off x="6172200" y="5486400"/>
+            <a:ext cx="1554480" cy="274320"/>
+          </a:xfrm>
+          <a:prstGeom prst="rect">
+            <a:avLst/>
+          </a:prstGeom>
+          <a:noFill/>
+        </p:spPr>
+        <p:txBody>
+          <a:bodyPr wrap="none" lIns="0" rIns="0" tIns="0" bIns="0">
+            <a:spAutoFit/>
+          </a:bodyPr>
+          <a:lstStyle/>
+          <a:p>
+            <a:pPr algn="ctr"/>
+            <a:r>
+              <a:rPr sz="1200">
+                <a:solidFill>
+                  <a:srgbClr val="8A5D48"/>
+                </a:solidFill>
+                <a:latin typeface="Cambria"/>
+              </a:rPr>
+              <a:t>412 dp</a:t>
+            </a:r>
+          </a:p>
+        </p:txBody>
+      </p:sp>
+      <p:sp>
+        <p:nvSpPr>
+          <p:cNvPr id="34" name="TextBox 33"/>
+          <p:cNvSpPr txBox="1"/>
+          <p:nvPr/>
+        </p:nvSpPr>
+        <p:spPr>
+          <a:xfrm>
+            <a:off x="9921240" y="5486400"/>
+            <a:ext cx="1554480" cy="274320"/>
+          </a:xfrm>
+          <a:prstGeom prst="rect">
+            <a:avLst/>
+          </a:prstGeom>
+          <a:noFill/>
+        </p:spPr>
+        <p:txBody>
+          <a:bodyPr wrap="none" lIns="0" rIns="0" tIns="0" bIns="0">
+            <a:spAutoFit/>
+          </a:bodyPr>
+          <a:lstStyle/>
+          <a:p>
+            <a:pPr algn="ctr"/>
+            <a:r>
+              <a:rPr sz="1200">
+                <a:solidFill>
+                  <a:srgbClr val="8A5D48"/>
+                </a:solidFill>
+                <a:latin typeface="Cambria"/>
+              </a:rPr>
+              <a:t>412 dp</a:t>
+            </a:r>
           </a:p>
         </p:txBody>
       </p:sp>
@@ -36005,7 +36031,7 @@
                 <a:ea typeface="Calibri" pitchFamily="34" charset="-122"/>
                 <a:cs typeface="Calibri" pitchFamily="34" charset="-120"/>
               </a:rPr>
-              <a:t>FIGMA PAGE 06 · ĐIỂM BẮT ĐẦU + HÀNH ĐỘNG + KẾT QUẢ</a:t>
+              <a:t>FIGMA PAGE 03 (V2) · 12 ĐIỂM BẮT ĐẦU, HÀNH ĐỘNG, KẾT QUẢ</a:t>
             </a:r>
             <a:endParaRPr lang="en-US" sz="1200" dirty="0"/>
           </a:p>
@@ -36044,7 +36070,7 @@
                 <a:ea typeface="Calibri" pitchFamily="34" charset="-122"/>
                 <a:cs typeface="Calibri" pitchFamily="34" charset="-120"/>
               </a:rPr>
-              <a:t>Minh chứng: Figma Page 06</a:t>
+              <a:t>Minh chứng: Figma Page 03 (bản v2) · Page 06 (bản cũ) · tests/figma-proto/hotspots-v2.json</a:t>
             </a:r>
             <a:endParaRPr lang="en-US" sz="1050" dirty="0"/>
           </a:p>
@@ -36083,7 +36109,7 @@
                 <a:ea typeface="Calibri" pitchFamily="34" charset="-122"/>
                 <a:cs typeface="Calibri" pitchFamily="34" charset="-120"/>
               </a:rPr>
-              <a:t>33</a:t>
+              <a:t>36</a:t>
             </a:r>
             <a:endParaRPr lang="en-US" sz="1050" dirty="0"/>
           </a:p>
@@ -36752,7 +36778,7 @@
                 <a:ea typeface="Calibri" pitchFamily="34" charset="-122"/>
                 <a:cs typeface="Calibri" pitchFamily="34" charset="-120"/>
               </a:rPr>
-              <a:t>S06 → S06-ERR → Thử lại / Tiền mặt → S07-CASH</a:t>
+              <a:t>S06-ERR → Thử lại / Tiền mặt → S07-CASH</a:t>
             </a:r>
             <a:endParaRPr lang="en-US" sz="1250" dirty="0"/>
           </a:p>
@@ -37098,7 +37124,7 @@
                 <a:ea typeface="Calibri" pitchFamily="34" charset="-122"/>
                 <a:cs typeface="Calibri" pitchFamily="34" charset="-120"/>
               </a:rPr>
-              <a:t>Minh chứng: Figma Page 06</a:t>
+              <a:t>Minh chứng: Figma Page 03 (v2) · Page 06</a:t>
             </a:r>
             <a:endParaRPr lang="en-US" sz="1050" dirty="0"/>
           </a:p>
@@ -37137,7 +37163,7 @@
                 <a:ea typeface="Calibri" pitchFamily="34" charset="-122"/>
                 <a:cs typeface="Calibri" pitchFamily="34" charset="-120"/>
               </a:rPr>
-              <a:t>34</a:t>
+              <a:t>37</a:t>
             </a:r>
             <a:endParaRPr lang="en-US" sz="1050" dirty="0"/>
           </a:p>
@@ -37817,7 +37843,7 @@
                 <a:ea typeface="Calibri" pitchFamily="34" charset="-122"/>
                 <a:cs typeface="Calibri" pitchFamily="34" charset="-120"/>
               </a:rPr>
-              <a:t>35</a:t>
+              <a:t>38</a:t>
             </a:r>
             <a:endParaRPr lang="en-US" sz="1050" dirty="0"/>
           </a:p>
@@ -37905,7 +37931,7 @@
         </p:nvGraphicFramePr>
         <p:xfrm>
           <a:off x="777240" y="1965960"/>
-          <a:ext cx="4937760" cy="914400"/>
+          <a:ext cx="4937760" cy="3600000"/>
         </p:xfrm>
         <a:graphic>
           <a:graphicData uri="http://schemas.openxmlformats.org/drawingml/2006/table">
@@ -37915,7 +37941,7 @@
                 <a:gridCol w="2377440"/>
                 <a:gridCol w="2560320"/>
               </a:tblGrid>
-              <a:tr h="365760">
+              <a:tr h="400000">
                 <a:tc>
                   <a:txBody>
                     <a:bodyPr/>
@@ -38053,7 +38079,7 @@
                   </a:tcPr>
                 </a:tc>
               </a:tr>
-              <a:tr h="502920">
+              <a:tr h="400000">
                 <a:tc>
                   <a:txBody>
                     <a:bodyPr/>
@@ -38191,7 +38217,7 @@
                   </a:tcPr>
                 </a:tc>
               </a:tr>
-              <a:tr h="502920">
+              <a:tr h="400000">
                 <a:tc>
                   <a:txBody>
                     <a:bodyPr/>
@@ -38329,7 +38355,7 @@
                   </a:tcPr>
                 </a:tc>
               </a:tr>
-              <a:tr h="502920">
+              <a:tr h="400000">
                 <a:tc>
                   <a:txBody>
                     <a:bodyPr/>
@@ -38467,7 +38493,7 @@
                   </a:tcPr>
                 </a:tc>
               </a:tr>
-              <a:tr h="502920">
+              <a:tr h="400000">
                 <a:tc>
                   <a:txBody>
                     <a:bodyPr/>
@@ -38605,7 +38631,7 @@
                   </a:tcPr>
                 </a:tc>
               </a:tr>
-              <a:tr h="502920">
+              <a:tr h="400000">
                 <a:tc>
                   <a:txBody>
                     <a:bodyPr/>
@@ -38743,7 +38769,7 @@
                   </a:tcPr>
                 </a:tc>
               </a:tr>
-              <a:tr h="502920">
+              <a:tr h="400000">
                 <a:tc>
                   <a:txBody>
                     <a:bodyPr/>
@@ -38881,6 +38907,282 @@
                   </a:tcPr>
                 </a:tc>
               </a:tr>
+              <a:tr h="400000">
+                <a:tc>
+                  <a:txBody>
+                    <a:bodyPr/>
+                    <a:lstStyle/>
+                    <a:p>
+                      <a:pPr indent="0" marL="0">
+                        <a:buNone/>
+                      </a:pPr>
+                      <a:r>
+                        <a:rPr lang="en-US" sz="1200" dirty="0">
+                          <a:solidFill>
+                            <a:srgbClr val="2E1B12"/>
+                          </a:solidFill>
+                          <a:latin typeface="Calibri" pitchFamily="34" charset="0"/>
+                          <a:ea typeface="Calibri" pitchFamily="34" charset="-122"/>
+                          <a:cs typeface="Calibri" pitchFamily="34" charset="-120"/>
+                        </a:rPr>
+                        <a:t>color/v2-background #FAF8F5</a:t>
+                      </a:r>
+                      <a:endParaRPr lang="en-US" sz="1200" dirty="0">
+                        <a:latin typeface="Calibri" charset="0"/>
+                        <a:ea typeface="Calibri" charset="0"/>
+                        <a:cs typeface="Calibri" charset="0"/>
+                      </a:endParaRPr>
+                    </a:p>
+                  </a:txBody>
+                  <a:tcPr marL="91440" marR="91440" marT="45720" marB="45720" anchor="ctr">
+                    <a:lnL w="9525" cap="flat" cmpd="sng" algn="ctr">
+                      <a:solidFill>
+                        <a:srgbClr val="E8D9C6"/>
+                      </a:solidFill>
+                      <a:prstDash val="solid"/>
+                      <a:round/>
+                      <a:headEnd type="none" w="med" len="med"/>
+                      <a:tailEnd type="none" w="med" len="med"/>
+                    </a:lnL>
+                    <a:lnR w="9525" cap="flat" cmpd="sng" algn="ctr">
+                      <a:solidFill>
+                        <a:srgbClr val="E8D9C6"/>
+                      </a:solidFill>
+                      <a:prstDash val="solid"/>
+                      <a:round/>
+                      <a:headEnd type="none" w="med" len="med"/>
+                      <a:tailEnd type="none" w="med" len="med"/>
+                    </a:lnR>
+                    <a:lnT w="9525" cap="flat" cmpd="sng" algn="ctr">
+                      <a:solidFill>
+                        <a:srgbClr val="E8D9C6"/>
+                      </a:solidFill>
+                      <a:prstDash val="solid"/>
+                      <a:round/>
+                      <a:headEnd type="none" w="med" len="med"/>
+                      <a:tailEnd type="none" w="med" len="med"/>
+                    </a:lnT>
+                    <a:lnB w="9525" cap="flat" cmpd="sng" algn="ctr">
+                      <a:solidFill>
+                        <a:srgbClr val="E8D9C6"/>
+                      </a:solidFill>
+                      <a:prstDash val="solid"/>
+                      <a:round/>
+                      <a:headEnd type="none" w="med" len="med"/>
+                      <a:tailEnd type="none" w="med" len="med"/>
+                    </a:lnB>
+                    <a:solidFill>
+                      <a:srgbClr val="FFFFFF"/>
+                    </a:solidFill>
+                  </a:tcPr>
+                </a:tc>
+                <a:tc>
+                  <a:txBody>
+                    <a:bodyPr/>
+                    <a:lstStyle/>
+                    <a:p>
+                      <a:pPr indent="0" marL="0">
+                        <a:buNone/>
+                      </a:pPr>
+                      <a:r>
+                        <a:rPr lang="en-US" sz="1200" dirty="0">
+                          <a:solidFill>
+                            <a:srgbClr val="2E1B12"/>
+                          </a:solidFill>
+                          <a:latin typeface="Calibri" pitchFamily="34" charset="0"/>
+                          <a:ea typeface="Calibri" pitchFamily="34" charset="-122"/>
+                          <a:cs typeface="Calibri" pitchFamily="34" charset="-120"/>
+                        </a:rPr>
+                        <a:t>ColorScheme.surface</a:t>
+                      </a:r>
+                      <a:endParaRPr lang="en-US" sz="1200" dirty="0">
+                        <a:latin typeface="Calibri" charset="0"/>
+                        <a:ea typeface="Calibri" charset="0"/>
+                        <a:cs typeface="Calibri" charset="0"/>
+                      </a:endParaRPr>
+                    </a:p>
+                  </a:txBody>
+                  <a:tcPr marL="91440" marR="91440" marT="45720" marB="45720" anchor="ctr">
+                    <a:lnL w="9525" cap="flat" cmpd="sng" algn="ctr">
+                      <a:solidFill>
+                        <a:srgbClr val="E8D9C6"/>
+                      </a:solidFill>
+                      <a:prstDash val="solid"/>
+                      <a:round/>
+                      <a:headEnd type="none" w="med" len="med"/>
+                      <a:tailEnd type="none" w="med" len="med"/>
+                    </a:lnL>
+                    <a:lnR w="9525" cap="flat" cmpd="sng" algn="ctr">
+                      <a:solidFill>
+                        <a:srgbClr val="E8D9C6"/>
+                      </a:solidFill>
+                      <a:prstDash val="solid"/>
+                      <a:round/>
+                      <a:headEnd type="none" w="med" len="med"/>
+                      <a:tailEnd type="none" w="med" len="med"/>
+                    </a:lnR>
+                    <a:lnT w="9525" cap="flat" cmpd="sng" algn="ctr">
+                      <a:solidFill>
+                        <a:srgbClr val="E8D9C6"/>
+                      </a:solidFill>
+                      <a:prstDash val="solid"/>
+                      <a:round/>
+                      <a:headEnd type="none" w="med" len="med"/>
+                      <a:tailEnd type="none" w="med" len="med"/>
+                    </a:lnT>
+                    <a:lnB w="9525" cap="flat" cmpd="sng" algn="ctr">
+                      <a:solidFill>
+                        <a:srgbClr val="E8D9C6"/>
+                      </a:solidFill>
+                      <a:prstDash val="solid"/>
+                      <a:round/>
+                      <a:headEnd type="none" w="med" len="med"/>
+                      <a:tailEnd type="none" w="med" len="med"/>
+                    </a:lnB>
+                    <a:solidFill>
+                      <a:srgbClr val="FFFFFF"/>
+                    </a:solidFill>
+                  </a:tcPr>
+                </a:tc>
+              </a:tr>
+              <a:tr h="400000">
+                <a:tc>
+                  <a:txBody>
+                    <a:bodyPr/>
+                    <a:lstStyle/>
+                    <a:p>
+                      <a:pPr indent="0" marL="0">
+                        <a:buNone/>
+                      </a:pPr>
+                      <a:r>
+                        <a:rPr lang="en-US" sz="1200" dirty="0">
+                          <a:solidFill>
+                            <a:srgbClr val="2E1B12"/>
+                          </a:solidFill>
+                          <a:latin typeface="Calibri" pitchFamily="34" charset="0"/>
+                          <a:ea typeface="Calibri" pitchFamily="34" charset="-122"/>
+                          <a:cs typeface="Calibri" pitchFamily="34" charset="-120"/>
+                        </a:rPr>
+                        <a:t>color/v2-selected #FFF1DE</a:t>
+                      </a:r>
+                      <a:endParaRPr lang="en-US" sz="1200" dirty="0">
+                        <a:latin typeface="Calibri" charset="0"/>
+                        <a:ea typeface="Calibri" charset="0"/>
+                        <a:cs typeface="Calibri" charset="0"/>
+                      </a:endParaRPr>
+                    </a:p>
+                  </a:txBody>
+                  <a:tcPr marL="91440" marR="91440" marT="45720" marB="45720" anchor="ctr">
+                    <a:lnL w="9525" cap="flat" cmpd="sng" algn="ctr">
+                      <a:solidFill>
+                        <a:srgbClr val="E8D9C6"/>
+                      </a:solidFill>
+                      <a:prstDash val="solid"/>
+                      <a:round/>
+                      <a:headEnd type="none" w="med" len="med"/>
+                      <a:tailEnd type="none" w="med" len="med"/>
+                    </a:lnL>
+                    <a:lnR w="9525" cap="flat" cmpd="sng" algn="ctr">
+                      <a:solidFill>
+                        <a:srgbClr val="E8D9C6"/>
+                      </a:solidFill>
+                      <a:prstDash val="solid"/>
+                      <a:round/>
+                      <a:headEnd type="none" w="med" len="med"/>
+                      <a:tailEnd type="none" w="med" len="med"/>
+                    </a:lnR>
+                    <a:lnT w="9525" cap="flat" cmpd="sng" algn="ctr">
+                      <a:solidFill>
+                        <a:srgbClr val="E8D9C6"/>
+                      </a:solidFill>
+                      <a:prstDash val="solid"/>
+                      <a:round/>
+                      <a:headEnd type="none" w="med" len="med"/>
+                      <a:tailEnd type="none" w="med" len="med"/>
+                    </a:lnT>
+                    <a:lnB w="9525" cap="flat" cmpd="sng" algn="ctr">
+                      <a:solidFill>
+                        <a:srgbClr val="E8D9C6"/>
+                      </a:solidFill>
+                      <a:prstDash val="solid"/>
+                      <a:round/>
+                      <a:headEnd type="none" w="med" len="med"/>
+                      <a:tailEnd type="none" w="med" len="med"/>
+                    </a:lnB>
+                    <a:solidFill>
+                      <a:srgbClr val="FFFFFF"/>
+                    </a:solidFill>
+                  </a:tcPr>
+                </a:tc>
+                <a:tc>
+                  <a:txBody>
+                    <a:bodyPr/>
+                    <a:lstStyle/>
+                    <a:p>
+                      <a:pPr indent="0" marL="0">
+                        <a:buNone/>
+                      </a:pPr>
+                      <a:r>
+                        <a:rPr lang="en-US" sz="1200" dirty="0">
+                          <a:solidFill>
+                            <a:srgbClr val="2E1B12"/>
+                          </a:solidFill>
+                          <a:latin typeface="Calibri" pitchFamily="34" charset="0"/>
+                          <a:ea typeface="Calibri" pitchFamily="34" charset="-122"/>
+                          <a:cs typeface="Calibri" pitchFamily="34" charset="-120"/>
+                        </a:rPr>
+                        <a:t>ColorScheme.secondaryContainer</a:t>
+                      </a:r>
+                      <a:endParaRPr lang="en-US" sz="1200" dirty="0">
+                        <a:latin typeface="Calibri" charset="0"/>
+                        <a:ea typeface="Calibri" charset="0"/>
+                        <a:cs typeface="Calibri" charset="0"/>
+                      </a:endParaRPr>
+                    </a:p>
+                  </a:txBody>
+                  <a:tcPr marL="91440" marR="91440" marT="45720" marB="45720" anchor="ctr">
+                    <a:lnL w="9525" cap="flat" cmpd="sng" algn="ctr">
+                      <a:solidFill>
+                        <a:srgbClr val="E8D9C6"/>
+                      </a:solidFill>
+                      <a:prstDash val="solid"/>
+                      <a:round/>
+                      <a:headEnd type="none" w="med" len="med"/>
+                      <a:tailEnd type="none" w="med" len="med"/>
+                    </a:lnL>
+                    <a:lnR w="9525" cap="flat" cmpd="sng" algn="ctr">
+                      <a:solidFill>
+                        <a:srgbClr val="E8D9C6"/>
+                      </a:solidFill>
+                      <a:prstDash val="solid"/>
+                      <a:round/>
+                      <a:headEnd type="none" w="med" len="med"/>
+                      <a:tailEnd type="none" w="med" len="med"/>
+                    </a:lnR>
+                    <a:lnT w="9525" cap="flat" cmpd="sng" algn="ctr">
+                      <a:solidFill>
+                        <a:srgbClr val="E8D9C6"/>
+                      </a:solidFill>
+                      <a:prstDash val="solid"/>
+                      <a:round/>
+                      <a:headEnd type="none" w="med" len="med"/>
+                      <a:tailEnd type="none" w="med" len="med"/>
+                    </a:lnT>
+                    <a:lnB w="9525" cap="flat" cmpd="sng" algn="ctr">
+                      <a:solidFill>
+                        <a:srgbClr val="E8D9C6"/>
+                      </a:solidFill>
+                      <a:prstDash val="solid"/>
+                      <a:round/>
+                      <a:headEnd type="none" w="med" len="med"/>
+                      <a:tailEnd type="none" w="med" len="med"/>
+                    </a:lnB>
+                    <a:solidFill>
+                      <a:srgbClr val="FFFFFF"/>
+                    </a:solidFill>
+                  </a:tcPr>
+                </a:tc>
+              </a:tr>
             </a:tbl>
           </a:graphicData>
         </a:graphic>
@@ -38967,7 +39269,7 @@
         </p:nvGraphicFramePr>
         <p:xfrm>
           <a:off x="6492240" y="1965960"/>
-          <a:ext cx="4937760" cy="914400"/>
+          <a:ext cx="4937760" cy="3600000"/>
         </p:xfrm>
         <a:graphic>
           <a:graphicData uri="http://schemas.openxmlformats.org/drawingml/2006/table">
@@ -38977,7 +39279,7 @@
                 <a:gridCol w="2011680"/>
                 <a:gridCol w="2926080"/>
               </a:tblGrid>
-              <a:tr h="365760">
+              <a:tr h="400000">
                 <a:tc>
                   <a:txBody>
                     <a:bodyPr/>
@@ -39115,7 +39417,7 @@
                   </a:tcPr>
                 </a:tc>
               </a:tr>
-              <a:tr h="502920">
+              <a:tr h="400000">
                 <a:tc>
                   <a:txBody>
                     <a:bodyPr/>
@@ -39253,7 +39555,7 @@
                   </a:tcPr>
                 </a:tc>
               </a:tr>
-              <a:tr h="502920">
+              <a:tr h="400000">
                 <a:tc>
                   <a:txBody>
                     <a:bodyPr/>
@@ -39391,7 +39693,7 @@
                   </a:tcPr>
                 </a:tc>
               </a:tr>
-              <a:tr h="502920">
+              <a:tr h="400000">
                 <a:tc>
                   <a:txBody>
                     <a:bodyPr/>
@@ -39529,7 +39831,7 @@
                   </a:tcPr>
                 </a:tc>
               </a:tr>
-              <a:tr h="502920">
+              <a:tr h="400000">
                 <a:tc>
                   <a:txBody>
                     <a:bodyPr/>
@@ -39667,7 +39969,7 @@
                   </a:tcPr>
                 </a:tc>
               </a:tr>
-              <a:tr h="502920">
+              <a:tr h="400000">
                 <a:tc>
                   <a:txBody>
                     <a:bodyPr/>
@@ -39805,7 +40107,7 @@
                   </a:tcPr>
                 </a:tc>
               </a:tr>
-              <a:tr h="502920">
+              <a:tr h="400000">
                 <a:tc>
                   <a:txBody>
                     <a:bodyPr/>
@@ -39943,6 +40245,282 @@
                   </a:tcPr>
                 </a:tc>
               </a:tr>
+              <a:tr h="400000">
+                <a:tc>
+                  <a:txBody>
+                    <a:bodyPr/>
+                    <a:lstStyle/>
+                    <a:p>
+                      <a:pPr indent="0" marL="0">
+                        <a:buNone/>
+                      </a:pPr>
+                      <a:r>
+                        <a:rPr lang="en-US" sz="1200" dirty="0">
+                          <a:solidFill>
+                            <a:srgbClr val="2E1B12"/>
+                          </a:solidFill>
+                          <a:latin typeface="Calibri" pitchFamily="34" charset="0"/>
+                          <a:ea typeface="Calibri" pitchFamily="34" charset="-122"/>
+                          <a:cs typeface="Calibri" pitchFamily="34" charset="-120"/>
+                        </a:rPr>
+                        <a:t>Chip</a:t>
+                      </a:r>
+                      <a:endParaRPr lang="en-US" sz="1200" dirty="0">
+                        <a:latin typeface="Calibri" charset="0"/>
+                        <a:ea typeface="Calibri" charset="0"/>
+                        <a:cs typeface="Calibri" charset="0"/>
+                      </a:endParaRPr>
+                    </a:p>
+                  </a:txBody>
+                  <a:tcPr marL="91440" marR="91440" marT="45720" marB="45720" anchor="ctr">
+                    <a:lnL w="9525" cap="flat" cmpd="sng" algn="ctr">
+                      <a:solidFill>
+                        <a:srgbClr val="E8D9C6"/>
+                      </a:solidFill>
+                      <a:prstDash val="solid"/>
+                      <a:round/>
+                      <a:headEnd type="none" w="med" len="med"/>
+                      <a:tailEnd type="none" w="med" len="med"/>
+                    </a:lnL>
+                    <a:lnR w="9525" cap="flat" cmpd="sng" algn="ctr">
+                      <a:solidFill>
+                        <a:srgbClr val="E8D9C6"/>
+                      </a:solidFill>
+                      <a:prstDash val="solid"/>
+                      <a:round/>
+                      <a:headEnd type="none" w="med" len="med"/>
+                      <a:tailEnd type="none" w="med" len="med"/>
+                    </a:lnR>
+                    <a:lnT w="9525" cap="flat" cmpd="sng" algn="ctr">
+                      <a:solidFill>
+                        <a:srgbClr val="E8D9C6"/>
+                      </a:solidFill>
+                      <a:prstDash val="solid"/>
+                      <a:round/>
+                      <a:headEnd type="none" w="med" len="med"/>
+                      <a:tailEnd type="none" w="med" len="med"/>
+                    </a:lnT>
+                    <a:lnB w="9525" cap="flat" cmpd="sng" algn="ctr">
+                      <a:solidFill>
+                        <a:srgbClr val="E8D9C6"/>
+                      </a:solidFill>
+                      <a:prstDash val="solid"/>
+                      <a:round/>
+                      <a:headEnd type="none" w="med" len="med"/>
+                      <a:tailEnd type="none" w="med" len="med"/>
+                    </a:lnB>
+                    <a:solidFill>
+                      <a:srgbClr val="FFFFFF"/>
+                    </a:solidFill>
+                  </a:tcPr>
+                </a:tc>
+                <a:tc>
+                  <a:txBody>
+                    <a:bodyPr/>
+                    <a:lstStyle/>
+                    <a:p>
+                      <a:pPr indent="0" marL="0">
+                        <a:buNone/>
+                      </a:pPr>
+                      <a:r>
+                        <a:rPr lang="en-US" sz="1200" dirty="0">
+                          <a:solidFill>
+                            <a:srgbClr val="2E1B12"/>
+                          </a:solidFill>
+                          <a:latin typeface="Calibri" pitchFamily="34" charset="0"/>
+                          <a:ea typeface="Calibri" pitchFamily="34" charset="-122"/>
+                          <a:cs typeface="Calibri" pitchFamily="34" charset="-120"/>
+                        </a:rPr>
+                        <a:t>ChoiceChip (48 dp)</a:t>
+                      </a:r>
+                      <a:endParaRPr lang="en-US" sz="1200" dirty="0">
+                        <a:latin typeface="Calibri" charset="0"/>
+                        <a:ea typeface="Calibri" charset="0"/>
+                        <a:cs typeface="Calibri" charset="0"/>
+                      </a:endParaRPr>
+                    </a:p>
+                  </a:txBody>
+                  <a:tcPr marL="91440" marR="91440" marT="45720" marB="45720" anchor="ctr">
+                    <a:lnL w="9525" cap="flat" cmpd="sng" algn="ctr">
+                      <a:solidFill>
+                        <a:srgbClr val="E8D9C6"/>
+                      </a:solidFill>
+                      <a:prstDash val="solid"/>
+                      <a:round/>
+                      <a:headEnd type="none" w="med" len="med"/>
+                      <a:tailEnd type="none" w="med" len="med"/>
+                    </a:lnL>
+                    <a:lnR w="9525" cap="flat" cmpd="sng" algn="ctr">
+                      <a:solidFill>
+                        <a:srgbClr val="E8D9C6"/>
+                      </a:solidFill>
+                      <a:prstDash val="solid"/>
+                      <a:round/>
+                      <a:headEnd type="none" w="med" len="med"/>
+                      <a:tailEnd type="none" w="med" len="med"/>
+                    </a:lnR>
+                    <a:lnT w="9525" cap="flat" cmpd="sng" algn="ctr">
+                      <a:solidFill>
+                        <a:srgbClr val="E8D9C6"/>
+                      </a:solidFill>
+                      <a:prstDash val="solid"/>
+                      <a:round/>
+                      <a:headEnd type="none" w="med" len="med"/>
+                      <a:tailEnd type="none" w="med" len="med"/>
+                    </a:lnT>
+                    <a:lnB w="9525" cap="flat" cmpd="sng" algn="ctr">
+                      <a:solidFill>
+                        <a:srgbClr val="E8D9C6"/>
+                      </a:solidFill>
+                      <a:prstDash val="solid"/>
+                      <a:round/>
+                      <a:headEnd type="none" w="med" len="med"/>
+                      <a:tailEnd type="none" w="med" len="med"/>
+                    </a:lnB>
+                    <a:solidFill>
+                      <a:srgbClr val="FFFFFF"/>
+                    </a:solidFill>
+                  </a:tcPr>
+                </a:tc>
+              </a:tr>
+              <a:tr h="400000">
+                <a:tc>
+                  <a:txBody>
+                    <a:bodyPr/>
+                    <a:lstStyle/>
+                    <a:p>
+                      <a:pPr indent="0" marL="0">
+                        <a:buNone/>
+                      </a:pPr>
+                      <a:r>
+                        <a:rPr lang="en-US" sz="1200" dirty="0">
+                          <a:solidFill>
+                            <a:srgbClr val="2E1B12"/>
+                          </a:solidFill>
+                          <a:latin typeface="Calibri" pitchFamily="34" charset="0"/>
+                          <a:ea typeface="Calibri" pitchFamily="34" charset="-122"/>
+                          <a:cs typeface="Calibri" pitchFamily="34" charset="-120"/>
+                        </a:rPr>
+                        <a:t>IconButton</a:t>
+                      </a:r>
+                      <a:endParaRPr lang="en-US" sz="1200" dirty="0">
+                        <a:latin typeface="Calibri" charset="0"/>
+                        <a:ea typeface="Calibri" charset="0"/>
+                        <a:cs typeface="Calibri" charset="0"/>
+                      </a:endParaRPr>
+                    </a:p>
+                  </a:txBody>
+                  <a:tcPr marL="91440" marR="91440" marT="45720" marB="45720" anchor="ctr">
+                    <a:lnL w="9525" cap="flat" cmpd="sng" algn="ctr">
+                      <a:solidFill>
+                        <a:srgbClr val="E8D9C6"/>
+                      </a:solidFill>
+                      <a:prstDash val="solid"/>
+                      <a:round/>
+                      <a:headEnd type="none" w="med" len="med"/>
+                      <a:tailEnd type="none" w="med" len="med"/>
+                    </a:lnL>
+                    <a:lnR w="9525" cap="flat" cmpd="sng" algn="ctr">
+                      <a:solidFill>
+                        <a:srgbClr val="E8D9C6"/>
+                      </a:solidFill>
+                      <a:prstDash val="solid"/>
+                      <a:round/>
+                      <a:headEnd type="none" w="med" len="med"/>
+                      <a:tailEnd type="none" w="med" len="med"/>
+                    </a:lnR>
+                    <a:lnT w="9525" cap="flat" cmpd="sng" algn="ctr">
+                      <a:solidFill>
+                        <a:srgbClr val="E8D9C6"/>
+                      </a:solidFill>
+                      <a:prstDash val="solid"/>
+                      <a:round/>
+                      <a:headEnd type="none" w="med" len="med"/>
+                      <a:tailEnd type="none" w="med" len="med"/>
+                    </a:lnT>
+                    <a:lnB w="9525" cap="flat" cmpd="sng" algn="ctr">
+                      <a:solidFill>
+                        <a:srgbClr val="E8D9C6"/>
+                      </a:solidFill>
+                      <a:prstDash val="solid"/>
+                      <a:round/>
+                      <a:headEnd type="none" w="med" len="med"/>
+                      <a:tailEnd type="none" w="med" len="med"/>
+                    </a:lnB>
+                    <a:solidFill>
+                      <a:srgbClr val="FFFFFF"/>
+                    </a:solidFill>
+                  </a:tcPr>
+                </a:tc>
+                <a:tc>
+                  <a:txBody>
+                    <a:bodyPr/>
+                    <a:lstStyle/>
+                    <a:p>
+                      <a:pPr indent="0" marL="0">
+                        <a:buNone/>
+                      </a:pPr>
+                      <a:r>
+                        <a:rPr lang="en-US" sz="1200" dirty="0">
+                          <a:solidFill>
+                            <a:srgbClr val="2E1B12"/>
+                          </a:solidFill>
+                          <a:latin typeface="Calibri" pitchFamily="34" charset="0"/>
+                          <a:ea typeface="Calibri" pitchFamily="34" charset="-122"/>
+                          <a:cs typeface="Calibri" pitchFamily="34" charset="-120"/>
+                        </a:rPr>
+                        <a:t>IconButton, minimumSize 48 × 48</a:t>
+                      </a:r>
+                      <a:endParaRPr lang="en-US" sz="1200" dirty="0">
+                        <a:latin typeface="Calibri" charset="0"/>
+                        <a:ea typeface="Calibri" charset="0"/>
+                        <a:cs typeface="Calibri" charset="0"/>
+                      </a:endParaRPr>
+                    </a:p>
+                  </a:txBody>
+                  <a:tcPr marL="91440" marR="91440" marT="45720" marB="45720" anchor="ctr">
+                    <a:lnL w="9525" cap="flat" cmpd="sng" algn="ctr">
+                      <a:solidFill>
+                        <a:srgbClr val="E8D9C6"/>
+                      </a:solidFill>
+                      <a:prstDash val="solid"/>
+                      <a:round/>
+                      <a:headEnd type="none" w="med" len="med"/>
+                      <a:tailEnd type="none" w="med" len="med"/>
+                    </a:lnL>
+                    <a:lnR w="9525" cap="flat" cmpd="sng" algn="ctr">
+                      <a:solidFill>
+                        <a:srgbClr val="E8D9C6"/>
+                      </a:solidFill>
+                      <a:prstDash val="solid"/>
+                      <a:round/>
+                      <a:headEnd type="none" w="med" len="med"/>
+                      <a:tailEnd type="none" w="med" len="med"/>
+                    </a:lnR>
+                    <a:lnT w="9525" cap="flat" cmpd="sng" algn="ctr">
+                      <a:solidFill>
+                        <a:srgbClr val="E8D9C6"/>
+                      </a:solidFill>
+                      <a:prstDash val="solid"/>
+                      <a:round/>
+                      <a:headEnd type="none" w="med" len="med"/>
+                      <a:tailEnd type="none" w="med" len="med"/>
+                    </a:lnT>
+                    <a:lnB w="9525" cap="flat" cmpd="sng" algn="ctr">
+                      <a:solidFill>
+                        <a:srgbClr val="E8D9C6"/>
+                      </a:solidFill>
+                      <a:prstDash val="solid"/>
+                      <a:round/>
+                      <a:headEnd type="none" w="med" len="med"/>
+                      <a:tailEnd type="none" w="med" len="med"/>
+                    </a:lnB>
+                    <a:solidFill>
+                      <a:srgbClr val="FFFFFF"/>
+                    </a:solidFill>
+                  </a:tcPr>
+                </a:tc>
+              </a:tr>
             </a:tbl>
           </a:graphicData>
         </a:graphic>
@@ -40090,7 +40668,7 @@
                 <a:ea typeface="Calibri" pitchFamily="34" charset="-122"/>
                 <a:cs typeface="Calibri" pitchFamily="34" charset="-120"/>
               </a:rPr>
-              <a:t>8 MÀN × 6 MỤC · PHẠM VI THIẾT KẾ, KHÔNG VIẾT CODE</a:t>
+              <a:t>S01–S30 + K01–K15 × 6 MỤC · PHẠM VI THIẾT KẾ, KHÔNG VIẾT CODE</a:t>
             </a:r>
             <a:endParaRPr lang="en-US" sz="1200" dirty="0"/>
           </a:p>
@@ -40129,7 +40707,7 @@
                 <a:ea typeface="Calibri" pitchFamily="34" charset="-122"/>
                 <a:cs typeface="Calibri" pitchFamily="34" charset="-120"/>
               </a:rPr>
-              <a:t>Minh chứng: handoff/flutter-handoff.md mục 2–3</a:t>
+              <a:t>Minh chứng: handoff/flutter-handoff.md mục 2–6</a:t>
             </a:r>
             <a:endParaRPr lang="en-US" sz="1050" dirty="0"/>
           </a:p>
@@ -40168,7 +40746,7 @@
                 <a:ea typeface="Calibri" pitchFamily="34" charset="-122"/>
                 <a:cs typeface="Calibri" pitchFamily="34" charset="-120"/>
               </a:rPr>
-              <a:t>36</a:t>
+              <a:t>39</a:t>
             </a:r>
             <a:endParaRPr lang="en-US" sz="1050" dirty="0"/>
           </a:p>
@@ -41207,7 +41785,7 @@
                 <a:ea typeface="Calibri" pitchFamily="34" charset="-122"/>
                 <a:cs typeface="Calibri" pitchFamily="34" charset="-120"/>
               </a:rPr>
-              <a:t>Token + 2 bảng mapping</a:t>
+              <a:t>Token + 2 bảng mapping (kèm token v2)</a:t>
             </a:r>
             <a:endParaRPr lang="en-US" sz="1300" dirty="0"/>
           </a:p>
@@ -41228,7 +41806,7 @@
                 <a:ea typeface="Calibri" pitchFamily="34" charset="-122"/>
                 <a:cs typeface="Calibri" pitchFamily="34" charset="-120"/>
               </a:rPr>
-              <a:t>6 mục cho cả 8 màn</a:t>
+              <a:t>6 mục cho S01–S30 và K01–K15</a:t>
             </a:r>
             <a:endParaRPr lang="en-US" sz="1300" dirty="0"/>
           </a:p>
@@ -41379,7 +41957,7 @@
                 <a:ea typeface="Calibri" pitchFamily="34" charset="-122"/>
                 <a:cs typeface="Calibri" pitchFamily="34" charset="-120"/>
               </a:rPr>
-              <a:t>Chưa usability test Flow 1 (&lt; 35 giây)</a:t>
+              <a:t>Chưa usability test Flow 1 (&lt; 35 giây) và chưa có phản biện của AI khác cho bản v2</a:t>
             </a:r>
             <a:endParaRPr lang="en-US" sz="1300" dirty="0"/>
           </a:p>
@@ -41400,7 +41978,7 @@
                 <a:ea typeface="Calibri" pitchFamily="34" charset="-122"/>
                 <a:cs typeface="Calibri" pitchFamily="34" charset="-120"/>
               </a:rPr>
-              <a:t>Figma: nút −/+ 48 dp, chữ ≥ 14 sp, màn 412 dp, thay bằng instance</a:t>
+              <a:t>Chạy Present trên prototype v2 và cập nhật ảnh chuẩn Playwright</a:t>
             </a:r>
             <a:endParaRPr lang="en-US" sz="1300" dirty="0"/>
           </a:p>
@@ -42083,6 +42661,1038 @@
 </p:sld>
 </file>
 
+<file path=ppt/slides/slide39.xml><?xml version="1.0" encoding="utf-8"?>
+<p:sld xmlns:a="http://schemas.openxmlformats.org/drawingml/2006/main" xmlns:p="http://schemas.openxmlformats.org/presentationml/2006/main" xmlns:r="http://schemas.openxmlformats.org/officeDocument/2006/relationships">
+  <p:cSld>
+    <p:bg>
+      <p:bgPr>
+        <a:solidFill>
+          <a:srgbClr val="FBF4EA"/>
+        </a:solidFill>
+      </p:bgPr>
+    </p:bg>
+    <p:spTree>
+      <p:nvGrpSpPr>
+        <p:cNvPr id="1" name=""/>
+        <p:cNvGrpSpPr/>
+        <p:nvPr/>
+      </p:nvGrpSpPr>
+      <p:grpSpPr/>
+      <p:sp>
+        <p:nvSpPr>
+          <p:cNvPr id="2" name="Text 0"/>
+          <p:cNvSpPr txBox="1"/>
+          <p:nvPr/>
+        </p:nvSpPr>
+        <p:spPr>
+          <a:xfrm>
+            <a:off x="548640" y="347472"/>
+            <a:ext cx="640080" cy="594360"/>
+          </a:xfrm>
+          <a:prstGeom prst="rect">
+            <a:avLst/>
+          </a:prstGeom>
+          <a:noFill/>
+          <a:ln/>
+        </p:spPr>
+        <p:txBody>
+          <a:bodyPr wrap="square" lIns="0" tIns="0" rIns="0" bIns="0" rtlCol="0" anchor="ctr"/>
+          <a:lstStyle/>
+          <a:p>
+            <a:pPr indent="0" marL="0">
+              <a:buNone/>
+            </a:pPr>
+            <a:r>
+              <a:rPr lang="en-US" sz="3000" b="1" dirty="0">
+                <a:solidFill>
+                  <a:srgbClr val="F69D39"/>
+                </a:solidFill>
+                <a:latin typeface="Cambria" pitchFamily="34" charset="0"/>
+                <a:ea typeface="Cambria" pitchFamily="34" charset="-122"/>
+                <a:cs typeface="Cambria" pitchFamily="34" charset="-120"/>
+              </a:rPr>
+              <a:t>7.</a:t>
+            </a:r>
+            <a:endParaRPr lang="en-US" sz="3000" dirty="0"/>
+          </a:p>
+        </p:txBody>
+      </p:sp>
+      <p:sp>
+        <p:nvSpPr>
+          <p:cNvPr id="3" name="Text 1"/>
+          <p:cNvSpPr txBox="1"/>
+          <p:nvPr/>
+        </p:nvSpPr>
+        <p:spPr>
+          <a:xfrm>
+            <a:off x="1143000" y="347472"/>
+            <a:ext cx="9875520" cy="594360"/>
+          </a:xfrm>
+          <a:prstGeom prst="rect">
+            <a:avLst/>
+          </a:prstGeom>
+          <a:noFill/>
+          <a:ln/>
+        </p:spPr>
+        <p:txBody>
+          <a:bodyPr wrap="square" lIns="0" tIns="0" rIns="0" bIns="0" rtlCol="0" anchor="ctr"/>
+          <a:lstStyle/>
+          <a:p>
+            <a:pPr indent="0" marL="0">
+              <a:buNone/>
+            </a:pPr>
+            <a:r>
+              <a:rPr lang="en-US" sz="2800" b="1" dirty="0">
+                <a:solidFill>
+                  <a:srgbClr val="622B14"/>
+                </a:solidFill>
+                <a:latin typeface="Cambria" pitchFamily="34" charset="0"/>
+                <a:ea typeface="Cambria" pitchFamily="34" charset="-122"/>
+                <a:cs typeface="Cambria" pitchFamily="34" charset="-120"/>
+              </a:rPr>
+              <a:t>Design Decisions — Phản biện giao diện</a:t>
+            </a:r>
+            <a:endParaRPr lang="en-US" sz="2800" dirty="0"/>
+          </a:p>
+        </p:txBody>
+      </p:sp>
+      <p:sp>
+        <p:nvSpPr>
+          <p:cNvPr id="4" name="Text 2"/>
+          <p:cNvSpPr txBox="1"/>
+          <p:nvPr/>
+        </p:nvSpPr>
+        <p:spPr>
+          <a:xfrm>
+            <a:off x="548640" y="987552"/>
+            <a:ext cx="10972800" cy="292608"/>
+          </a:xfrm>
+          <a:prstGeom prst="rect">
+            <a:avLst/>
+          </a:prstGeom>
+          <a:noFill/>
+          <a:ln/>
+        </p:spPr>
+        <p:txBody>
+          <a:bodyPr wrap="square" lIns="0" tIns="0" rIns="0" bIns="0" rtlCol="0" anchor="ctr"/>
+          <a:lstStyle/>
+          <a:p>
+            <a:pPr indent="0" marL="0">
+              <a:buNone/>
+            </a:pPr>
+            <a:r>
+              <a:rPr lang="en-US" sz="1200" b="1" spc="100" kern="0" dirty="0">
+                <a:solidFill>
+                  <a:srgbClr val="B45309"/>
+                </a:solidFill>
+                <a:latin typeface="Calibri" pitchFamily="34" charset="0"/>
+                <a:ea typeface="Calibri" pitchFamily="34" charset="-122"/>
+                <a:cs typeface="Calibri" pitchFamily="34" charset="-120"/>
+              </a:rPr>
+              <a:t>A01–A15 → FINAL UI V2 · SỐ ĐO TRƯỚC VÀ SAU</a:t>
+            </a:r>
+            <a:endParaRPr lang="en-US" sz="1200" dirty="0"/>
+          </a:p>
+        </p:txBody>
+      </p:sp>
+      <p:sp>
+        <p:nvSpPr>
+          <p:cNvPr id="5" name="Text 3"/>
+          <p:cNvSpPr txBox="1"/>
+          <p:nvPr/>
+        </p:nvSpPr>
+        <p:spPr>
+          <a:xfrm>
+            <a:off x="548640" y="6419088"/>
+            <a:ext cx="10515600" cy="274320"/>
+          </a:xfrm>
+          <a:prstGeom prst="rect">
+            <a:avLst/>
+          </a:prstGeom>
+          <a:noFill/>
+          <a:ln/>
+        </p:spPr>
+        <p:txBody>
+          <a:bodyPr wrap="square" lIns="0" tIns="0" rIns="0" bIns="0" rtlCol="0" anchor="ctr"/>
+          <a:lstStyle/>
+          <a:p>
+            <a:pPr indent="0" marL="0">
+              <a:buNone/>
+            </a:pPr>
+            <a:r>
+              <a:rPr lang="en-US" sz="1050" i="1" dirty="0">
+                <a:solidFill>
+                  <a:srgbClr val="6B5B52"/>
+                </a:solidFill>
+                <a:latin typeface="Calibri" pitchFamily="34" charset="0"/>
+                <a:ea typeface="Calibri" pitchFamily="34" charset="-122"/>
+                <a:cs typeface="Calibri" pitchFamily="34" charset="-120"/>
+              </a:rPr>
+              <a:t>Minh chứng: ai/phan-bien-giao-dien/ · tests/audit/ (Playwright + Figma Plugin API)</a:t>
+            </a:r>
+            <a:endParaRPr lang="en-US" sz="1050" dirty="0"/>
+          </a:p>
+        </p:txBody>
+      </p:sp>
+      <p:sp>
+        <p:nvSpPr>
+          <p:cNvPr id="6" name="Text 4"/>
+          <p:cNvSpPr txBox="1"/>
+          <p:nvPr/>
+        </p:nvSpPr>
+        <p:spPr>
+          <a:xfrm>
+            <a:off x="11247120" y="6419088"/>
+            <a:ext cx="457200" cy="274320"/>
+          </a:xfrm>
+          <a:prstGeom prst="rect">
+            <a:avLst/>
+          </a:prstGeom>
+          <a:noFill/>
+          <a:ln/>
+        </p:spPr>
+        <p:txBody>
+          <a:bodyPr wrap="square" lIns="0" tIns="0" rIns="0" bIns="0" rtlCol="0" anchor="ctr"/>
+          <a:lstStyle/>
+          <a:p>
+            <a:pPr algn="r" indent="0" marL="0">
+              <a:buNone/>
+            </a:pPr>
+            <a:r>
+              <a:rPr lang="en-US" sz="1050" dirty="0">
+                <a:solidFill>
+                  <a:srgbClr val="6B5B52"/>
+                </a:solidFill>
+                <a:latin typeface="Calibri" pitchFamily="34" charset="0"/>
+                <a:ea typeface="Calibri" pitchFamily="34" charset="-122"/>
+                <a:cs typeface="Calibri" pitchFamily="34" charset="-120"/>
+              </a:rPr>
+              <a:t>26</a:t>
+            </a:r>
+            <a:endParaRPr lang="en-US" sz="1050" dirty="0"/>
+          </a:p>
+        </p:txBody>
+      </p:sp>
+      <p:sp>
+        <p:nvSpPr>
+          <p:cNvPr id="7" name="Rounded Rectangle 6"/>
+          <p:cNvSpPr/>
+          <p:nvPr/>
+        </p:nvSpPr>
+        <p:spPr>
+          <a:xfrm>
+            <a:off x="548640" y="1417320"/>
+            <a:ext cx="6583680" cy="4800600"/>
+          </a:xfrm>
+          <a:prstGeom prst="roundRect">
+            <a:avLst>
+              <a:gd name="adj" fmla="val 4000"/>
+            </a:avLst>
+          </a:prstGeom>
+          <a:solidFill>
+            <a:srgbClr val="FFFFFF"/>
+          </a:solidFill>
+          <a:ln w="9525">
+            <a:solidFill>
+              <a:srgbClr val="E8D9C6"/>
+            </a:solidFill>
+          </a:ln>
+          <a:effectLst/>
+        </p:spPr>
+        <p:style>
+          <a:lnRef idx="1">
+            <a:schemeClr val="accent1"/>
+          </a:lnRef>
+          <a:fillRef idx="3">
+            <a:schemeClr val="accent1"/>
+          </a:fillRef>
+          <a:effectRef idx="2">
+            <a:schemeClr val="accent1"/>
+          </a:effectRef>
+          <a:fontRef idx="minor">
+            <a:schemeClr val="lt1"/>
+          </a:fontRef>
+        </p:style>
+        <p:txBody>
+          <a:bodyPr rtlCol="0" anchor="ctr"/>
+          <a:lstStyle/>
+          <a:p>
+            <a:pPr algn="ctr"/>
+          </a:p>
+        </p:txBody>
+      </p:sp>
+      <p:sp>
+        <p:nvSpPr>
+          <p:cNvPr id="8" name="TextBox 7"/>
+          <p:cNvSpPr txBox="1"/>
+          <p:nvPr/>
+        </p:nvSpPr>
+        <p:spPr>
+          <a:xfrm>
+            <a:off x="777240" y="1554480"/>
+            <a:ext cx="6126480" cy="320040"/>
+          </a:xfrm>
+          <a:prstGeom prst="rect">
+            <a:avLst/>
+          </a:prstGeom>
+          <a:noFill/>
+        </p:spPr>
+        <p:txBody>
+          <a:bodyPr wrap="square" lIns="0" rIns="0" tIns="0" bIns="0" anchor="t">
+            <a:spAutoFit/>
+          </a:bodyPr>
+          <a:lstStyle/>
+          <a:p>
+            <a:pPr algn="l">
+              <a:spcAft>
+                <a:spcPts val="400"/>
+              </a:spcAft>
+            </a:pPr>
+            <a:r>
+              <a:rPr sz="1400" b="1">
+                <a:solidFill>
+                  <a:srgbClr val="8A5D48"/>
+                </a:solidFill>
+                <a:latin typeface="Cambria"/>
+              </a:rPr>
+              <a:t>SỐ ĐO BẢN CŨ → V2</a:t>
+            </a:r>
+          </a:p>
+        </p:txBody>
+      </p:sp>
+      <p:graphicFrame>
+        <p:nvGraphicFramePr>
+          <p:cNvPr id="9" name="Table 8"/>
+          <p:cNvGraphicFramePr>
+            <a:graphicFrameLocks noGrp="1"/>
+          </p:cNvGraphicFramePr>
+          <p:nvPr/>
+        </p:nvGraphicFramePr>
+        <p:xfrm>
+          <a:off x="777240" y="1965960"/>
+          <a:ext cx="6126480" cy="3360000"/>
+        </p:xfrm>
+        <a:graphic>
+          <a:graphicData uri="http://schemas.openxmlformats.org/drawingml/2006/table">
+            <a:tbl>
+              <a:tblPr firstRow="1" bandRow="1">
+                <a:tableStyleId>{5C22544A-7EE6-4342-B048-85BDC9FD1C3A}</a:tableStyleId>
+              </a:tblPr>
+              <a:tblGrid>
+                <a:gridCol w="3200000"/>
+                <a:gridCol w="1463040"/>
+                <a:gridCol w="1463440"/>
+              </a:tblGrid>
+              <a:tr h="480000">
+                <a:tc>
+                  <a:txBody>
+                    <a:bodyPr/>
+                    <a:lstStyle/>
+                    <a:p>
+                      <a:r>
+                        <a:rPr sz="1300" b="1">
+                          <a:solidFill>
+                            <a:srgbClr val="FFFFFF"/>
+                          </a:solidFill>
+                          <a:latin typeface="Cambria"/>
+                        </a:rPr>
+                        <a:t>Chỉ số</a:t>
+                      </a:r>
+                    </a:p>
+                  </a:txBody>
+                  <a:tcPr anchor="ctr">
+                    <a:solidFill>
+                      <a:srgbClr val="622B14"/>
+                    </a:solidFill>
+                  </a:tcPr>
+                </a:tc>
+                <a:tc>
+                  <a:txBody>
+                    <a:bodyPr/>
+                    <a:lstStyle/>
+                    <a:p>
+                      <a:r>
+                        <a:rPr sz="1300" b="1">
+                          <a:solidFill>
+                            <a:srgbClr val="FFFFFF"/>
+                          </a:solidFill>
+                          <a:latin typeface="Cambria"/>
+                        </a:rPr>
+                        <a:t>Bản cũ</a:t>
+                      </a:r>
+                    </a:p>
+                  </a:txBody>
+                  <a:tcPr anchor="ctr">
+                    <a:solidFill>
+                      <a:srgbClr val="622B14"/>
+                    </a:solidFill>
+                  </a:tcPr>
+                </a:tc>
+                <a:tc>
+                  <a:txBody>
+                    <a:bodyPr/>
+                    <a:lstStyle/>
+                    <a:p>
+                      <a:r>
+                        <a:rPr sz="1300" b="1">
+                          <a:solidFill>
+                            <a:srgbClr val="FFFFFF"/>
+                          </a:solidFill>
+                          <a:latin typeface="Cambria"/>
+                        </a:rPr>
+                        <a:t>V2</a:t>
+                      </a:r>
+                    </a:p>
+                  </a:txBody>
+                  <a:tcPr anchor="ctr">
+                    <a:solidFill>
+                      <a:srgbClr val="622B14"/>
+                    </a:solidFill>
+                  </a:tcPr>
+                </a:tc>
+              </a:tr>
+              <a:tr h="480000">
+                <a:tc>
+                  <a:txBody>
+                    <a:bodyPr/>
+                    <a:lstStyle/>
+                    <a:p>
+                      <a:r>
+                        <a:rPr sz="1300" b="1">
+                          <a:solidFill>
+                            <a:srgbClr val="622B14"/>
+                          </a:solidFill>
+                          <a:latin typeface="Cambria"/>
+                        </a:rPr>
+                        <a:t>Cam đậm (TB S01–S08)</a:t>
+                      </a:r>
+                    </a:p>
+                  </a:txBody>
+                  <a:tcPr anchor="ctr">
+                    <a:solidFill>
+                      <a:srgbClr val="FFFFFF"/>
+                    </a:solidFill>
+                  </a:tcPr>
+                </a:tc>
+                <a:tc>
+                  <a:txBody>
+                    <a:bodyPr/>
+                    <a:lstStyle/>
+                    <a:p>
+                      <a:r>
+                        <a:rPr sz="1300" b="0">
+                          <a:solidFill>
+                            <a:srgbClr val="622B14"/>
+                          </a:solidFill>
+                          <a:latin typeface="Cambria"/>
+                        </a:rPr>
+                        <a:t>5,9%</a:t>
+                      </a:r>
+                    </a:p>
+                  </a:txBody>
+                  <a:tcPr anchor="ctr">
+                    <a:solidFill>
+                      <a:srgbClr val="FFFFFF"/>
+                    </a:solidFill>
+                  </a:tcPr>
+                </a:tc>
+                <a:tc>
+                  <a:txBody>
+                    <a:bodyPr/>
+                    <a:lstStyle/>
+                    <a:p>
+                      <a:r>
+                        <a:rPr sz="1300" b="0">
+                          <a:solidFill>
+                            <a:srgbClr val="622B14"/>
+                          </a:solidFill>
+                          <a:latin typeface="Cambria"/>
+                        </a:rPr>
+                        <a:t>4,3%</a:t>
+                      </a:r>
+                    </a:p>
+                  </a:txBody>
+                  <a:tcPr anchor="ctr">
+                    <a:solidFill>
+                      <a:srgbClr val="FFFFFF"/>
+                    </a:solidFill>
+                  </a:tcPr>
+                </a:tc>
+              </a:tr>
+              <a:tr h="480000">
+                <a:tc>
+                  <a:txBody>
+                    <a:bodyPr/>
+                    <a:lstStyle/>
+                    <a:p>
+                      <a:r>
+                        <a:rPr sz="1300" b="1">
+                          <a:solidFill>
+                            <a:srgbClr val="622B14"/>
+                          </a:solidFill>
+                          <a:latin typeface="Cambria"/>
+                        </a:rPr>
+                        <a:t>Họ cam–be: nền, thẻ, chip</a:t>
+                      </a:r>
+                    </a:p>
+                  </a:txBody>
+                  <a:tcPr anchor="ctr">
+                    <a:solidFill>
+                      <a:srgbClr val="FFF5E5"/>
+                    </a:solidFill>
+                  </a:tcPr>
+                </a:tc>
+                <a:tc>
+                  <a:txBody>
+                    <a:bodyPr/>
+                    <a:lstStyle/>
+                    <a:p>
+                      <a:r>
+                        <a:rPr sz="1300" b="0">
+                          <a:solidFill>
+                            <a:srgbClr val="622B14"/>
+                          </a:solidFill>
+                          <a:latin typeface="Cambria"/>
+                        </a:rPr>
+                        <a:t>55,3%</a:t>
+                      </a:r>
+                    </a:p>
+                  </a:txBody>
+                  <a:tcPr anchor="ctr">
+                    <a:solidFill>
+                      <a:srgbClr val="FFF5E5"/>
+                    </a:solidFill>
+                  </a:tcPr>
+                </a:tc>
+                <a:tc>
+                  <a:txBody>
+                    <a:bodyPr/>
+                    <a:lstStyle/>
+                    <a:p>
+                      <a:r>
+                        <a:rPr sz="1300" b="0">
+                          <a:solidFill>
+                            <a:srgbClr val="622B14"/>
+                          </a:solidFill>
+                          <a:latin typeface="Cambria"/>
+                        </a:rPr>
+                        <a:t>4,4%</a:t>
+                      </a:r>
+                    </a:p>
+                  </a:txBody>
+                  <a:tcPr anchor="ctr">
+                    <a:solidFill>
+                      <a:srgbClr val="FFF5E5"/>
+                    </a:solidFill>
+                  </a:tcPr>
+                </a:tc>
+              </a:tr>
+              <a:tr h="480000">
+                <a:tc>
+                  <a:txBody>
+                    <a:bodyPr/>
+                    <a:lstStyle/>
+                    <a:p>
+                      <a:r>
+                        <a:rPr sz="1300" b="1">
+                          <a:solidFill>
+                            <a:srgbClr val="622B14"/>
+                          </a:solidFill>
+                          <a:latin typeface="Cambria"/>
+                        </a:rPr>
+                        <a:t>Emoji trong chữ</a:t>
+                      </a:r>
+                    </a:p>
+                  </a:txBody>
+                  <a:tcPr anchor="ctr">
+                    <a:solidFill>
+                      <a:srgbClr val="FFFFFF"/>
+                    </a:solidFill>
+                  </a:tcPr>
+                </a:tc>
+                <a:tc>
+                  <a:txBody>
+                    <a:bodyPr/>
+                    <a:lstStyle/>
+                    <a:p>
+                      <a:r>
+                        <a:rPr sz="1300" b="0">
+                          <a:solidFill>
+                            <a:srgbClr val="622B14"/>
+                          </a:solidFill>
+                          <a:latin typeface="Cambria"/>
+                        </a:rPr>
+                        <a:t>98/366</a:t>
+                      </a:r>
+                    </a:p>
+                  </a:txBody>
+                  <a:tcPr anchor="ctr">
+                    <a:solidFill>
+                      <a:srgbClr val="FFFFFF"/>
+                    </a:solidFill>
+                  </a:tcPr>
+                </a:tc>
+                <a:tc>
+                  <a:txBody>
+                    <a:bodyPr/>
+                    <a:lstStyle/>
+                    <a:p>
+                      <a:r>
+                        <a:rPr sz="1300" b="0">
+                          <a:solidFill>
+                            <a:srgbClr val="622B14"/>
+                          </a:solidFill>
+                          <a:latin typeface="Cambria"/>
+                        </a:rPr>
+                        <a:t>0</a:t>
+                      </a:r>
+                    </a:p>
+                  </a:txBody>
+                  <a:tcPr anchor="ctr">
+                    <a:solidFill>
+                      <a:srgbClr val="FFFFFF"/>
+                    </a:solidFill>
+                  </a:tcPr>
+                </a:tc>
+              </a:tr>
+              <a:tr h="480000">
+                <a:tc>
+                  <a:txBody>
+                    <a:bodyPr/>
+                    <a:lstStyle/>
+                    <a:p>
+                      <a:r>
+                        <a:rPr sz="1300" b="1">
+                          <a:solidFill>
+                            <a:srgbClr val="622B14"/>
+                          </a:solidFill>
+                          <a:latin typeface="Cambria"/>
+                        </a:rPr>
+                        <a:t>Chữ dưới 14 sp</a:t>
+                      </a:r>
+                    </a:p>
+                  </a:txBody>
+                  <a:tcPr anchor="ctr">
+                    <a:solidFill>
+                      <a:srgbClr val="FFF5E5"/>
+                    </a:solidFill>
+                  </a:tcPr>
+                </a:tc>
+                <a:tc>
+                  <a:txBody>
+                    <a:bodyPr/>
+                    <a:lstStyle/>
+                    <a:p>
+                      <a:r>
+                        <a:rPr sz="1300" b="0">
+                          <a:solidFill>
+                            <a:srgbClr val="622B14"/>
+                          </a:solidFill>
+                          <a:latin typeface="Cambria"/>
+                        </a:rPr>
+                        <a:t>86 dòng</a:t>
+                      </a:r>
+                    </a:p>
+                  </a:txBody>
+                  <a:tcPr anchor="ctr">
+                    <a:solidFill>
+                      <a:srgbClr val="FFF5E5"/>
+                    </a:solidFill>
+                  </a:tcPr>
+                </a:tc>
+                <a:tc>
+                  <a:txBody>
+                    <a:bodyPr/>
+                    <a:lstStyle/>
+                    <a:p>
+                      <a:r>
+                        <a:rPr sz="1300" b="0">
+                          <a:solidFill>
+                            <a:srgbClr val="622B14"/>
+                          </a:solidFill>
+                          <a:latin typeface="Cambria"/>
+                        </a:rPr>
+                        <a:t>0*</a:t>
+                      </a:r>
+                    </a:p>
+                  </a:txBody>
+                  <a:tcPr anchor="ctr">
+                    <a:solidFill>
+                      <a:srgbClr val="FFF5E5"/>
+                    </a:solidFill>
+                  </a:tcPr>
+                </a:tc>
+              </a:tr>
+              <a:tr h="480000">
+                <a:tc>
+                  <a:txBody>
+                    <a:bodyPr/>
+                    <a:lstStyle/>
+                    <a:p>
+                      <a:r>
+                        <a:rPr sz="1300" b="1">
+                          <a:solidFill>
+                            <a:srgbClr val="622B14"/>
+                          </a:solidFill>
+                          <a:latin typeface="Cambria"/>
+                        </a:rPr>
+                        <a:t>Chữ thiếu tương phản</a:t>
+                      </a:r>
+                    </a:p>
+                  </a:txBody>
+                  <a:tcPr anchor="ctr">
+                    <a:solidFill>
+                      <a:srgbClr val="FFFFFF"/>
+                    </a:solidFill>
+                  </a:tcPr>
+                </a:tc>
+                <a:tc>
+                  <a:txBody>
+                    <a:bodyPr/>
+                    <a:lstStyle/>
+                    <a:p>
+                      <a:r>
+                        <a:rPr sz="1300" b="0">
+                          <a:solidFill>
+                            <a:srgbClr val="622B14"/>
+                          </a:solidFill>
+                          <a:latin typeface="Cambria"/>
+                        </a:rPr>
+                        <a:t>8 chỗ</a:t>
+                      </a:r>
+                    </a:p>
+                  </a:txBody>
+                  <a:tcPr anchor="ctr">
+                    <a:solidFill>
+                      <a:srgbClr val="FFFFFF"/>
+                    </a:solidFill>
+                  </a:tcPr>
+                </a:tc>
+                <a:tc>
+                  <a:txBody>
+                    <a:bodyPr/>
+                    <a:lstStyle/>
+                    <a:p>
+                      <a:r>
+                        <a:rPr sz="1300" b="0">
+                          <a:solidFill>
+                            <a:srgbClr val="622B14"/>
+                          </a:solidFill>
+                          <a:latin typeface="Cambria"/>
+                        </a:rPr>
+                        <a:t>0</a:t>
+                      </a:r>
+                    </a:p>
+                  </a:txBody>
+                  <a:tcPr anchor="ctr">
+                    <a:solidFill>
+                      <a:srgbClr val="FFFFFF"/>
+                    </a:solidFill>
+                  </a:tcPr>
+                </a:tc>
+              </a:tr>
+              <a:tr h="480000">
+                <a:tc>
+                  <a:txBody>
+                    <a:bodyPr/>
+                    <a:lstStyle/>
+                    <a:p>
+                      <a:r>
+                        <a:rPr sz="1300" b="1">
+                          <a:solidFill>
+                            <a:srgbClr val="622B14"/>
+                          </a:solidFill>
+                          <a:latin typeface="Cambria"/>
+                        </a:rPr>
+                        <a:t>Vùng bấm dưới 48 dp</a:t>
+                      </a:r>
+                    </a:p>
+                  </a:txBody>
+                  <a:tcPr anchor="ctr">
+                    <a:solidFill>
+                      <a:srgbClr val="FFF5E5"/>
+                    </a:solidFill>
+                  </a:tcPr>
+                </a:tc>
+                <a:tc>
+                  <a:txBody>
+                    <a:bodyPr/>
+                    <a:lstStyle/>
+                    <a:p>
+                      <a:r>
+                        <a:rPr sz="1300" b="0">
+                          <a:solidFill>
+                            <a:srgbClr val="622B14"/>
+                          </a:solidFill>
+                          <a:latin typeface="Cambria"/>
+                        </a:rPr>
+                        <a:t>20/39</a:t>
+                      </a:r>
+                    </a:p>
+                  </a:txBody>
+                  <a:tcPr anchor="ctr">
+                    <a:solidFill>
+                      <a:srgbClr val="FFF5E5"/>
+                    </a:solidFill>
+                  </a:tcPr>
+                </a:tc>
+                <a:tc>
+                  <a:txBody>
+                    <a:bodyPr/>
+                    <a:lstStyle/>
+                    <a:p>
+                      <a:r>
+                        <a:rPr sz="1300" b="0">
+                          <a:solidFill>
+                            <a:srgbClr val="622B14"/>
+                          </a:solidFill>
+                          <a:latin typeface="Cambria"/>
+                        </a:rPr>
+                        <a:t>0/217</a:t>
+                      </a:r>
+                    </a:p>
+                  </a:txBody>
+                  <a:tcPr anchor="ctr">
+                    <a:solidFill>
+                      <a:srgbClr val="FFF5E5"/>
+                    </a:solidFill>
+                  </a:tcPr>
+                </a:tc>
+              </a:tr>
+            </a:tbl>
+          </a:graphicData>
+        </a:graphic>
+      </p:graphicFrame>
+      <p:sp>
+        <p:nvSpPr>
+          <p:cNvPr id="10" name="TextBox 9"/>
+          <p:cNvSpPr txBox="1"/>
+          <p:nvPr/>
+        </p:nvSpPr>
+        <p:spPr>
+          <a:xfrm>
+            <a:off x="777240" y="5440680"/>
+            <a:ext cx="6126480" cy="640080"/>
+          </a:xfrm>
+          <a:prstGeom prst="rect">
+            <a:avLst/>
+          </a:prstGeom>
+          <a:noFill/>
+        </p:spPr>
+        <p:txBody>
+          <a:bodyPr wrap="square" lIns="0" rIns="0" tIns="0" bIns="0" anchor="t">
+            <a:spAutoFit/>
+          </a:bodyPr>
+          <a:lstStyle/>
+          <a:p>
+            <a:pPr algn="l">
+              <a:spcAft>
+                <a:spcPts val="400"/>
+              </a:spcAft>
+            </a:pPr>
+            <a:r>
+              <a:rPr sz="1100" b="0">
+                <a:solidFill>
+                  <a:srgbClr val="8A5D48"/>
+                </a:solidFill>
+                <a:latin typeface="Cambria"/>
+              </a:rPr>
+              <a:t>* trừ nhãn thanh dưới 12 sp (ngoại lệ D36). Nền v2 là #FAF8F5 nên không còn tính vào họ cam–be.</a:t>
+            </a:r>
+          </a:p>
+        </p:txBody>
+      </p:sp>
+      <p:sp>
+        <p:nvSpPr>
+          <p:cNvPr id="11" name="Rounded Rectangle 10"/>
+          <p:cNvSpPr/>
+          <p:nvPr/>
+        </p:nvSpPr>
+        <p:spPr>
+          <a:xfrm>
+            <a:off x="7360920" y="1417320"/>
+            <a:ext cx="4297680" cy="4800600"/>
+          </a:xfrm>
+          <a:prstGeom prst="roundRect">
+            <a:avLst>
+              <a:gd name="adj" fmla="val 4000"/>
+            </a:avLst>
+          </a:prstGeom>
+          <a:solidFill>
+            <a:srgbClr val="FFFFFF"/>
+          </a:solidFill>
+          <a:ln w="9525">
+            <a:solidFill>
+              <a:srgbClr val="E8D9C6"/>
+            </a:solidFill>
+          </a:ln>
+          <a:effectLst/>
+        </p:spPr>
+        <p:style>
+          <a:lnRef idx="1">
+            <a:schemeClr val="accent1"/>
+          </a:lnRef>
+          <a:fillRef idx="3">
+            <a:schemeClr val="accent1"/>
+          </a:fillRef>
+          <a:effectRef idx="2">
+            <a:schemeClr val="accent1"/>
+          </a:effectRef>
+          <a:fontRef idx="minor">
+            <a:schemeClr val="lt1"/>
+          </a:fontRef>
+        </p:style>
+        <p:txBody>
+          <a:bodyPr rtlCol="0" anchor="ctr"/>
+          <a:lstStyle/>
+          <a:p>
+            <a:pPr algn="ctr"/>
+          </a:p>
+        </p:txBody>
+      </p:sp>
+      <p:sp>
+        <p:nvSpPr>
+          <p:cNvPr id="12" name="TextBox 11"/>
+          <p:cNvSpPr txBox="1"/>
+          <p:nvPr/>
+        </p:nvSpPr>
+        <p:spPr>
+          <a:xfrm>
+            <a:off x="7589520" y="1554480"/>
+            <a:ext cx="3931920" cy="4572000"/>
+          </a:xfrm>
+          <a:prstGeom prst="rect">
+            <a:avLst/>
+          </a:prstGeom>
+          <a:noFill/>
+        </p:spPr>
+        <p:txBody>
+          <a:bodyPr wrap="square" lIns="0" rIns="0" tIns="0" bIns="0" anchor="t">
+            <a:spAutoFit/>
+          </a:bodyPr>
+          <a:lstStyle/>
+          <a:p>
+            <a:pPr algn="l">
+              <a:spcAft>
+                <a:spcPts val="400"/>
+              </a:spcAft>
+            </a:pPr>
+            <a:r>
+              <a:rPr sz="1400" b="1">
+                <a:solidFill>
+                  <a:srgbClr val="8A5D48"/>
+                </a:solidFill>
+                <a:latin typeface="Cambria"/>
+              </a:rPr>
+              <a:t>LỖI CHÍNH ĐÃ SỬA</a:t>
+            </a:r>
+          </a:p>
+          <a:p>
+            <a:pPr algn="l">
+              <a:spcAft>
+                <a:spcPts val="400"/>
+              </a:spcAft>
+            </a:pPr>
+            <a:r>
+              <a:rPr sz="1200" b="0">
+                <a:solidFill>
+                  <a:srgbClr val="622B14"/>
+                </a:solidFill>
+                <a:latin typeface="Cambria"/>
+              </a:rPr>
+              <a:t>A01 · Giao diện quá cam: nền kem trung tính, cam chỉ cho một nút chính</a:t>
+            </a:r>
+          </a:p>
+          <a:p>
+            <a:pPr algn="l">
+              <a:spcAft>
+                <a:spcPts val="400"/>
+              </a:spcAft>
+            </a:pPr>
+            <a:r>
+              <a:rPr sz="1200" b="0">
+                <a:solidFill>
+                  <a:srgbClr val="622B14"/>
+                </a:solidFill>
+                <a:latin typeface="Cambria"/>
+              </a:rPr>
+              <a:t>A02 · Icon lộn xộn: bỏ emoji, một bộ 27 icon vector</a:t>
+            </a:r>
+          </a:p>
+          <a:p>
+            <a:pPr algn="l">
+              <a:spcAft>
+                <a:spcPts val="400"/>
+              </a:spcAft>
+            </a:pPr>
+            <a:r>
+              <a:rPr sz="1200" b="0">
+                <a:solidFill>
+                  <a:srgbClr val="622B14"/>
+                </a:solidFill>
+                <a:latin typeface="Cambria"/>
+              </a:rPr>
+              <a:t>A03 · Giỏ hàng và thanh toán lặp: tách S05 và S06</a:t>
+            </a:r>
+          </a:p>
+          <a:p>
+            <a:pPr algn="l">
+              <a:spcAft>
+                <a:spcPts val="400"/>
+              </a:spcAft>
+            </a:pPr>
+            <a:r>
+              <a:rPr sz="1200" b="0">
+                <a:solidFill>
+                  <a:srgbClr val="622B14"/>
+                </a:solidFill>
+                <a:latin typeface="Cambria"/>
+              </a:rPr>
+              <a:t>A04–A06 · Vùng bấm 48 dp, chữ 14 sp, chữ cam đủ 4,5:1</a:t>
+            </a:r>
+          </a:p>
+          <a:p>
+            <a:pPr algn="l">
+              <a:spcAft>
+                <a:spcPts val="400"/>
+              </a:spcAft>
+            </a:pPr>
+            <a:r>
+              <a:rPr sz="1200" b="0">
+                <a:solidFill>
+                  <a:srgbClr val="622B14"/>
+                </a:solidFill>
+                <a:latin typeface="Cambria"/>
+              </a:rPr>
+              <a:t>A07–A15 · CTA S07, chip, QR, tên trạng thái, ảnh món, nội dung không có nguồn</a:t>
+            </a:r>
+          </a:p>
+          <a:p>
+            <a:pPr algn="l">
+              <a:spcAft>
+                <a:spcPts val="400"/>
+              </a:spcAft>
+            </a:pPr>
+            <a:r>
+              <a:rPr sz="1100" b="0">
+                <a:solidFill>
+                  <a:srgbClr val="8A5D48"/>
+                </a:solidFill>
+                <a:latin typeface="Cambria"/>
+              </a:rPr>
+              <a:t>Chưa có phản biện độc lập của AI khác cho v2; báo cáo đo do Claude viết nên không độc lập.</a:t>
+            </a:r>
+          </a:p>
+        </p:txBody>
+      </p:sp>
+    </p:spTree>
+  </p:cSld>
+  <p:clrMapOvr>
+    <a:masterClrMapping/>
+  </p:clrMapOvr>
+</p:sld>
+</file>
+
 <file path=ppt/slides/slide4.xml><?xml version="1.0" encoding="utf-8"?>
 <p:sld xmlns:a="http://schemas.openxmlformats.org/drawingml/2006/main" xmlns:r="http://schemas.openxmlformats.org/officeDocument/2006/relationships" xmlns:p="http://schemas.openxmlformats.org/presentationml/2006/main">
   <p:cSld name="Slide 4">
@@ -43330,6 +44940,2103 @@
               <a:t>Làm sao để sinh viên có đồ ăn trong giờ nghỉ ngắn mà không phải xếp hàng?</a:t>
             </a:r>
             <a:endParaRPr lang="en-US" sz="1700" dirty="0"/>
+          </a:p>
+        </p:txBody>
+      </p:sp>
+    </p:spTree>
+  </p:cSld>
+  <p:clrMapOvr>
+    <a:masterClrMapping/>
+  </p:clrMapOvr>
+</p:sld>
+</file>
+
+<file path=ppt/slides/slide40.xml><?xml version="1.0" encoding="utf-8"?>
+<p:sld xmlns:a="http://schemas.openxmlformats.org/drawingml/2006/main" xmlns:p="http://schemas.openxmlformats.org/presentationml/2006/main" xmlns:r="http://schemas.openxmlformats.org/officeDocument/2006/relationships">
+  <p:cSld>
+    <p:bg>
+      <p:bgPr>
+        <a:solidFill>
+          <a:srgbClr val="FBF4EA"/>
+        </a:solidFill>
+      </p:bgPr>
+    </p:bg>
+    <p:spTree>
+      <p:nvGrpSpPr>
+        <p:cNvPr id="1" name=""/>
+        <p:cNvGrpSpPr/>
+        <p:nvPr/>
+      </p:nvGrpSpPr>
+      <p:grpSpPr/>
+      <p:sp>
+        <p:nvSpPr>
+          <p:cNvPr id="2" name="Text 0"/>
+          <p:cNvSpPr txBox="1"/>
+          <p:nvPr/>
+        </p:nvSpPr>
+        <p:spPr>
+          <a:xfrm>
+            <a:off x="548640" y="347472"/>
+            <a:ext cx="640080" cy="594360"/>
+          </a:xfrm>
+          <a:prstGeom prst="rect">
+            <a:avLst/>
+          </a:prstGeom>
+          <a:noFill/>
+          <a:ln/>
+        </p:spPr>
+        <p:txBody>
+          <a:bodyPr wrap="square" lIns="0" tIns="0" rIns="0" bIns="0" rtlCol="0" anchor="ctr"/>
+          <a:lstStyle/>
+          <a:p>
+            <a:pPr indent="0" marL="0">
+              <a:buNone/>
+            </a:pPr>
+            <a:r>
+              <a:rPr lang="en-US" sz="3000" b="1" dirty="0">
+                <a:solidFill>
+                  <a:srgbClr val="F69D39"/>
+                </a:solidFill>
+                <a:latin typeface="Cambria" pitchFamily="34" charset="0"/>
+                <a:ea typeface="Cambria" pitchFamily="34" charset="-122"/>
+                <a:cs typeface="Cambria" pitchFamily="34" charset="-120"/>
+              </a:rPr>
+              <a:t>8.</a:t>
+            </a:r>
+            <a:endParaRPr lang="en-US" sz="3000" dirty="0"/>
+          </a:p>
+        </p:txBody>
+      </p:sp>
+      <p:sp>
+        <p:nvSpPr>
+          <p:cNvPr id="3" name="Text 1"/>
+          <p:cNvSpPr txBox="1"/>
+          <p:nvPr/>
+        </p:nvSpPr>
+        <p:spPr>
+          <a:xfrm>
+            <a:off x="1143000" y="347472"/>
+            <a:ext cx="9875520" cy="594360"/>
+          </a:xfrm>
+          <a:prstGeom prst="rect">
+            <a:avLst/>
+          </a:prstGeom>
+          <a:noFill/>
+          <a:ln/>
+        </p:spPr>
+        <p:txBody>
+          <a:bodyPr wrap="square" lIns="0" tIns="0" rIns="0" bIns="0" rtlCol="0" anchor="ctr"/>
+          <a:lstStyle/>
+          <a:p>
+            <a:pPr indent="0" marL="0">
+              <a:buNone/>
+            </a:pPr>
+            <a:r>
+              <a:rPr lang="en-US" sz="2800" b="1" dirty="0">
+                <a:solidFill>
+                  <a:srgbClr val="622B14"/>
+                </a:solidFill>
+                <a:latin typeface="Cambria" pitchFamily="34" charset="0"/>
+                <a:ea typeface="Cambria" pitchFamily="34" charset="-122"/>
+                <a:cs typeface="Cambria" pitchFamily="34" charset="-120"/>
+              </a:rPr>
+              <a:t>Final UI v2 — 30 màn app khách</a:t>
+            </a:r>
+            <a:endParaRPr lang="en-US" sz="2800" dirty="0"/>
+          </a:p>
+        </p:txBody>
+      </p:sp>
+      <p:sp>
+        <p:nvSpPr>
+          <p:cNvPr id="4" name="Text 2"/>
+          <p:cNvSpPr txBox="1"/>
+          <p:nvPr/>
+        </p:nvSpPr>
+        <p:spPr>
+          <a:xfrm>
+            <a:off x="548640" y="987552"/>
+            <a:ext cx="10972800" cy="292608"/>
+          </a:xfrm>
+          <a:prstGeom prst="rect">
+            <a:avLst/>
+          </a:prstGeom>
+          <a:noFill/>
+          <a:ln/>
+        </p:spPr>
+        <p:txBody>
+          <a:bodyPr wrap="square" lIns="0" tIns="0" rIns="0" bIns="0" rtlCol="0" anchor="ctr"/>
+          <a:lstStyle/>
+          <a:p>
+            <a:pPr indent="0" marL="0">
+              <a:buNone/>
+            </a:pPr>
+            <a:r>
+              <a:rPr lang="en-US" sz="1200" b="1" spc="100" kern="0" dirty="0">
+                <a:solidFill>
+                  <a:srgbClr val="B45309"/>
+                </a:solidFill>
+                <a:latin typeface="Calibri" pitchFamily="34" charset="0"/>
+                <a:ea typeface="Calibri" pitchFamily="34" charset="-122"/>
+                <a:cs typeface="Calibri" pitchFamily="34" charset="-120"/>
+              </a:rPr>
+              <a:t>S01–S08 · S09–S25 · S26–S30 (BẢN SAU PHẢN BIỆN)</a:t>
+            </a:r>
+            <a:endParaRPr lang="en-US" sz="1200" dirty="0"/>
+          </a:p>
+        </p:txBody>
+      </p:sp>
+      <p:sp>
+        <p:nvSpPr>
+          <p:cNvPr id="5" name="Text 3"/>
+          <p:cNvSpPr txBox="1"/>
+          <p:nvPr/>
+        </p:nvSpPr>
+        <p:spPr>
+          <a:xfrm>
+            <a:off x="548640" y="6419088"/>
+            <a:ext cx="10515600" cy="274320"/>
+          </a:xfrm>
+          <a:prstGeom prst="rect">
+            <a:avLst/>
+          </a:prstGeom>
+          <a:noFill/>
+          <a:ln/>
+        </p:spPr>
+        <p:txBody>
+          <a:bodyPr wrap="square" lIns="0" tIns="0" rIns="0" bIns="0" rtlCol="0" anchor="ctr"/>
+          <a:lstStyle/>
+          <a:p>
+            <a:pPr indent="0" marL="0">
+              <a:buNone/>
+            </a:pPr>
+            <a:r>
+              <a:rPr lang="en-US" sz="1050" i="1" dirty="0">
+                <a:solidFill>
+                  <a:srgbClr val="6B5B52"/>
+                </a:solidFill>
+                <a:latin typeface="Calibri" pitchFamily="34" charset="0"/>
+                <a:ea typeface="Calibri" pitchFamily="34" charset="-122"/>
+                <a:cs typeface="Calibri" pitchFamily="34" charset="-120"/>
+              </a:rPr>
+              <a:t>Minh chứng: assets/figma/final-ui-v2/ · design/screens-s09-s30.md</a:t>
+            </a:r>
+            <a:endParaRPr lang="en-US" sz="1050" dirty="0"/>
+          </a:p>
+        </p:txBody>
+      </p:sp>
+      <p:sp>
+        <p:nvSpPr>
+          <p:cNvPr id="6" name="Text 4"/>
+          <p:cNvSpPr txBox="1"/>
+          <p:nvPr/>
+        </p:nvSpPr>
+        <p:spPr>
+          <a:xfrm>
+            <a:off x="11247120" y="6419088"/>
+            <a:ext cx="457200" cy="274320"/>
+          </a:xfrm>
+          <a:prstGeom prst="rect">
+            <a:avLst/>
+          </a:prstGeom>
+          <a:noFill/>
+          <a:ln/>
+        </p:spPr>
+        <p:txBody>
+          <a:bodyPr wrap="square" lIns="0" tIns="0" rIns="0" bIns="0" rtlCol="0" anchor="ctr"/>
+          <a:lstStyle/>
+          <a:p>
+            <a:pPr algn="r" indent="0" marL="0">
+              <a:buNone/>
+            </a:pPr>
+            <a:r>
+              <a:rPr lang="en-US" sz="1050" dirty="0">
+                <a:solidFill>
+                  <a:srgbClr val="6B5B52"/>
+                </a:solidFill>
+                <a:latin typeface="Calibri" pitchFamily="34" charset="0"/>
+                <a:ea typeface="Calibri" pitchFamily="34" charset="-122"/>
+                <a:cs typeface="Calibri" pitchFamily="34" charset="-120"/>
+              </a:rPr>
+              <a:t>29</a:t>
+            </a:r>
+            <a:endParaRPr lang="en-US" sz="1050" dirty="0"/>
+          </a:p>
+        </p:txBody>
+      </p:sp>
+      <p:pic>
+        <p:nvPicPr>
+          <p:cNvPr id="7" name="Picture 6" descr="contact-sheet-s01-s08.png"/>
+          <p:cNvPicPr>
+            <a:picLocks noChangeAspect="1"/>
+          </p:cNvPicPr>
+          <p:nvPr/>
+        </p:nvPicPr>
+        <p:blipFill>
+          <a:blip r:embed="rId2"/>
+          <a:stretch>
+            <a:fillRect/>
+          </a:stretch>
+        </p:blipFill>
+        <p:spPr>
+          <a:xfrm>
+            <a:off x="548640" y="1417320"/>
+            <a:ext cx="3500000" cy="3772727"/>
+          </a:xfrm>
+          <a:prstGeom prst="rect">
+            <a:avLst/>
+          </a:prstGeom>
+        </p:spPr>
+      </p:pic>
+      <p:sp>
+        <p:nvSpPr>
+          <p:cNvPr id="8" name="TextBox 7"/>
+          <p:cNvSpPr txBox="1"/>
+          <p:nvPr/>
+        </p:nvSpPr>
+        <p:spPr>
+          <a:xfrm>
+            <a:off x="548640" y="5250000"/>
+            <a:ext cx="3500000" cy="280000"/>
+          </a:xfrm>
+          <a:prstGeom prst="rect">
+            <a:avLst/>
+          </a:prstGeom>
+          <a:noFill/>
+        </p:spPr>
+        <p:txBody>
+          <a:bodyPr wrap="square" lIns="0" rIns="0" tIns="0" bIns="0" anchor="t">
+            <a:spAutoFit/>
+          </a:bodyPr>
+          <a:lstStyle/>
+          <a:p>
+            <a:pPr algn="l">
+              <a:spcAft>
+                <a:spcPts val="400"/>
+              </a:spcAft>
+            </a:pPr>
+            <a:r>
+              <a:rPr sz="1400" b="1">
+                <a:solidFill>
+                  <a:srgbClr val="622B14"/>
+                </a:solidFill>
+                <a:latin typeface="Cambria"/>
+              </a:rPr>
+              <a:t>S01–S08 · Đặt món</a:t>
+            </a:r>
+          </a:p>
+        </p:txBody>
+      </p:sp>
+      <p:sp>
+        <p:nvSpPr>
+          <p:cNvPr id="9" name="TextBox 8"/>
+          <p:cNvSpPr txBox="1"/>
+          <p:nvPr/>
+        </p:nvSpPr>
+        <p:spPr>
+          <a:xfrm>
+            <a:off x="548640" y="5560000"/>
+            <a:ext cx="3500000" cy="800000"/>
+          </a:xfrm>
+          <a:prstGeom prst="rect">
+            <a:avLst/>
+          </a:prstGeom>
+          <a:noFill/>
+        </p:spPr>
+        <p:txBody>
+          <a:bodyPr wrap="square" lIns="0" rIns="0" tIns="0" bIns="0" anchor="t">
+            <a:spAutoFit/>
+          </a:bodyPr>
+          <a:lstStyle/>
+          <a:p>
+            <a:pPr algn="l">
+              <a:spcAft>
+                <a:spcPts val="400"/>
+              </a:spcAft>
+            </a:pPr>
+            <a:r>
+              <a:rPr sz="1100" b="0">
+                <a:solidFill>
+                  <a:srgbClr val="8A5D48"/>
+                </a:solidFill>
+                <a:latin typeface="Cambria"/>
+              </a:rPr>
+              <a:t>Onboarding, trang chủ, thực đơn, chi tiết món, giỏ hàng, thanh toán, theo dõi đơn, đơn hàng</a:t>
+            </a:r>
+          </a:p>
+        </p:txBody>
+      </p:sp>
+      <p:pic>
+        <p:nvPicPr>
+          <p:cNvPr id="10" name="Picture 9" descr="contact-sheet-s09-s25.png"/>
+          <p:cNvPicPr>
+            <a:picLocks noChangeAspect="1"/>
+          </p:cNvPicPr>
+          <p:nvPr/>
+        </p:nvPicPr>
+        <p:blipFill>
+          <a:blip r:embed="rId3"/>
+          <a:stretch>
+            <a:fillRect/>
+          </a:stretch>
+        </p:blipFill>
+        <p:spPr>
+          <a:xfrm>
+            <a:off x="4251960" y="1417320"/>
+            <a:ext cx="3500000" cy="3773913"/>
+          </a:xfrm>
+          <a:prstGeom prst="rect">
+            <a:avLst/>
+          </a:prstGeom>
+        </p:spPr>
+      </p:pic>
+      <p:sp>
+        <p:nvSpPr>
+          <p:cNvPr id="11" name="TextBox 10"/>
+          <p:cNvSpPr txBox="1"/>
+          <p:nvPr/>
+        </p:nvSpPr>
+        <p:spPr>
+          <a:xfrm>
+            <a:off x="4251960" y="5250000"/>
+            <a:ext cx="3500000" cy="280000"/>
+          </a:xfrm>
+          <a:prstGeom prst="rect">
+            <a:avLst/>
+          </a:prstGeom>
+          <a:noFill/>
+        </p:spPr>
+        <p:txBody>
+          <a:bodyPr wrap="square" lIns="0" rIns="0" tIns="0" bIns="0" anchor="t">
+            <a:spAutoFit/>
+          </a:bodyPr>
+          <a:lstStyle/>
+          <a:p>
+            <a:pPr algn="l">
+              <a:spcAft>
+                <a:spcPts val="400"/>
+              </a:spcAft>
+            </a:pPr>
+            <a:r>
+              <a:rPr sz="1400" b="1">
+                <a:solidFill>
+                  <a:srgbClr val="622B14"/>
+                </a:solidFill>
+                <a:latin typeface="Cambria"/>
+              </a:rPr>
+              <a:t>S09–S25 · Vòng đời đơn</a:t>
+            </a:r>
+          </a:p>
+        </p:txBody>
+      </p:sp>
+      <p:sp>
+        <p:nvSpPr>
+          <p:cNvPr id="12" name="TextBox 11"/>
+          <p:cNvSpPr txBox="1"/>
+          <p:nvPr/>
+        </p:nvSpPr>
+        <p:spPr>
+          <a:xfrm>
+            <a:off x="4251960" y="5560000"/>
+            <a:ext cx="3500000" cy="800000"/>
+          </a:xfrm>
+          <a:prstGeom prst="rect">
+            <a:avLst/>
+          </a:prstGeom>
+          <a:noFill/>
+        </p:spPr>
+        <p:txBody>
+          <a:bodyPr wrap="square" lIns="0" rIns="0" tIns="0" bIns="0" anchor="t">
+            <a:spAutoFit/>
+          </a:bodyPr>
+          <a:lstStyle/>
+          <a:p>
+            <a:pPr algn="l">
+              <a:spcAft>
+                <a:spcPts val="400"/>
+              </a:spcAft>
+            </a:pPr>
+            <a:r>
+              <a:rPr sz="1100" b="0">
+                <a:solidFill>
+                  <a:srgbClr val="8A5D48"/>
+                </a:solidFill>
+                <a:latin typeface="Cambria"/>
+              </a:rPr>
+              <a:t>Sửa/huỷ đơn, lịch sử, yêu thích, tài khoản, thông báo, nhận món QR, quán đóng, món hết, đánh giá, sự cố, hẹn giờ</a:t>
+            </a:r>
+          </a:p>
+        </p:txBody>
+      </p:sp>
+      <p:pic>
+        <p:nvPicPr>
+          <p:cNvPr id="13" name="Picture 12" descr="contact-sheet-s26-s30.png"/>
+          <p:cNvPicPr>
+            <a:picLocks noChangeAspect="1"/>
+          </p:cNvPicPr>
+          <p:nvPr/>
+        </p:nvPicPr>
+        <p:blipFill>
+          <a:blip r:embed="rId4"/>
+          <a:stretch>
+            <a:fillRect/>
+          </a:stretch>
+        </p:blipFill>
+        <p:spPr>
+          <a:xfrm>
+            <a:off x="7955280" y="1417320"/>
+            <a:ext cx="3500000" cy="3772727"/>
+          </a:xfrm>
+          <a:prstGeom prst="rect">
+            <a:avLst/>
+          </a:prstGeom>
+        </p:spPr>
+      </p:pic>
+      <p:sp>
+        <p:nvSpPr>
+          <p:cNvPr id="14" name="TextBox 13"/>
+          <p:cNvSpPr txBox="1"/>
+          <p:nvPr/>
+        </p:nvSpPr>
+        <p:spPr>
+          <a:xfrm>
+            <a:off x="7955280" y="5250000"/>
+            <a:ext cx="3500000" cy="280000"/>
+          </a:xfrm>
+          <a:prstGeom prst="rect">
+            <a:avLst/>
+          </a:prstGeom>
+          <a:noFill/>
+        </p:spPr>
+        <p:txBody>
+          <a:bodyPr wrap="square" lIns="0" rIns="0" tIns="0" bIns="0" anchor="t">
+            <a:spAutoFit/>
+          </a:bodyPr>
+          <a:lstStyle/>
+          <a:p>
+            <a:pPr algn="l">
+              <a:spcAft>
+                <a:spcPts val="400"/>
+              </a:spcAft>
+            </a:pPr>
+            <a:r>
+              <a:rPr sz="1400" b="1">
+                <a:solidFill>
+                  <a:srgbClr val="622B14"/>
+                </a:solidFill>
+                <a:latin typeface="Cambria"/>
+              </a:rPr>
+              <a:t>S26–S30 · Bổ sung</a:t>
+            </a:r>
+          </a:p>
+        </p:txBody>
+      </p:sp>
+      <p:sp>
+        <p:nvSpPr>
+          <p:cNvPr id="15" name="TextBox 14"/>
+          <p:cNvSpPr txBox="1"/>
+          <p:nvPr/>
+        </p:nvSpPr>
+        <p:spPr>
+          <a:xfrm>
+            <a:off x="7955280" y="5560000"/>
+            <a:ext cx="3500000" cy="800000"/>
+          </a:xfrm>
+          <a:prstGeom prst="rect">
+            <a:avLst/>
+          </a:prstGeom>
+          <a:noFill/>
+        </p:spPr>
+        <p:txBody>
+          <a:bodyPr wrap="square" lIns="0" rIns="0" tIns="0" bIns="0" anchor="t">
+            <a:spAutoFit/>
+          </a:bodyPr>
+          <a:lstStyle/>
+          <a:p>
+            <a:pPr algn="l">
+              <a:spcAft>
+                <a:spcPts val="400"/>
+              </a:spcAft>
+            </a:pPr>
+            <a:r>
+              <a:rPr sz="1100" b="0">
+                <a:solidFill>
+                  <a:srgbClr val="8A5D48"/>
+                </a:solidFill>
+                <a:latin typeface="Cambria"/>
+              </a:rPr>
+              <a:t>Đăng nhập email trường, chọn kiosk, tìm kiếm, mã giảm giá, mất kết nối, đang tải</a:t>
+            </a:r>
+          </a:p>
+        </p:txBody>
+      </p:sp>
+    </p:spTree>
+  </p:cSld>
+  <p:clrMapOvr>
+    <a:masterClrMapping/>
+  </p:clrMapOvr>
+</p:sld>
+</file>
+
+<file path=ppt/slides/slide41.xml><?xml version="1.0" encoding="utf-8"?>
+<p:sld xmlns:a="http://schemas.openxmlformats.org/drawingml/2006/main" xmlns:p="http://schemas.openxmlformats.org/presentationml/2006/main" xmlns:r="http://schemas.openxmlformats.org/officeDocument/2006/relationships">
+  <p:cSld>
+    <p:bg>
+      <p:bgPr>
+        <a:solidFill>
+          <a:srgbClr val="FBF4EA"/>
+        </a:solidFill>
+      </p:bgPr>
+    </p:bg>
+    <p:spTree>
+      <p:nvGrpSpPr>
+        <p:cNvPr id="1" name=""/>
+        <p:cNvGrpSpPr/>
+        <p:nvPr/>
+      </p:nvGrpSpPr>
+      <p:grpSpPr/>
+      <p:sp>
+        <p:nvSpPr>
+          <p:cNvPr id="2" name="Text 0"/>
+          <p:cNvSpPr txBox="1"/>
+          <p:nvPr/>
+        </p:nvSpPr>
+        <p:spPr>
+          <a:xfrm>
+            <a:off x="548640" y="347472"/>
+            <a:ext cx="640080" cy="594360"/>
+          </a:xfrm>
+          <a:prstGeom prst="rect">
+            <a:avLst/>
+          </a:prstGeom>
+          <a:noFill/>
+          <a:ln/>
+        </p:spPr>
+        <p:txBody>
+          <a:bodyPr wrap="square" lIns="0" tIns="0" rIns="0" bIns="0" rtlCol="0" anchor="ctr"/>
+          <a:lstStyle/>
+          <a:p>
+            <a:pPr indent="0" marL="0">
+              <a:buNone/>
+            </a:pPr>
+            <a:r>
+              <a:rPr lang="en-US" sz="3000" b="1" dirty="0">
+                <a:solidFill>
+                  <a:srgbClr val="F69D39"/>
+                </a:solidFill>
+                <a:latin typeface="Cambria" pitchFamily="34" charset="0"/>
+                <a:ea typeface="Cambria" pitchFamily="34" charset="-122"/>
+                <a:cs typeface="Cambria" pitchFamily="34" charset="-120"/>
+              </a:rPr>
+              <a:t>8.</a:t>
+            </a:r>
+            <a:endParaRPr lang="en-US" sz="3000" dirty="0"/>
+          </a:p>
+        </p:txBody>
+      </p:sp>
+      <p:sp>
+        <p:nvSpPr>
+          <p:cNvPr id="3" name="Text 1"/>
+          <p:cNvSpPr txBox="1"/>
+          <p:nvPr/>
+        </p:nvSpPr>
+        <p:spPr>
+          <a:xfrm>
+            <a:off x="1143000" y="347472"/>
+            <a:ext cx="9875520" cy="594360"/>
+          </a:xfrm>
+          <a:prstGeom prst="rect">
+            <a:avLst/>
+          </a:prstGeom>
+          <a:noFill/>
+          <a:ln/>
+        </p:spPr>
+        <p:txBody>
+          <a:bodyPr wrap="square" lIns="0" tIns="0" rIns="0" bIns="0" rtlCol="0" anchor="ctr"/>
+          <a:lstStyle/>
+          <a:p>
+            <a:pPr indent="0" marL="0">
+              <a:buNone/>
+            </a:pPr>
+            <a:r>
+              <a:rPr lang="en-US" sz="2800" b="1" dirty="0">
+                <a:solidFill>
+                  <a:srgbClr val="622B14"/>
+                </a:solidFill>
+                <a:latin typeface="Cambria" pitchFamily="34" charset="0"/>
+                <a:ea typeface="Cambria" pitchFamily="34" charset="-122"/>
+                <a:cs typeface="Cambria" pitchFamily="34" charset="-120"/>
+              </a:rPr>
+              <a:t>App người bán — BreakBite Kiosk</a:t>
+            </a:r>
+            <a:endParaRPr lang="en-US" sz="2800" dirty="0"/>
+          </a:p>
+        </p:txBody>
+      </p:sp>
+      <p:sp>
+        <p:nvSpPr>
+          <p:cNvPr id="4" name="Text 2"/>
+          <p:cNvSpPr txBox="1"/>
+          <p:nvPr/>
+        </p:nvSpPr>
+        <p:spPr>
+          <a:xfrm>
+            <a:off x="548640" y="987552"/>
+            <a:ext cx="10972800" cy="292608"/>
+          </a:xfrm>
+          <a:prstGeom prst="rect">
+            <a:avLst/>
+          </a:prstGeom>
+          <a:noFill/>
+          <a:ln/>
+        </p:spPr>
+        <p:txBody>
+          <a:bodyPr wrap="square" lIns="0" tIns="0" rIns="0" bIns="0" rtlCol="0" anchor="ctr"/>
+          <a:lstStyle/>
+          <a:p>
+            <a:pPr indent="0" marL="0">
+              <a:buNone/>
+            </a:pPr>
+            <a:r>
+              <a:rPr lang="en-US" sz="1200" b="1" spc="100" kern="0" dirty="0">
+                <a:solidFill>
+                  <a:srgbClr val="B45309"/>
+                </a:solidFill>
+                <a:latin typeface="Calibri" pitchFamily="34" charset="0"/>
+                <a:ea typeface="Calibri" pitchFamily="34" charset="-122"/>
+                <a:cs typeface="Calibri" pitchFamily="34" charset="-120"/>
+              </a:rPr>
+              <a:t>15 MÀN K01–K15 CHO NHÂN VIÊN QUẦY</a:t>
+            </a:r>
+            <a:endParaRPr lang="en-US" sz="1200" dirty="0"/>
+          </a:p>
+        </p:txBody>
+      </p:sp>
+      <p:sp>
+        <p:nvSpPr>
+          <p:cNvPr id="5" name="Text 3"/>
+          <p:cNvSpPr txBox="1"/>
+          <p:nvPr/>
+        </p:nvSpPr>
+        <p:spPr>
+          <a:xfrm>
+            <a:off x="548640" y="6419088"/>
+            <a:ext cx="10515600" cy="274320"/>
+          </a:xfrm>
+          <a:prstGeom prst="rect">
+            <a:avLst/>
+          </a:prstGeom>
+          <a:noFill/>
+          <a:ln/>
+        </p:spPr>
+        <p:txBody>
+          <a:bodyPr wrap="square" lIns="0" tIns="0" rIns="0" bIns="0" rtlCol="0" anchor="ctr"/>
+          <a:lstStyle/>
+          <a:p>
+            <a:pPr indent="0" marL="0">
+              <a:buNone/>
+            </a:pPr>
+            <a:r>
+              <a:rPr lang="en-US" sz="1050" i="1" dirty="0">
+                <a:solidFill>
+                  <a:srgbClr val="6B5B52"/>
+                </a:solidFill>
+                <a:latin typeface="Calibri" pitchFamily="34" charset="0"/>
+                <a:ea typeface="Calibri" pitchFamily="34" charset="-122"/>
+                <a:cs typeface="Calibri" pitchFamily="34" charset="-120"/>
+              </a:rPr>
+              <a:t>Minh chứng: design/kitchen-app.md · assets/figma/final-ui-v2/kitchen/</a:t>
+            </a:r>
+            <a:endParaRPr lang="en-US" sz="1050" dirty="0"/>
+          </a:p>
+        </p:txBody>
+      </p:sp>
+      <p:sp>
+        <p:nvSpPr>
+          <p:cNvPr id="6" name="Text 4"/>
+          <p:cNvSpPr txBox="1"/>
+          <p:nvPr/>
+        </p:nvSpPr>
+        <p:spPr>
+          <a:xfrm>
+            <a:off x="11247120" y="6419088"/>
+            <a:ext cx="457200" cy="274320"/>
+          </a:xfrm>
+          <a:prstGeom prst="rect">
+            <a:avLst/>
+          </a:prstGeom>
+          <a:noFill/>
+          <a:ln/>
+        </p:spPr>
+        <p:txBody>
+          <a:bodyPr wrap="square" lIns="0" tIns="0" rIns="0" bIns="0" rtlCol="0" anchor="ctr"/>
+          <a:lstStyle/>
+          <a:p>
+            <a:pPr algn="r" indent="0" marL="0">
+              <a:buNone/>
+            </a:pPr>
+            <a:r>
+              <a:rPr lang="en-US" sz="1050" dirty="0">
+                <a:solidFill>
+                  <a:srgbClr val="6B5B52"/>
+                </a:solidFill>
+                <a:latin typeface="Calibri" pitchFamily="34" charset="0"/>
+                <a:ea typeface="Calibri" pitchFamily="34" charset="-122"/>
+                <a:cs typeface="Calibri" pitchFamily="34" charset="-120"/>
+              </a:rPr>
+              <a:t>30</a:t>
+            </a:r>
+            <a:endParaRPr lang="en-US" sz="1050" dirty="0"/>
+          </a:p>
+        </p:txBody>
+      </p:sp>
+      <p:sp>
+        <p:nvSpPr>
+          <p:cNvPr id="7" name="Rounded Rectangle 6"/>
+          <p:cNvSpPr/>
+          <p:nvPr/>
+        </p:nvSpPr>
+        <p:spPr>
+          <a:xfrm>
+            <a:off x="548640" y="1417320"/>
+            <a:ext cx="6400800" cy="2606040"/>
+          </a:xfrm>
+          <a:prstGeom prst="roundRect">
+            <a:avLst>
+              <a:gd name="adj" fmla="val 4000"/>
+            </a:avLst>
+          </a:prstGeom>
+          <a:solidFill>
+            <a:srgbClr val="FFFFFF"/>
+          </a:solidFill>
+          <a:ln w="9525">
+            <a:solidFill>
+              <a:srgbClr val="E8D9C6"/>
+            </a:solidFill>
+          </a:ln>
+          <a:effectLst/>
+        </p:spPr>
+        <p:style>
+          <a:lnRef idx="1">
+            <a:schemeClr val="accent1"/>
+          </a:lnRef>
+          <a:fillRef idx="3">
+            <a:schemeClr val="accent1"/>
+          </a:fillRef>
+          <a:effectRef idx="2">
+            <a:schemeClr val="accent1"/>
+          </a:effectRef>
+          <a:fontRef idx="minor">
+            <a:schemeClr val="lt1"/>
+          </a:fontRef>
+        </p:style>
+        <p:txBody>
+          <a:bodyPr rtlCol="0" anchor="ctr"/>
+          <a:lstStyle/>
+          <a:p>
+            <a:pPr algn="ctr"/>
+          </a:p>
+        </p:txBody>
+      </p:sp>
+      <p:sp>
+        <p:nvSpPr>
+          <p:cNvPr id="8" name="TextBox 7"/>
+          <p:cNvSpPr txBox="1"/>
+          <p:nvPr/>
+        </p:nvSpPr>
+        <p:spPr>
+          <a:xfrm>
+            <a:off x="731520" y="1508760"/>
+            <a:ext cx="6035040" cy="2423160"/>
+          </a:xfrm>
+          <a:prstGeom prst="rect">
+            <a:avLst/>
+          </a:prstGeom>
+          <a:noFill/>
+        </p:spPr>
+        <p:txBody>
+          <a:bodyPr wrap="square" lIns="0" rIns="0" tIns="0" bIns="0" anchor="t">
+            <a:spAutoFit/>
+          </a:bodyPr>
+          <a:lstStyle/>
+          <a:p>
+            <a:pPr algn="l">
+              <a:spcAft>
+                <a:spcPts val="400"/>
+              </a:spcAft>
+            </a:pPr>
+            <a:r>
+              <a:rPr sz="1300" b="1">
+                <a:solidFill>
+                  <a:srgbClr val="8A5D48"/>
+                </a:solidFill>
+                <a:latin typeface="Cambria"/>
+              </a:rPr>
+              <a:t>MÀN KHÁCH ĐÃ HỨA, QUẦY PHẢI THỰC HIỆN</a:t>
+            </a:r>
+          </a:p>
+          <a:p>
+            <a:pPr algn="l">
+              <a:spcAft>
+                <a:spcPts val="400"/>
+              </a:spcAft>
+            </a:pPr>
+            <a:r>
+              <a:rPr sz="1200" b="0">
+                <a:solidFill>
+                  <a:srgbClr val="622B14"/>
+                </a:solidFill>
+                <a:latin typeface="Cambria"/>
+              </a:rPr>
+              <a:t>S07 Đã nhận → Đang làm → Sẵn sàng  ←  K03 Nhận đơn, K04 Báo sẵn sàng</a:t>
+            </a:r>
+          </a:p>
+          <a:p>
+            <a:pPr algn="l">
+              <a:spcAft>
+                <a:spcPts val="400"/>
+              </a:spcAft>
+            </a:pPr>
+            <a:r>
+              <a:rPr sz="1200" b="0">
+                <a:solidFill>
+                  <a:srgbClr val="622B14"/>
+                </a:solidFill>
+                <a:latin typeface="Cambria"/>
+              </a:rPr>
+              <a:t>S20 mã QR  ←  K05 Quét mã, K06 Xác nhận giao (K06-CASH thu tiền mặt)</a:t>
+            </a:r>
+          </a:p>
+          <a:p>
+            <a:pPr algn="l">
+              <a:spcAft>
+                <a:spcPts val="400"/>
+              </a:spcAft>
+            </a:pPr>
+            <a:r>
+              <a:rPr sz="1200" b="0">
+                <a:solidFill>
+                  <a:srgbClr val="622B14"/>
+                </a:solidFill>
+                <a:latin typeface="Cambria"/>
+              </a:rPr>
+              <a:t>S03/S22 Tạm hết  ←  K08, K09 Hết món; K14, K15 Thêm, sửa món</a:t>
+            </a:r>
+          </a:p>
+          <a:p>
+            <a:pPr algn="l">
+              <a:spcAft>
+                <a:spcPts val="400"/>
+              </a:spcAft>
+            </a:pPr>
+            <a:r>
+              <a:rPr sz="1200" b="0">
+                <a:solidFill>
+                  <a:srgbClr val="622B14"/>
+                </a:solidFill>
+                <a:latin typeface="Cambria"/>
+              </a:rPr>
+              <a:t>S21 Quán đóng  ←  K10 Bật/tắt nhận đơn</a:t>
+            </a:r>
+          </a:p>
+          <a:p>
+            <a:pPr algn="l">
+              <a:spcAft>
+                <a:spcPts val="400"/>
+              </a:spcAft>
+            </a:pPr>
+            <a:r>
+              <a:rPr sz="1200" b="0">
+                <a:solidFill>
+                  <a:srgbClr val="622B14"/>
+                </a:solidFill>
+                <a:latin typeface="Cambria"/>
+              </a:rPr>
+              <a:t>S07-DIALOG huỷ, S24 sự cố  ←  K12 Từ chối, K13 Hoàn tiền</a:t>
+            </a:r>
+          </a:p>
+        </p:txBody>
+      </p:sp>
+      <p:sp>
+        <p:nvSpPr>
+          <p:cNvPr id="9" name="Rounded Rectangle 8"/>
+          <p:cNvSpPr/>
+          <p:nvPr/>
+        </p:nvSpPr>
+        <p:spPr>
+          <a:xfrm>
+            <a:off x="548640" y="4160520"/>
+            <a:ext cx="6400800" cy="2057400"/>
+          </a:xfrm>
+          <a:prstGeom prst="roundRect">
+            <a:avLst>
+              <a:gd name="adj" fmla="val 4000"/>
+            </a:avLst>
+          </a:prstGeom>
+          <a:solidFill>
+            <a:srgbClr val="FFFFFF"/>
+          </a:solidFill>
+          <a:ln w="9525">
+            <a:solidFill>
+              <a:srgbClr val="E8D9C6"/>
+            </a:solidFill>
+          </a:ln>
+          <a:effectLst/>
+        </p:spPr>
+        <p:style>
+          <a:lnRef idx="1">
+            <a:schemeClr val="accent1"/>
+          </a:lnRef>
+          <a:fillRef idx="3">
+            <a:schemeClr val="accent1"/>
+          </a:fillRef>
+          <a:effectRef idx="2">
+            <a:schemeClr val="accent1"/>
+          </a:effectRef>
+          <a:fontRef idx="minor">
+            <a:schemeClr val="lt1"/>
+          </a:fontRef>
+        </p:style>
+        <p:txBody>
+          <a:bodyPr rtlCol="0" anchor="ctr"/>
+          <a:lstStyle/>
+          <a:p>
+            <a:pPr algn="ctr"/>
+          </a:p>
+        </p:txBody>
+      </p:sp>
+      <p:sp>
+        <p:nvSpPr>
+          <p:cNvPr id="10" name="TextBox 9"/>
+          <p:cNvSpPr txBox="1"/>
+          <p:nvPr/>
+        </p:nvSpPr>
+        <p:spPr>
+          <a:xfrm>
+            <a:off x="731520" y="4251960"/>
+            <a:ext cx="6035040" cy="1920240"/>
+          </a:xfrm>
+          <a:prstGeom prst="rect">
+            <a:avLst/>
+          </a:prstGeom>
+          <a:noFill/>
+        </p:spPr>
+        <p:txBody>
+          <a:bodyPr wrap="square" lIns="0" rIns="0" tIns="0" bIns="0" anchor="t">
+            <a:spAutoFit/>
+          </a:bodyPr>
+          <a:lstStyle/>
+          <a:p>
+            <a:pPr algn="l">
+              <a:spcAft>
+                <a:spcPts val="400"/>
+              </a:spcAft>
+            </a:pPr>
+            <a:r>
+              <a:rPr sz="1300" b="1">
+                <a:solidFill>
+                  <a:srgbClr val="8A5D48"/>
+                </a:solidFill>
+                <a:latin typeface="Cambria"/>
+              </a:rPr>
+              <a:t>MÀN VÀ FLOW</a:t>
+            </a:r>
+          </a:p>
+          <a:p>
+            <a:pPr algn="l">
+              <a:spcAft>
+                <a:spcPts val="400"/>
+              </a:spcAft>
+            </a:pPr>
+            <a:r>
+              <a:rPr sz="1200" b="0">
+                <a:solidFill>
+                  <a:srgbClr val="622B14"/>
+                </a:solidFill>
+                <a:latin typeface="Cambria"/>
+              </a:rPr>
+              <a:t>K01 Đăng nhập · K02 Danh sách đơn · K03 Chi tiết · K04 Đang chuẩn bị · K05 Quét mã · K06 Giao món</a:t>
+            </a:r>
+          </a:p>
+          <a:p>
+            <a:pPr algn="l">
+              <a:spcAft>
+                <a:spcPts val="400"/>
+              </a:spcAft>
+            </a:pPr>
+            <a:r>
+              <a:rPr sz="1200" b="0">
+                <a:solidFill>
+                  <a:srgbClr val="622B14"/>
+                </a:solidFill>
+                <a:latin typeface="Cambria"/>
+              </a:rPr>
+              <a:t>K08 Quản lý món · K09 Hết món · K10 Quán · K11 Thống kê ca · K12 Từ chối · K13 Sự cố · K14 Thêm món · K15 Sửa món</a:t>
+            </a:r>
+          </a:p>
+          <a:p>
+            <a:pPr algn="l">
+              <a:spcAft>
+                <a:spcPts val="400"/>
+              </a:spcAft>
+            </a:pPr>
+            <a:r>
+              <a:rPr sz="1200" b="0">
+                <a:solidFill>
+                  <a:srgbClr val="622B14"/>
+                </a:solidFill>
+                <a:latin typeface="Cambria"/>
+              </a:rPr>
+              <a:t>Một nút cam mỗi màn; thanh toán luôn hiện trên thẻ đơn để biết đơn nào thu tiền mặt.</a:t>
+            </a:r>
+          </a:p>
+        </p:txBody>
+      </p:sp>
+      <p:pic>
+        <p:nvPicPr>
+          <p:cNvPr id="11" name="Picture 10" descr="contact-sheet-kitchen.png"/>
+          <p:cNvPicPr>
+            <a:picLocks noChangeAspect="1"/>
+          </p:cNvPicPr>
+          <p:nvPr/>
+        </p:nvPicPr>
+        <p:blipFill>
+          <a:blip r:embed="rId2"/>
+          <a:stretch>
+            <a:fillRect/>
+          </a:stretch>
+        </p:blipFill>
+        <p:spPr>
+          <a:xfrm>
+            <a:off x="7132320" y="1417320"/>
+            <a:ext cx="4526280" cy="4880510"/>
+          </a:xfrm>
+          <a:prstGeom prst="rect">
+            <a:avLst/>
+          </a:prstGeom>
+        </p:spPr>
+      </p:pic>
+    </p:spTree>
+  </p:cSld>
+  <p:clrMapOvr>
+    <a:masterClrMapping/>
+  </p:clrMapOvr>
+</p:sld>
+</file>
+
+<file path=ppt/slides/slide42.xml><?xml version="1.0" encoding="utf-8"?>
+<p:sld xmlns:a="http://schemas.openxmlformats.org/drawingml/2006/main" xmlns:p="http://schemas.openxmlformats.org/presentationml/2006/main" xmlns:r="http://schemas.openxmlformats.org/officeDocument/2006/relationships">
+  <p:cSld>
+    <p:bg>
+      <p:bgPr>
+        <a:solidFill>
+          <a:srgbClr val="FBF4EA"/>
+        </a:solidFill>
+      </p:bgPr>
+    </p:bg>
+    <p:spTree>
+      <p:nvGrpSpPr>
+        <p:cNvPr id="1" name=""/>
+        <p:cNvGrpSpPr/>
+        <p:nvPr/>
+      </p:nvGrpSpPr>
+      <p:grpSpPr/>
+      <p:sp>
+        <p:nvSpPr>
+          <p:cNvPr id="2" name="Text 0"/>
+          <p:cNvSpPr txBox="1"/>
+          <p:nvPr/>
+        </p:nvSpPr>
+        <p:spPr>
+          <a:xfrm>
+            <a:off x="548640" y="347472"/>
+            <a:ext cx="640080" cy="594360"/>
+          </a:xfrm>
+          <a:prstGeom prst="rect">
+            <a:avLst/>
+          </a:prstGeom>
+          <a:noFill/>
+          <a:ln/>
+        </p:spPr>
+        <p:txBody>
+          <a:bodyPr wrap="square" lIns="0" tIns="0" rIns="0" bIns="0" rtlCol="0" anchor="ctr"/>
+          <a:lstStyle/>
+          <a:p>
+            <a:pPr indent="0" marL="0">
+              <a:buNone/>
+            </a:pPr>
+            <a:r>
+              <a:rPr lang="en-US" sz="3000" b="1" dirty="0">
+                <a:solidFill>
+                  <a:srgbClr val="F69D39"/>
+                </a:solidFill>
+                <a:latin typeface="Cambria" pitchFamily="34" charset="0"/>
+                <a:ea typeface="Cambria" pitchFamily="34" charset="-122"/>
+                <a:cs typeface="Cambria" pitchFamily="34" charset="-120"/>
+              </a:rPr>
+              <a:t>12.</a:t>
+            </a:r>
+            <a:endParaRPr lang="en-US" sz="3000" dirty="0"/>
+          </a:p>
+        </p:txBody>
+      </p:sp>
+      <p:sp>
+        <p:nvSpPr>
+          <p:cNvPr id="3" name="Text 1"/>
+          <p:cNvSpPr txBox="1"/>
+          <p:nvPr/>
+        </p:nvSpPr>
+        <p:spPr>
+          <a:xfrm>
+            <a:off x="1417320" y="347472"/>
+            <a:ext cx="9875520" cy="594360"/>
+          </a:xfrm>
+          <a:prstGeom prst="rect">
+            <a:avLst/>
+          </a:prstGeom>
+          <a:noFill/>
+          <a:ln/>
+        </p:spPr>
+        <p:txBody>
+          <a:bodyPr wrap="square" lIns="0" tIns="0" rIns="0" bIns="0" rtlCol="0" anchor="ctr"/>
+          <a:lstStyle/>
+          <a:p>
+            <a:pPr indent="0" marL="0">
+              <a:buNone/>
+            </a:pPr>
+            <a:r>
+              <a:rPr lang="en-US" sz="2800" b="1" dirty="0">
+                <a:solidFill>
+                  <a:srgbClr val="622B14"/>
+                </a:solidFill>
+                <a:latin typeface="Cambria" pitchFamily="34" charset="0"/>
+                <a:ea typeface="Cambria" pitchFamily="34" charset="-122"/>
+                <a:cs typeface="Cambria" pitchFamily="34" charset="-120"/>
+              </a:rPr>
+              <a:t>Chấm UX/UI theo Quality Gates</a:t>
+            </a:r>
+            <a:endParaRPr lang="en-US" sz="2800" dirty="0"/>
+          </a:p>
+        </p:txBody>
+      </p:sp>
+      <p:sp>
+        <p:nvSpPr>
+          <p:cNvPr id="4" name="Text 2"/>
+          <p:cNvSpPr txBox="1"/>
+          <p:nvPr/>
+        </p:nvSpPr>
+        <p:spPr>
+          <a:xfrm>
+            <a:off x="548640" y="987552"/>
+            <a:ext cx="10972800" cy="292608"/>
+          </a:xfrm>
+          <a:prstGeom prst="rect">
+            <a:avLst/>
+          </a:prstGeom>
+          <a:noFill/>
+          <a:ln/>
+        </p:spPr>
+        <p:txBody>
+          <a:bodyPr wrap="square" lIns="0" tIns="0" rIns="0" bIns="0" rtlCol="0" anchor="ctr"/>
+          <a:lstStyle/>
+          <a:p>
+            <a:pPr indent="0" marL="0">
+              <a:buNone/>
+            </a:pPr>
+            <a:r>
+              <a:rPr lang="en-US" sz="1200" b="1" spc="100" kern="0" dirty="0">
+                <a:solidFill>
+                  <a:srgbClr val="B45309"/>
+                </a:solidFill>
+                <a:latin typeface="Calibri" pitchFamily="34" charset="0"/>
+                <a:ea typeface="Calibri" pitchFamily="34" charset="-122"/>
+                <a:cs typeface="Calibri" pitchFamily="34" charset="-120"/>
+              </a:rPr>
+              <a:t>G0–G5 · RUBRIC NỘI BỘ CỦA MÔN, KHÔNG PHẢI CHUẨN QUỐC TẾ</a:t>
+            </a:r>
+            <a:endParaRPr lang="en-US" sz="1200" dirty="0"/>
+          </a:p>
+        </p:txBody>
+      </p:sp>
+      <p:sp>
+        <p:nvSpPr>
+          <p:cNvPr id="5" name="Text 3"/>
+          <p:cNvSpPr txBox="1"/>
+          <p:nvPr/>
+        </p:nvSpPr>
+        <p:spPr>
+          <a:xfrm>
+            <a:off x="548640" y="6419088"/>
+            <a:ext cx="10515600" cy="274320"/>
+          </a:xfrm>
+          <a:prstGeom prst="rect">
+            <a:avLst/>
+          </a:prstGeom>
+          <a:noFill/>
+          <a:ln/>
+        </p:spPr>
+        <p:txBody>
+          <a:bodyPr wrap="square" lIns="0" tIns="0" rIns="0" bIns="0" rtlCol="0" anchor="ctr"/>
+          <a:lstStyle/>
+          <a:p>
+            <a:pPr indent="0" marL="0">
+              <a:buNone/>
+            </a:pPr>
+            <a:r>
+              <a:rPr lang="en-US" sz="1050" i="1" dirty="0">
+                <a:solidFill>
+                  <a:srgbClr val="6B5B52"/>
+                </a:solidFill>
+                <a:latin typeface="Calibri" pitchFamily="34" charset="0"/>
+                <a:ea typeface="Calibri" pitchFamily="34" charset="-122"/>
+                <a:cs typeface="Calibri" pitchFamily="34" charset="-120"/>
+              </a:rPr>
+              <a:t>Minh chứng: docs/quy-chuan-ux-ui.md · skills/ (13 skill) · prm393-material.web.app/quality-gates</a:t>
+            </a:r>
+            <a:endParaRPr lang="en-US" sz="1050" dirty="0"/>
+          </a:p>
+        </p:txBody>
+      </p:sp>
+      <p:sp>
+        <p:nvSpPr>
+          <p:cNvPr id="6" name="Text 4"/>
+          <p:cNvSpPr txBox="1"/>
+          <p:nvPr/>
+        </p:nvSpPr>
+        <p:spPr>
+          <a:xfrm>
+            <a:off x="11247120" y="6419088"/>
+            <a:ext cx="457200" cy="274320"/>
+          </a:xfrm>
+          <a:prstGeom prst="rect">
+            <a:avLst/>
+          </a:prstGeom>
+          <a:noFill/>
+          <a:ln/>
+        </p:spPr>
+        <p:txBody>
+          <a:bodyPr wrap="square" lIns="0" tIns="0" rIns="0" bIns="0" rtlCol="0" anchor="ctr"/>
+          <a:lstStyle/>
+          <a:p>
+            <a:pPr algn="r" indent="0" marL="0">
+              <a:buNone/>
+            </a:pPr>
+            <a:r>
+              <a:rPr lang="en-US" sz="1050" dirty="0">
+                <a:solidFill>
+                  <a:srgbClr val="6B5B52"/>
+                </a:solidFill>
+                <a:latin typeface="Calibri" pitchFamily="34" charset="0"/>
+                <a:ea typeface="Calibri" pitchFamily="34" charset="-122"/>
+                <a:cs typeface="Calibri" pitchFamily="34" charset="-120"/>
+              </a:rPr>
+              <a:t>40</a:t>
+            </a:r>
+            <a:endParaRPr lang="en-US" sz="1050" dirty="0"/>
+          </a:p>
+        </p:txBody>
+      </p:sp>
+      <p:sp>
+        <p:nvSpPr>
+          <p:cNvPr id="7" name="Rounded Rectangle 6"/>
+          <p:cNvSpPr/>
+          <p:nvPr/>
+        </p:nvSpPr>
+        <p:spPr>
+          <a:xfrm>
+            <a:off x="548640" y="1417320"/>
+            <a:ext cx="6858000" cy="4800600"/>
+          </a:xfrm>
+          <a:prstGeom prst="roundRect">
+            <a:avLst>
+              <a:gd name="adj" fmla="val 4000"/>
+            </a:avLst>
+          </a:prstGeom>
+          <a:solidFill>
+            <a:srgbClr val="FFFFFF"/>
+          </a:solidFill>
+          <a:ln w="9525">
+            <a:solidFill>
+              <a:srgbClr val="E8D9C6"/>
+            </a:solidFill>
+          </a:ln>
+          <a:effectLst/>
+        </p:spPr>
+        <p:style>
+          <a:lnRef idx="1">
+            <a:schemeClr val="accent1"/>
+          </a:lnRef>
+          <a:fillRef idx="3">
+            <a:schemeClr val="accent1"/>
+          </a:fillRef>
+          <a:effectRef idx="2">
+            <a:schemeClr val="accent1"/>
+          </a:effectRef>
+          <a:fontRef idx="minor">
+            <a:schemeClr val="lt1"/>
+          </a:fontRef>
+        </p:style>
+        <p:txBody>
+          <a:bodyPr rtlCol="0" anchor="ctr"/>
+          <a:lstStyle/>
+          <a:p>
+            <a:pPr algn="ctr"/>
+          </a:p>
+        </p:txBody>
+      </p:sp>
+      <p:sp>
+        <p:nvSpPr>
+          <p:cNvPr id="8" name="TextBox 7"/>
+          <p:cNvSpPr txBox="1"/>
+          <p:nvPr/>
+        </p:nvSpPr>
+        <p:spPr>
+          <a:xfrm>
+            <a:off x="777240" y="1508760"/>
+            <a:ext cx="6400800" cy="320040"/>
+          </a:xfrm>
+          <a:prstGeom prst="rect">
+            <a:avLst/>
+          </a:prstGeom>
+          <a:noFill/>
+        </p:spPr>
+        <p:txBody>
+          <a:bodyPr wrap="square" lIns="0" rIns="0" tIns="0" bIns="0" anchor="t">
+            <a:spAutoFit/>
+          </a:bodyPr>
+          <a:lstStyle/>
+          <a:p>
+            <a:pPr algn="l">
+              <a:spcAft>
+                <a:spcPts val="400"/>
+              </a:spcAft>
+            </a:pPr>
+            <a:r>
+              <a:rPr sz="1300" b="1">
+                <a:solidFill>
+                  <a:srgbClr val="8A5D48"/>
+                </a:solidFill>
+                <a:latin typeface="Cambria"/>
+              </a:rPr>
+              <a:t>SÁU GATE VÀ TIÊU CHÍ CRITICAL CHÍNH</a:t>
+            </a:r>
+          </a:p>
+        </p:txBody>
+      </p:sp>
+      <p:graphicFrame>
+        <p:nvGraphicFramePr>
+          <p:cNvPr id="9" name="Table 8"/>
+          <p:cNvGraphicFramePr>
+            <a:graphicFrameLocks noGrp="1"/>
+          </p:cNvGraphicFramePr>
+          <p:nvPr/>
+        </p:nvGraphicFramePr>
+        <p:xfrm>
+          <a:off x="777240" y="1920240"/>
+          <a:ext cx="6400800" cy="3920000"/>
+        </p:xfrm>
+        <a:graphic>
+          <a:graphicData uri="http://schemas.openxmlformats.org/drawingml/2006/table">
+            <a:tbl>
+              <a:tblPr firstRow="1" bandRow="1">
+                <a:tableStyleId>{5C22544A-7EE6-4342-B048-85BDC9FD1C3A}</a:tableStyleId>
+              </a:tblPr>
+              <a:tblGrid>
+                <a:gridCol w="640080"/>
+                <a:gridCol w="1280160"/>
+                <a:gridCol w="4480560"/>
+              </a:tblGrid>
+              <a:tr h="560000">
+                <a:tc>
+                  <a:txBody>
+                    <a:bodyPr/>
+                    <a:lstStyle/>
+                    <a:p>
+                      <a:r>
+                        <a:rPr sz="1200" b="1">
+                          <a:solidFill>
+                            <a:srgbClr val="FFFFFF"/>
+                          </a:solidFill>
+                          <a:latin typeface="Cambria"/>
+                        </a:rPr>
+                        <a:t>Gate</a:t>
+                      </a:r>
+                    </a:p>
+                  </a:txBody>
+                  <a:tcPr anchor="ctr">
+                    <a:solidFill>
+                      <a:srgbClr val="622B14"/>
+                    </a:solidFill>
+                  </a:tcPr>
+                </a:tc>
+                <a:tc>
+                  <a:txBody>
+                    <a:bodyPr/>
+                    <a:lstStyle/>
+                    <a:p>
+                      <a:r>
+                        <a:rPr sz="1200" b="1">
+                          <a:solidFill>
+                            <a:srgbClr val="FFFFFF"/>
+                          </a:solidFill>
+                          <a:latin typeface="Cambria"/>
+                        </a:rPr>
+                        <a:t>Phase</a:t>
+                      </a:r>
+                    </a:p>
+                  </a:txBody>
+                  <a:tcPr anchor="ctr">
+                    <a:solidFill>
+                      <a:srgbClr val="622B14"/>
+                    </a:solidFill>
+                  </a:tcPr>
+                </a:tc>
+                <a:tc>
+                  <a:txBody>
+                    <a:bodyPr/>
+                    <a:lstStyle/>
+                    <a:p>
+                      <a:r>
+                        <a:rPr sz="1200" b="1">
+                          <a:solidFill>
+                            <a:srgbClr val="FFFFFF"/>
+                          </a:solidFill>
+                          <a:latin typeface="Cambria"/>
+                        </a:rPr>
+                        <a:t>Critical chính</a:t>
+                      </a:r>
+                    </a:p>
+                  </a:txBody>
+                  <a:tcPr anchor="ctr">
+                    <a:solidFill>
+                      <a:srgbClr val="622B14"/>
+                    </a:solidFill>
+                  </a:tcPr>
+                </a:tc>
+              </a:tr>
+              <a:tr h="560000">
+                <a:tc>
+                  <a:txBody>
+                    <a:bodyPr/>
+                    <a:lstStyle/>
+                    <a:p>
+                      <a:r>
+                        <a:rPr sz="1200" b="1">
+                          <a:solidFill>
+                            <a:srgbClr val="622B14"/>
+                          </a:solidFill>
+                          <a:latin typeface="Cambria"/>
+                        </a:rPr>
+                        <a:t>G0</a:t>
+                      </a:r>
+                    </a:p>
+                  </a:txBody>
+                  <a:tcPr anchor="ctr">
+                    <a:solidFill>
+                      <a:srgbClr val="FFFFFF"/>
+                    </a:solidFill>
+                  </a:tcPr>
+                </a:tc>
+                <a:tc>
+                  <a:txBody>
+                    <a:bodyPr/>
+                    <a:lstStyle/>
+                    <a:p>
+                      <a:r>
+                        <a:rPr sz="1200" b="0">
+                          <a:solidFill>
+                            <a:srgbClr val="622B14"/>
+                          </a:solidFill>
+                          <a:latin typeface="Cambria"/>
+                        </a:rPr>
+                        <a:t>Ideas</a:t>
+                      </a:r>
+                    </a:p>
+                  </a:txBody>
+                  <a:tcPr anchor="ctr">
+                    <a:solidFill>
+                      <a:srgbClr val="FFFFFF"/>
+                    </a:solidFill>
+                  </a:tcPr>
+                </a:tc>
+                <a:tc>
+                  <a:txBody>
+                    <a:bodyPr/>
+                    <a:lstStyle/>
+                    <a:p>
+                      <a:r>
+                        <a:rPr sz="1200" b="0">
+                          <a:solidFill>
+                            <a:srgbClr val="622B14"/>
+                          </a:solidFill>
+                          <a:latin typeface="Cambria"/>
+                        </a:rPr>
+                        <a:t>Problem statement đủ 4 phần; giả định có nhãn</a:t>
+                      </a:r>
+                    </a:p>
+                  </a:txBody>
+                  <a:tcPr anchor="ctr">
+                    <a:solidFill>
+                      <a:srgbClr val="FFFFFF"/>
+                    </a:solidFill>
+                  </a:tcPr>
+                </a:tc>
+              </a:tr>
+              <a:tr h="560000">
+                <a:tc>
+                  <a:txBody>
+                    <a:bodyPr/>
+                    <a:lstStyle/>
+                    <a:p>
+                      <a:r>
+                        <a:rPr sz="1200" b="1">
+                          <a:solidFill>
+                            <a:srgbClr val="622B14"/>
+                          </a:solidFill>
+                          <a:latin typeface="Cambria"/>
+                        </a:rPr>
+                        <a:t>G1</a:t>
+                      </a:r>
+                    </a:p>
+                  </a:txBody>
+                  <a:tcPr anchor="ctr">
+                    <a:solidFill>
+                      <a:srgbClr val="FFF5E5"/>
+                    </a:solidFill>
+                  </a:tcPr>
+                </a:tc>
+                <a:tc>
+                  <a:txBody>
+                    <a:bodyPr/>
+                    <a:lstStyle/>
+                    <a:p>
+                      <a:r>
+                        <a:rPr sz="1200" b="0">
+                          <a:solidFill>
+                            <a:srgbClr val="622B14"/>
+                          </a:solidFill>
+                          <a:latin typeface="Cambria"/>
+                        </a:rPr>
+                        <a:t>Research</a:t>
+                      </a:r>
+                    </a:p>
+                  </a:txBody>
+                  <a:tcPr anchor="ctr">
+                    <a:solidFill>
+                      <a:srgbClr val="FFF5E5"/>
+                    </a:solidFill>
+                  </a:tcPr>
+                </a:tc>
+                <a:tc>
+                  <a:txBody>
+                    <a:bodyPr/>
+                    <a:lstStyle/>
+                    <a:p>
+                      <a:r>
+                        <a:rPr sz="1200" b="0">
+                          <a:solidFill>
+                            <a:srgbClr val="622B14"/>
+                          </a:solidFill>
+                          <a:latin typeface="Cambria"/>
+                        </a:rPr>
+                        <a:t>Dữ liệu người dùng thật; insight truy được về nguồn</a:t>
+                      </a:r>
+                    </a:p>
+                  </a:txBody>
+                  <a:tcPr anchor="ctr">
+                    <a:solidFill>
+                      <a:srgbClr val="FFF5E5"/>
+                    </a:solidFill>
+                  </a:tcPr>
+                </a:tc>
+              </a:tr>
+              <a:tr h="560000">
+                <a:tc>
+                  <a:txBody>
+                    <a:bodyPr/>
+                    <a:lstStyle/>
+                    <a:p>
+                      <a:r>
+                        <a:rPr sz="1200" b="1">
+                          <a:solidFill>
+                            <a:srgbClr val="622B14"/>
+                          </a:solidFill>
+                          <a:latin typeface="Cambria"/>
+                        </a:rPr>
+                        <a:t>G2</a:t>
+                      </a:r>
+                    </a:p>
+                  </a:txBody>
+                  <a:tcPr anchor="ctr">
+                    <a:solidFill>
+                      <a:srgbClr val="FFFFFF"/>
+                    </a:solidFill>
+                  </a:tcPr>
+                </a:tc>
+                <a:tc>
+                  <a:txBody>
+                    <a:bodyPr/>
+                    <a:lstStyle/>
+                    <a:p>
+                      <a:r>
+                        <a:rPr sz="1200" b="0">
+                          <a:solidFill>
+                            <a:srgbClr val="622B14"/>
+                          </a:solidFill>
+                          <a:latin typeface="Cambria"/>
+                        </a:rPr>
+                        <a:t>UX Design</a:t>
+                      </a:r>
+                    </a:p>
+                  </a:txBody>
+                  <a:tcPr anchor="ctr">
+                    <a:solidFill>
+                      <a:srgbClr val="FFFFFF"/>
+                    </a:solidFill>
+                  </a:tcPr>
+                </a:tc>
+                <a:tc>
+                  <a:txBody>
+                    <a:bodyPr/>
+                    <a:lstStyle/>
+                    <a:p>
+                      <a:r>
+                        <a:rPr sz="1200" b="0">
+                          <a:solidFill>
+                            <a:srgbClr val="622B14"/>
+                          </a:solidFill>
+                          <a:latin typeface="Cambria"/>
+                        </a:rPr>
+                        <a:t>Flow đủ đầu, cuối, lỗi; IA và wireframe</a:t>
+                      </a:r>
+                    </a:p>
+                  </a:txBody>
+                  <a:tcPr anchor="ctr">
+                    <a:solidFill>
+                      <a:srgbClr val="FFFFFF"/>
+                    </a:solidFill>
+                  </a:tcPr>
+                </a:tc>
+              </a:tr>
+              <a:tr h="560000">
+                <a:tc>
+                  <a:txBody>
+                    <a:bodyPr/>
+                    <a:lstStyle/>
+                    <a:p>
+                      <a:r>
+                        <a:rPr sz="1200" b="1">
+                          <a:solidFill>
+                            <a:srgbClr val="622B14"/>
+                          </a:solidFill>
+                          <a:latin typeface="Cambria"/>
+                        </a:rPr>
+                        <a:t>G3</a:t>
+                      </a:r>
+                    </a:p>
+                  </a:txBody>
+                  <a:tcPr anchor="ctr">
+                    <a:solidFill>
+                      <a:srgbClr val="FFF5E5"/>
+                    </a:solidFill>
+                  </a:tcPr>
+                </a:tc>
+                <a:tc>
+                  <a:txBody>
+                    <a:bodyPr/>
+                    <a:lstStyle/>
+                    <a:p>
+                      <a:r>
+                        <a:rPr sz="1200" b="0">
+                          <a:solidFill>
+                            <a:srgbClr val="622B14"/>
+                          </a:solidFill>
+                          <a:latin typeface="Cambria"/>
+                        </a:rPr>
+                        <a:t>UI Concept</a:t>
+                      </a:r>
+                    </a:p>
+                  </a:txBody>
+                  <a:tcPr anchor="ctr">
+                    <a:solidFill>
+                      <a:srgbClr val="FFF5E5"/>
+                    </a:solidFill>
+                  </a:tcPr>
+                </a:tc>
+                <a:tc>
+                  <a:txBody>
+                    <a:bodyPr/>
+                    <a:lstStyle/>
+                    <a:p>
+                      <a:r>
+                        <a:rPr sz="1200" b="0">
+                          <a:solidFill>
+                            <a:srgbClr val="622B14"/>
+                          </a:solidFill>
+                          <a:latin typeface="Cambria"/>
+                        </a:rPr>
+                        <a:t>≥ 2 hướng; style guide; contrast, 48 dp, 14 sp</a:t>
+                      </a:r>
+                    </a:p>
+                  </a:txBody>
+                  <a:tcPr anchor="ctr">
+                    <a:solidFill>
+                      <a:srgbClr val="FFF5E5"/>
+                    </a:solidFill>
+                  </a:tcPr>
+                </a:tc>
+              </a:tr>
+              <a:tr h="560000">
+                <a:tc>
+                  <a:txBody>
+                    <a:bodyPr/>
+                    <a:lstStyle/>
+                    <a:p>
+                      <a:r>
+                        <a:rPr sz="1200" b="1">
+                          <a:solidFill>
+                            <a:srgbClr val="622B14"/>
+                          </a:solidFill>
+                          <a:latin typeface="Cambria"/>
+                        </a:rPr>
+                        <a:t>G4</a:t>
+                      </a:r>
+                    </a:p>
+                  </a:txBody>
+                  <a:tcPr anchor="ctr">
+                    <a:solidFill>
+                      <a:srgbClr val="FFFFFF"/>
+                    </a:solidFill>
+                  </a:tcPr>
+                </a:tc>
+                <a:tc>
+                  <a:txBody>
+                    <a:bodyPr/>
+                    <a:lstStyle/>
+                    <a:p>
+                      <a:r>
+                        <a:rPr sz="1200" b="0">
+                          <a:solidFill>
+                            <a:srgbClr val="622B14"/>
+                          </a:solidFill>
+                          <a:latin typeface="Cambria"/>
+                        </a:rPr>
+                        <a:t>UI Design</a:t>
+                      </a:r>
+                    </a:p>
+                  </a:txBody>
+                  <a:tcPr anchor="ctr">
+                    <a:solidFill>
+                      <a:srgbClr val="FFFFFF"/>
+                    </a:solidFill>
+                  </a:tcPr>
+                </a:tc>
+                <a:tc>
+                  <a:txBody>
+                    <a:bodyPr/>
+                    <a:lstStyle/>
+                    <a:p>
+                      <a:r>
+                        <a:rPr sz="1200" b="0">
+                          <a:solidFill>
+                            <a:srgbClr val="622B14"/>
+                          </a:solidFill>
+                          <a:latin typeface="Cambria"/>
+                        </a:rPr>
+                        <a:t>Prototype đi hết tác vụ; đủ state; dùng style guide</a:t>
+                      </a:r>
+                    </a:p>
+                  </a:txBody>
+                  <a:tcPr anchor="ctr">
+                    <a:solidFill>
+                      <a:srgbClr val="FFFFFF"/>
+                    </a:solidFill>
+                  </a:tcPr>
+                </a:tc>
+              </a:tr>
+              <a:tr h="560000">
+                <a:tc>
+                  <a:txBody>
+                    <a:bodyPr/>
+                    <a:lstStyle/>
+                    <a:p>
+                      <a:r>
+                        <a:rPr sz="1200" b="1">
+                          <a:solidFill>
+                            <a:srgbClr val="622B14"/>
+                          </a:solidFill>
+                          <a:latin typeface="Cambria"/>
+                        </a:rPr>
+                        <a:t>G5</a:t>
+                      </a:r>
+                    </a:p>
+                  </a:txBody>
+                  <a:tcPr anchor="ctr">
+                    <a:solidFill>
+                      <a:srgbClr val="FFF5E5"/>
+                    </a:solidFill>
+                  </a:tcPr>
+                </a:tc>
+                <a:tc>
+                  <a:txBody>
+                    <a:bodyPr/>
+                    <a:lstStyle/>
+                    <a:p>
+                      <a:r>
+                        <a:rPr sz="1200" b="0">
+                          <a:solidFill>
+                            <a:srgbClr val="622B14"/>
+                          </a:solidFill>
+                          <a:latin typeface="Cambria"/>
+                        </a:rPr>
+                        <a:t>Validation</a:t>
+                      </a:r>
+                    </a:p>
+                  </a:txBody>
+                  <a:tcPr anchor="ctr">
+                    <a:solidFill>
+                      <a:srgbClr val="FFF5E5"/>
+                    </a:solidFill>
+                  </a:tcPr>
+                </a:tc>
+                <a:tc>
+                  <a:txBody>
+                    <a:bodyPr/>
+                    <a:lstStyle/>
+                    <a:p>
+                      <a:r>
+                        <a:rPr sz="1200" b="0">
+                          <a:solidFill>
+                            <a:srgbClr val="622B14"/>
+                          </a:solidFill>
+                          <a:latin typeface="Cambria"/>
+                        </a:rPr>
+                        <a:t>Usability test; không blocker; bàn giao đủ</a:t>
+                      </a:r>
+                    </a:p>
+                  </a:txBody>
+                  <a:tcPr anchor="ctr">
+                    <a:solidFill>
+                      <a:srgbClr val="FFF5E5"/>
+                    </a:solidFill>
+                  </a:tcPr>
+                </a:tc>
+              </a:tr>
+            </a:tbl>
+          </a:graphicData>
+        </a:graphic>
+      </p:graphicFrame>
+      <p:sp>
+        <p:nvSpPr>
+          <p:cNvPr id="10" name="Rounded Rectangle 9"/>
+          <p:cNvSpPr/>
+          <p:nvPr/>
+        </p:nvSpPr>
+        <p:spPr>
+          <a:xfrm>
+            <a:off x="7589520" y="1417320"/>
+            <a:ext cx="4069080" cy="4800600"/>
+          </a:xfrm>
+          <a:prstGeom prst="roundRect">
+            <a:avLst>
+              <a:gd name="adj" fmla="val 4000"/>
+            </a:avLst>
+          </a:prstGeom>
+          <a:solidFill>
+            <a:srgbClr val="FFFFFF"/>
+          </a:solidFill>
+          <a:ln w="9525">
+            <a:solidFill>
+              <a:srgbClr val="E8D9C6"/>
+            </a:solidFill>
+          </a:ln>
+          <a:effectLst/>
+        </p:spPr>
+        <p:style>
+          <a:lnRef idx="1">
+            <a:schemeClr val="accent1"/>
+          </a:lnRef>
+          <a:fillRef idx="3">
+            <a:schemeClr val="accent1"/>
+          </a:fillRef>
+          <a:effectRef idx="2">
+            <a:schemeClr val="accent1"/>
+          </a:effectRef>
+          <a:fontRef idx="minor">
+            <a:schemeClr val="lt1"/>
+          </a:fontRef>
+        </p:style>
+        <p:txBody>
+          <a:bodyPr rtlCol="0" anchor="ctr"/>
+          <a:lstStyle/>
+          <a:p>
+            <a:pPr algn="ctr"/>
+          </a:p>
+        </p:txBody>
+      </p:sp>
+      <p:sp>
+        <p:nvSpPr>
+          <p:cNvPr id="11" name="TextBox 10"/>
+          <p:cNvSpPr txBox="1"/>
+          <p:nvPr/>
+        </p:nvSpPr>
+        <p:spPr>
+          <a:xfrm>
+            <a:off x="7818120" y="1508760"/>
+            <a:ext cx="3611880" cy="4572000"/>
+          </a:xfrm>
+          <a:prstGeom prst="rect">
+            <a:avLst/>
+          </a:prstGeom>
+          <a:noFill/>
+        </p:spPr>
+        <p:txBody>
+          <a:bodyPr wrap="square" lIns="0" rIns="0" tIns="0" bIns="0" anchor="t">
+            <a:spAutoFit/>
+          </a:bodyPr>
+          <a:lstStyle/>
+          <a:p>
+            <a:pPr algn="l">
+              <a:spcAft>
+                <a:spcPts val="400"/>
+              </a:spcAft>
+            </a:pPr>
+            <a:r>
+              <a:rPr sz="1300" b="1">
+                <a:solidFill>
+                  <a:srgbClr val="8A5D48"/>
+                </a:solidFill>
+                <a:latin typeface="Cambria"/>
+              </a:rPr>
+              <a:t>THANG ĐIỂM</a:t>
+            </a:r>
+          </a:p>
+          <a:p>
+            <a:pPr algn="l">
+              <a:spcAft>
+                <a:spcPts val="400"/>
+              </a:spcAft>
+            </a:pPr>
+            <a:r>
+              <a:rPr sz="1200" b="0">
+                <a:solidFill>
+                  <a:srgbClr val="622B14"/>
+                </a:solidFill>
+                <a:latin typeface="Cambria"/>
+              </a:rPr>
+              <a:t>≥ 80% và mọi Critical đạt: Đạt</a:t>
+            </a:r>
+          </a:p>
+          <a:p>
+            <a:pPr algn="l">
+              <a:spcAft>
+                <a:spcPts val="400"/>
+              </a:spcAft>
+            </a:pPr>
+            <a:r>
+              <a:rPr sz="1200" b="0">
+                <a:solidFill>
+                  <a:srgbClr val="622B14"/>
+                </a:solidFill>
+                <a:latin typeface="Cambria"/>
+              </a:rPr>
+              <a:t>70–79%: Cần cải thiện · &lt; 70%: Cần làm lại</a:t>
+            </a:r>
+          </a:p>
+          <a:p>
+            <a:pPr algn="l">
+              <a:spcAft>
+                <a:spcPts val="400"/>
+              </a:spcAft>
+            </a:pPr>
+            <a:r>
+              <a:rPr sz="1200" b="0">
+                <a:solidFill>
+                  <a:srgbClr val="622B14"/>
+                </a:solidFill>
+                <a:latin typeface="Cambria"/>
+              </a:rPr>
+              <a:t>Critical trượt: Chưa qua, dù tổng điểm cao</a:t>
+            </a:r>
+          </a:p>
+          <a:p>
+            <a:pPr algn="l">
+              <a:spcAft>
+                <a:spcPts val="400"/>
+              </a:spcAft>
+            </a:pPr>
+            <a:r>
+              <a:rPr sz="1300" b="1">
+                <a:solidFill>
+                  <a:srgbClr val="8A5D48"/>
+                </a:solidFill>
+                <a:latin typeface="Cambria"/>
+              </a:rPr>
+              <a:t>NGUỒN</a:t>
+            </a:r>
+          </a:p>
+          <a:p>
+            <a:pPr algn="l">
+              <a:spcAft>
+                <a:spcPts val="400"/>
+              </a:spcAft>
+            </a:pPr>
+            <a:r>
+              <a:rPr sz="1200" b="0">
+                <a:solidFill>
+                  <a:srgbClr val="622B14"/>
+                </a:solidFill>
+                <a:latin typeface="Cambria"/>
+              </a:rPr>
+              <a:t>Contrast, vùng chạm: WCAG 2.2, Material (chuẩn và hướng dẫn ngành)</a:t>
+            </a:r>
+          </a:p>
+          <a:p>
+            <a:pPr algn="l">
+              <a:spcAft>
+                <a:spcPts val="400"/>
+              </a:spcAft>
+            </a:pPr>
+            <a:r>
+              <a:rPr sz="1200" b="0">
+                <a:solidFill>
+                  <a:srgbClr val="622B14"/>
+                </a:solidFill>
+                <a:latin typeface="Cambria"/>
+              </a:rPr>
+              <a:t>Heuristic: Nielsen, quy tắc kinh nghiệm</a:t>
+            </a:r>
+          </a:p>
+          <a:p>
+            <a:pPr algn="l">
+              <a:spcAft>
+                <a:spcPts val="400"/>
+              </a:spcAft>
+            </a:pPr>
+            <a:r>
+              <a:rPr sz="1200" b="0">
+                <a:solidFill>
+                  <a:srgbClr val="622B14"/>
+                </a:solidFill>
+                <a:latin typeface="Cambria"/>
+              </a:rPr>
+              <a:t>Gate, ngưỡng 80%: rubric nội bộ của môn</a:t>
+            </a:r>
+          </a:p>
+          <a:p>
+            <a:pPr algn="l">
+              <a:spcAft>
+                <a:spcPts val="400"/>
+              </a:spcAft>
+            </a:pPr>
+            <a:r>
+              <a:rPr sz="1100" b="0">
+                <a:solidFill>
+                  <a:srgbClr val="8A5D48"/>
+                </a:solidFill>
+                <a:latin typeface="Cambria"/>
+              </a:rPr>
+              <a:t>Bộ 13 skill trong repo (thư mục skills/) chấm từng gate, UI Simplicity 20 tiêu chí, contrast, ma trận state.</a:t>
+            </a:r>
           </a:p>
         </p:txBody>
       </p:sp>

--- a/slides/BreakBite_Lab2_Presentation.pptx
+++ b/slides/BreakBite_Lab2_Presentation.pptx
@@ -3444,7 +3444,7 @@
                 <a:solidFill>
                   <a:srgbClr val="622B14"/>
                 </a:solidFill>
-                <a:latin typeface="Trebuchet MS"/>
+                <a:latin typeface="Segoe UI"/>
               </a:rPr>
               <a:t>BreakBite</a:t>
             </a:r>
@@ -3483,7 +3483,7 @@
                 <a:solidFill>
                   <a:srgbClr val="B45309"/>
                 </a:solidFill>
-                <a:latin typeface="Trebuchet MS"/>
+                <a:latin typeface="Segoe UI"/>
               </a:rPr>
               <a:t>Đặt món trước, nhận tại quầy.</a:t>
             </a:r>
@@ -3880,7 +3880,7 @@
                 <a:solidFill>
                   <a:srgbClr val="622B14"/>
                 </a:solidFill>
-                <a:latin typeface="Trebuchet MS"/>
+                <a:latin typeface="Segoe UI"/>
               </a:rPr>
               <a:t>User story chính</a:t>
             </a:r>
@@ -5010,7 +5010,7 @@
                 <a:solidFill>
                   <a:srgbClr val="622B14"/>
                 </a:solidFill>
-                <a:latin typeface="Trebuchet MS"/>
+                <a:latin typeface="Segoe UI"/>
               </a:rPr>
               <a:t>Kiến trúc thông tin</a:t>
             </a:r>
@@ -6575,7 +6575,7 @@
                 <a:solidFill>
                   <a:srgbClr val="622B14"/>
                 </a:solidFill>
-                <a:latin typeface="Trebuchet MS"/>
+                <a:latin typeface="Segoe UI"/>
               </a:rPr>
               <a:t>Ba flow chính</a:t>
             </a:r>
@@ -9504,7 +9504,7 @@
                 <a:solidFill>
                   <a:srgbClr val="622B14"/>
                 </a:solidFill>
-                <a:latin typeface="Trebuchet MS"/>
+                <a:latin typeface="Segoe UI"/>
               </a:rPr>
               <a:t>Wireframe và flow mở rộng</a:t>
             </a:r>
@@ -10710,7 +10710,7 @@
                 <a:solidFill>
                   <a:srgbClr val="622B14"/>
                 </a:solidFill>
-                <a:latin typeface="Trebuchet MS"/>
+                <a:latin typeface="Segoe UI"/>
               </a:rPr>
               <a:t>Tạo giao diện với Google Stitch</a:t>
             </a:r>
@@ -11134,7 +11134,7 @@
                 <a:solidFill>
                   <a:srgbClr val="622B14"/>
                 </a:solidFill>
-                <a:latin typeface="Trebuchet MS"/>
+                <a:latin typeface="Segoe UI"/>
               </a:rPr>
               <a:t>DESIGN.md</a:t>
             </a:r>
@@ -11324,7 +11324,7 @@
                 <a:solidFill>
                   <a:srgbClr val="622B14"/>
                 </a:solidFill>
-                <a:latin typeface="Trebuchet MS"/>
+                <a:latin typeface="Segoe UI"/>
               </a:rPr>
               <a:t>Prompt gửi Stitch</a:t>
             </a:r>
@@ -11514,7 +11514,7 @@
                 <a:solidFill>
                   <a:srgbClr val="622B14"/>
                 </a:solidFill>
-                <a:latin typeface="Trebuchet MS"/>
+                <a:latin typeface="Segoe UI"/>
               </a:rPr>
               <a:t>Bốn màn ban đầu</a:t>
             </a:r>
@@ -11704,7 +11704,7 @@
                 <a:solidFill>
                   <a:srgbClr val="622B14"/>
                 </a:solidFill>
-                <a:latin typeface="Trebuchet MS"/>
+                <a:latin typeface="Segoe UI"/>
               </a:rPr>
               <a:t>Nhật ký</a:t>
             </a:r>
@@ -11926,7 +11926,7 @@
                 <a:solidFill>
                   <a:srgbClr val="622B14"/>
                 </a:solidFill>
-                <a:latin typeface="Trebuchet MS"/>
+                <a:latin typeface="Segoe UI"/>
               </a:rPr>
               <a:t>Ba hướng visual cho màn Trang chủ</a:t>
             </a:r>
@@ -13314,7 +13314,7 @@
                 <a:solidFill>
                   <a:srgbClr val="622B14"/>
                 </a:solidFill>
-                <a:latin typeface="Trebuchet MS"/>
+                <a:latin typeface="Segoe UI"/>
               </a:rPr>
               <a:t>AI phản biện và ba vòng tinh chỉnh</a:t>
             </a:r>
@@ -13738,7 +13738,7 @@
                 <a:solidFill>
                   <a:srgbClr val="622B14"/>
                 </a:solidFill>
-                <a:latin typeface="Trebuchet MS"/>
+                <a:latin typeface="Segoe UI"/>
               </a:rPr>
               <a:t>CTA khó đọc, bị chìm</a:t>
             </a:r>
@@ -13944,7 +13944,7 @@
                 <a:solidFill>
                   <a:srgbClr val="622B14"/>
                 </a:solidFill>
-                <a:latin typeface="Trebuchet MS"/>
+                <a:latin typeface="Segoe UI"/>
               </a:rPr>
               <a:t>Thiếu giỏ trống, dễ xoá nhầm</a:t>
             </a:r>
@@ -14150,7 +14150,7 @@
                 <a:solidFill>
                   <a:srgbClr val="622B14"/>
                 </a:solidFill>
-                <a:latin typeface="Trebuchet MS"/>
+                <a:latin typeface="Segoe UI"/>
               </a:rPr>
               <a:t>Lỗi thanh toán là ngõ cụt</a:t>
             </a:r>
@@ -14441,7 +14441,7 @@
                 <a:solidFill>
                   <a:srgbClr val="622B14"/>
                 </a:solidFill>
-                <a:latin typeface="Trebuchet MS"/>
+                <a:latin typeface="Segoe UI"/>
               </a:rPr>
               <a:t>Quyết định Accept, Modify, Reject</a:t>
             </a:r>
@@ -15483,7 +15483,7 @@
                 <a:solidFill>
                   <a:srgbClr val="622B14"/>
                 </a:solidFill>
-                <a:latin typeface="Trebuchet MS"/>
+                <a:latin typeface="Segoe UI"/>
               </a:rPr>
               <a:t>App Style Guide</a:t>
             </a:r>
@@ -16992,7 +16992,7 @@
                 <a:solidFill>
                   <a:srgbClr val="622B14"/>
                 </a:solidFill>
-                <a:latin typeface="Trebuchet MS"/>
+                <a:latin typeface="Segoe UI"/>
               </a:rPr>
               <a:t>Display 24 sp · Bold</a:t>
             </a:r>
@@ -17008,7 +17008,7 @@
                 <a:solidFill>
                   <a:srgbClr val="622B14"/>
                 </a:solidFill>
-                <a:latin typeface="Trebuchet MS"/>
+                <a:latin typeface="Segoe UI"/>
               </a:rPr>
               <a:t>Headline 20 sp · Bold</a:t>
             </a:r>
@@ -17367,7 +17367,7 @@
                 <a:solidFill>
                   <a:srgbClr val="622B14"/>
                 </a:solidFill>
-                <a:latin typeface="Trebuchet MS"/>
+                <a:latin typeface="Segoe UI"/>
               </a:rPr>
               <a:t>Phản biện giao diện và bản v2</a:t>
             </a:r>
@@ -18463,7 +18463,7 @@
                 <a:solidFill>
                   <a:srgbClr val="622B14"/>
                 </a:solidFill>
-                <a:latin typeface="Trebuchet MS"/>
+                <a:latin typeface="Segoe UI"/>
               </a:rPr>
               <a:t>Quy trình thiết kế P0 → P5</a:t>
             </a:r>
@@ -18757,7 +18757,7 @@
                 <a:solidFill>
                   <a:srgbClr val="622B14"/>
                 </a:solidFill>
-                <a:latin typeface="Trebuchet MS"/>
+                <a:latin typeface="Segoe UI"/>
               </a:rPr>
               <a:t>P0</a:t>
             </a:r>
@@ -18796,7 +18796,7 @@
                 <a:solidFill>
                   <a:srgbClr val="622B14"/>
                 </a:solidFill>
-                <a:latin typeface="Trebuchet MS"/>
+                <a:latin typeface="Segoe UI"/>
               </a:rPr>
               <a:t>Ideas</a:t>
             </a:r>
@@ -19053,7 +19053,7 @@
                 <a:solidFill>
                   <a:srgbClr val="622B14"/>
                 </a:solidFill>
-                <a:latin typeface="Trebuchet MS"/>
+                <a:latin typeface="Segoe UI"/>
               </a:rPr>
               <a:t>P1</a:t>
             </a:r>
@@ -19092,7 +19092,7 @@
                 <a:solidFill>
                   <a:srgbClr val="622B14"/>
                 </a:solidFill>
-                <a:latin typeface="Trebuchet MS"/>
+                <a:latin typeface="Segoe UI"/>
               </a:rPr>
               <a:t>Research</a:t>
             </a:r>
@@ -19349,7 +19349,7 @@
                 <a:solidFill>
                   <a:srgbClr val="622B14"/>
                 </a:solidFill>
-                <a:latin typeface="Trebuchet MS"/>
+                <a:latin typeface="Segoe UI"/>
               </a:rPr>
               <a:t>P2</a:t>
             </a:r>
@@ -19388,7 +19388,7 @@
                 <a:solidFill>
                   <a:srgbClr val="622B14"/>
                 </a:solidFill>
-                <a:latin typeface="Trebuchet MS"/>
+                <a:latin typeface="Segoe UI"/>
               </a:rPr>
               <a:t>UX Design</a:t>
             </a:r>
@@ -19645,7 +19645,7 @@
                 <a:solidFill>
                   <a:srgbClr val="622B14"/>
                 </a:solidFill>
-                <a:latin typeface="Trebuchet MS"/>
+                <a:latin typeface="Segoe UI"/>
               </a:rPr>
               <a:t>P3</a:t>
             </a:r>
@@ -19684,7 +19684,7 @@
                 <a:solidFill>
                   <a:srgbClr val="622B14"/>
                 </a:solidFill>
-                <a:latin typeface="Trebuchet MS"/>
+                <a:latin typeface="Segoe UI"/>
               </a:rPr>
               <a:t>UI Concept</a:t>
             </a:r>
@@ -19941,7 +19941,7 @@
                 <a:solidFill>
                   <a:srgbClr val="622B14"/>
                 </a:solidFill>
-                <a:latin typeface="Trebuchet MS"/>
+                <a:latin typeface="Segoe UI"/>
               </a:rPr>
               <a:t>P4</a:t>
             </a:r>
@@ -19980,7 +19980,7 @@
                 <a:solidFill>
                   <a:srgbClr val="622B14"/>
                 </a:solidFill>
-                <a:latin typeface="Trebuchet MS"/>
+                <a:latin typeface="Segoe UI"/>
               </a:rPr>
               <a:t>UI Design</a:t>
             </a:r>
@@ -20237,7 +20237,7 @@
                 <a:solidFill>
                   <a:srgbClr val="622B14"/>
                 </a:solidFill>
-                <a:latin typeface="Trebuchet MS"/>
+                <a:latin typeface="Segoe UI"/>
               </a:rPr>
               <a:t>P5</a:t>
             </a:r>
@@ -20276,7 +20276,7 @@
                 <a:solidFill>
                   <a:srgbClr val="622B14"/>
                 </a:solidFill>
-                <a:latin typeface="Trebuchet MS"/>
+                <a:latin typeface="Segoe UI"/>
               </a:rPr>
               <a:t>Validation</a:t>
             </a:r>
@@ -20697,7 +20697,7 @@
                 <a:solidFill>
                   <a:srgbClr val="622B14"/>
                 </a:solidFill>
-                <a:latin typeface="Trebuchet MS"/>
+                <a:latin typeface="Segoe UI"/>
               </a:rPr>
               <a:t>Final UI: luồng đặt món</a:t>
             </a:r>
@@ -22025,7 +22025,7 @@
                 <a:solidFill>
                   <a:srgbClr val="622B14"/>
                 </a:solidFill>
-                <a:latin typeface="Trebuchet MS"/>
+                <a:latin typeface="Segoe UI"/>
               </a:rPr>
               <a:t>Trạng thái hệ thống</a:t>
             </a:r>
@@ -22362,7 +22362,7 @@
                 <a:solidFill>
                   <a:srgbClr val="B45309"/>
                 </a:solidFill>
-                <a:latin typeface="Trebuchet MS"/>
+                <a:latin typeface="Segoe UI"/>
               </a:rPr>
               <a:t>EMPTY</a:t>
             </a:r>
@@ -22560,7 +22560,7 @@
                 <a:solidFill>
                   <a:srgbClr val="622B14"/>
                 </a:solidFill>
-                <a:latin typeface="Trebuchet MS"/>
+                <a:latin typeface="Segoe UI"/>
               </a:rPr>
               <a:t>LOADING</a:t>
             </a:r>
@@ -22758,7 +22758,7 @@
                 <a:solidFill>
                   <a:srgbClr val="B91C1C"/>
                 </a:solidFill>
-                <a:latin typeface="Trebuchet MS"/>
+                <a:latin typeface="Segoe UI"/>
               </a:rPr>
               <a:t>ERROR</a:t>
             </a:r>
@@ -22956,7 +22956,7 @@
                 <a:solidFill>
                   <a:srgbClr val="15803D"/>
                 </a:solidFill>
-                <a:latin typeface="Trebuchet MS"/>
+                <a:latin typeface="Segoe UI"/>
               </a:rPr>
               <a:t>SUCCESS</a:t>
             </a:r>
@@ -23156,7 +23156,7 @@
                 <a:solidFill>
                   <a:srgbClr val="622B14"/>
                 </a:solidFill>
-                <a:latin typeface="Trebuchet MS"/>
+                <a:latin typeface="Segoe UI"/>
               </a:rPr>
               <a:t>Final UI: vòng đời đơn và tài khoản</a:t>
             </a:r>
@@ -23781,7 +23781,7 @@
                 <a:solidFill>
                   <a:srgbClr val="622B14"/>
                 </a:solidFill>
-                <a:latin typeface="Trebuchet MS"/>
+                <a:latin typeface="Segoe UI"/>
               </a:rPr>
               <a:t>App người bán: BreakBite Kiosk</a:t>
             </a:r>
@@ -24412,7 +24412,7 @@
                 <a:solidFill>
                   <a:srgbClr val="622B14"/>
                 </a:solidFill>
-                <a:latin typeface="Trebuchet MS"/>
+                <a:latin typeface="Segoe UI"/>
               </a:rPr>
               <a:t>Ánh xạ pain point → màn hình (1/2)</a:t>
             </a:r>
@@ -27094,7 +27094,7 @@
                 <a:solidFill>
                   <a:srgbClr val="622B14"/>
                 </a:solidFill>
-                <a:latin typeface="Trebuchet MS"/>
+                <a:latin typeface="Segoe UI"/>
               </a:rPr>
               <a:t>Ánh xạ pain point → màn hình (2/2)</a:t>
             </a:r>
@@ -29861,7 +29861,7 @@
                 <a:solidFill>
                   <a:srgbClr val="622B14"/>
                 </a:solidFill>
-                <a:latin typeface="Trebuchet MS"/>
+                <a:latin typeface="Segoe UI"/>
               </a:rPr>
               <a:t>Bản vẽ trong Figma</a:t>
             </a:r>
@@ -30962,7 +30962,7 @@
                 <a:solidFill>
                   <a:srgbClr val="622B14"/>
                 </a:solidFill>
-                <a:latin typeface="Trebuchet MS"/>
+                <a:latin typeface="Segoe UI"/>
               </a:rPr>
               <a:t>Component và responsive</a:t>
             </a:r>
@@ -31898,7 +31898,7 @@
                 <a:solidFill>
                   <a:srgbClr val="622B14"/>
                 </a:solidFill>
-                <a:latin typeface="Trebuchet MS"/>
+                <a:latin typeface="Segoe UI"/>
               </a:rPr>
               <a:t>Prototype Figma</a:t>
             </a:r>
@@ -32725,7 +32725,7 @@
                 <a:solidFill>
                   <a:srgbClr val="622B14"/>
                 </a:solidFill>
-                <a:latin typeface="Trebuchet MS"/>
+                <a:latin typeface="Segoe UI"/>
               </a:rPr>
               <a:t>Accessibility</a:t>
             </a:r>
@@ -33060,7 +33060,7 @@
                 <a:solidFill>
                   <a:srgbClr val="B45309"/>
                 </a:solidFill>
-                <a:latin typeface="Trebuchet MS"/>
+                <a:latin typeface="Segoe UI"/>
               </a:rPr>
               <a:t>5,23:1</a:t>
             </a:r>
@@ -33200,7 +33200,7 @@
                 <a:solidFill>
                   <a:srgbClr val="B45309"/>
                 </a:solidFill>
-                <a:latin typeface="Trebuchet MS"/>
+                <a:latin typeface="Segoe UI"/>
               </a:rPr>
               <a:t>48 dp</a:t>
             </a:r>
@@ -33340,7 +33340,7 @@
                 <a:solidFill>
                   <a:srgbClr val="B45309"/>
                 </a:solidFill>
-                <a:latin typeface="Trebuchet MS"/>
+                <a:latin typeface="Segoe UI"/>
               </a:rPr>
               <a:t>14 sp</a:t>
             </a:r>
@@ -33480,7 +33480,7 @@
                 <a:solidFill>
                   <a:srgbClr val="B45309"/>
                 </a:solidFill>
-                <a:latin typeface="Trebuchet MS"/>
+                <a:latin typeface="Segoe UI"/>
               </a:rPr>
               <a:t>0</a:t>
             </a:r>
@@ -33876,7 +33876,7 @@
                 <a:solidFill>
                   <a:srgbClr val="622B14"/>
                 </a:solidFill>
-                <a:latin typeface="Trebuchet MS"/>
+                <a:latin typeface="Segoe UI"/>
               </a:rPr>
               <a:t>Vấn đề cần giải quyết</a:t>
             </a:r>
@@ -35076,7 +35076,7 @@
                 <a:solidFill>
                   <a:srgbClr val="622B14"/>
                 </a:solidFill>
-                <a:latin typeface="Trebuchet MS"/>
+                <a:latin typeface="Segoe UI"/>
               </a:rPr>
               <a:t>Kiểm thử</a:t>
             </a:r>
@@ -35903,7 +35903,7 @@
                 <a:solidFill>
                   <a:srgbClr val="622B14"/>
                 </a:solidFill>
-                <a:latin typeface="Trebuchet MS"/>
+                <a:latin typeface="Segoe UI"/>
               </a:rPr>
               <a:t>Bàn giao cho Flutter</a:t>
             </a:r>
@@ -36897,7 +36897,7 @@
                 <a:solidFill>
                   <a:srgbClr val="622B14"/>
                 </a:solidFill>
-                <a:latin typeface="Trebuchet MS"/>
+                <a:latin typeface="Segoe UI"/>
               </a:rPr>
               <a:t>Tự chấm theo Quality Gates</a:t>
             </a:r>
@@ -37234,7 +37234,7 @@
                 <a:solidFill>
                   <a:srgbClr val="622B14"/>
                 </a:solidFill>
-                <a:latin typeface="Trebuchet MS"/>
+                <a:latin typeface="Segoe UI"/>
               </a:rPr>
               <a:t>G0</a:t>
             </a:r>
@@ -37438,7 +37438,7 @@
                 <a:solidFill>
                   <a:srgbClr val="622B14"/>
                 </a:solidFill>
-                <a:latin typeface="Trebuchet MS"/>
+                <a:latin typeface="Segoe UI"/>
               </a:rPr>
               <a:t>G1</a:t>
             </a:r>
@@ -37642,7 +37642,7 @@
                 <a:solidFill>
                   <a:srgbClr val="622B14"/>
                 </a:solidFill>
-                <a:latin typeface="Trebuchet MS"/>
+                <a:latin typeface="Segoe UI"/>
               </a:rPr>
               <a:t>G2</a:t>
             </a:r>
@@ -37846,7 +37846,7 @@
                 <a:solidFill>
                   <a:srgbClr val="622B14"/>
                 </a:solidFill>
-                <a:latin typeface="Trebuchet MS"/>
+                <a:latin typeface="Segoe UI"/>
               </a:rPr>
               <a:t>G3</a:t>
             </a:r>
@@ -38050,7 +38050,7 @@
                 <a:solidFill>
                   <a:srgbClr val="622B14"/>
                 </a:solidFill>
-                <a:latin typeface="Trebuchet MS"/>
+                <a:latin typeface="Segoe UI"/>
               </a:rPr>
               <a:t>G4</a:t>
             </a:r>
@@ -38254,7 +38254,7 @@
                 <a:solidFill>
                   <a:srgbClr val="622B14"/>
                 </a:solidFill>
-                <a:latin typeface="Trebuchet MS"/>
+                <a:latin typeface="Segoe UI"/>
               </a:rPr>
               <a:t>G5</a:t>
             </a:r>
@@ -38760,7 +38760,7 @@
                 <a:solidFill>
                   <a:srgbClr val="622B14"/>
                 </a:solidFill>
-                <a:latin typeface="Trebuchet MS"/>
+                <a:latin typeface="Segoe UI"/>
               </a:rPr>
               <a:t>Tổng kết</a:t>
             </a:r>
@@ -39010,7 +39010,7 @@
                 <a:solidFill>
                   <a:srgbClr val="622B14"/>
                 </a:solidFill>
-                <a:latin typeface="Trebuchet MS"/>
+                <a:latin typeface="Segoe UI"/>
               </a:rPr>
               <a:t>AI giúp</a:t>
             </a:r>
@@ -39184,7 +39184,7 @@
                 <a:solidFill>
                   <a:srgbClr val="622B14"/>
                 </a:solidFill>
-                <a:latin typeface="Trebuchet MS"/>
+                <a:latin typeface="Segoe UI"/>
               </a:rPr>
               <a:t>Nhóm vẫn phải</a:t>
             </a:r>
@@ -39358,7 +39358,7 @@
                 <a:solidFill>
                   <a:srgbClr val="B45309"/>
                 </a:solidFill>
-                <a:latin typeface="Trebuchet MS"/>
+                <a:latin typeface="Segoe UI"/>
               </a:rPr>
               <a:t>Còn lại</a:t>
             </a:r>
@@ -39530,7 +39530,7 @@
                 <a:solidFill>
                   <a:srgbClr val="622B14"/>
                 </a:solidFill>
-                <a:latin typeface="Trebuchet MS"/>
+                <a:latin typeface="Segoe UI"/>
               </a:rPr>
               <a:t>Cảm ơn thầy và các bạn</a:t>
             </a:r>
@@ -39635,7 +39635,7 @@
                 <a:solidFill>
                   <a:srgbClr val="622B14"/>
                 </a:solidFill>
-                <a:latin typeface="Trebuchet MS"/>
+                <a:latin typeface="Segoe UI"/>
               </a:rPr>
               <a:t>Các hướng đã cân nhắc</a:t>
             </a:r>
@@ -40817,7 +40817,7 @@
                 <a:solidFill>
                   <a:srgbClr val="622B14"/>
                 </a:solidFill>
-                <a:latin typeface="Trebuchet MS"/>
+                <a:latin typeface="Segoe UI"/>
               </a:rPr>
               <a:t>Giả định, rủi ro và phạm vi MVP</a:t>
             </a:r>
@@ -42084,7 +42084,7 @@
                 <a:solidFill>
                   <a:srgbClr val="622B14"/>
                 </a:solidFill>
-                <a:latin typeface="Trebuchet MS"/>
+                <a:latin typeface="Segoe UI"/>
               </a:rPr>
               <a:t>Kế hoạch nghiên cứu</a:t>
             </a:r>
@@ -43590,7 +43590,7 @@
                 <a:solidFill>
                   <a:srgbClr val="622B14"/>
                 </a:solidFill>
-                <a:latin typeface="Trebuchet MS"/>
+                <a:latin typeface="Segoe UI"/>
               </a:rPr>
               <a:t>Kết quả nghiên cứu hiện có</a:t>
             </a:r>
@@ -43964,7 +43964,7 @@
                 <a:solidFill>
                   <a:srgbClr val="B45309"/>
                 </a:solidFill>
-                <a:latin typeface="Trebuchet MS"/>
+                <a:latin typeface="Segoe UI"/>
               </a:rPr>
               <a:t>4 / 5</a:t>
             </a:r>
@@ -44088,7 +44088,7 @@
                 <a:solidFill>
                   <a:srgbClr val="B45309"/>
                 </a:solidFill>
-                <a:latin typeface="Trebuchet MS"/>
+                <a:latin typeface="Segoe UI"/>
               </a:rPr>
               <a:t>3 / 5</a:t>
             </a:r>
@@ -44212,7 +44212,7 @@
                 <a:solidFill>
                   <a:srgbClr val="B45309"/>
                 </a:solidFill>
-                <a:latin typeface="Trebuchet MS"/>
+                <a:latin typeface="Segoe UI"/>
               </a:rPr>
               <a:t>1 / 5</a:t>
             </a:r>
@@ -44375,7 +44375,7 @@
                 <a:solidFill>
                   <a:srgbClr val="B45309"/>
                 </a:solidFill>
-                <a:latin typeface="Trebuchet MS"/>
+                <a:latin typeface="Segoe UI"/>
               </a:rPr>
               <a:t>4,5 / 5</a:t>
             </a:r>
@@ -44499,7 +44499,7 @@
                 <a:solidFill>
                   <a:srgbClr val="B45309"/>
                 </a:solidFill>
-                <a:latin typeface="Trebuchet MS"/>
+                <a:latin typeface="Segoe UI"/>
               </a:rPr>
               <a:t>0 / 20</a:t>
             </a:r>
@@ -44623,7 +44623,7 @@
                 <a:solidFill>
                   <a:srgbClr val="B45309"/>
                 </a:solidFill>
-                <a:latin typeface="Trebuchet MS"/>
+                <a:latin typeface="Segoe UI"/>
               </a:rPr>
               <a:t>9 / 20</a:t>
             </a:r>
@@ -44836,7 +44836,7 @@
                 <a:solidFill>
                   <a:srgbClr val="622B14"/>
                 </a:solidFill>
-                <a:latin typeface="Trebuchet MS"/>
+                <a:latin typeface="Segoe UI"/>
               </a:rPr>
               <a:t>Insight → quyết định thiết kế</a:t>
             </a:r>
@@ -46637,7 +46637,7 @@
                 <a:solidFill>
                   <a:srgbClr val="622B14"/>
                 </a:solidFill>
-                <a:latin typeface="Trebuchet MS"/>
+                <a:latin typeface="Segoe UI"/>
               </a:rPr>
               <a:t>Persona</a:t>
             </a:r>
@@ -47018,7 +47018,7 @@
                 <a:solidFill>
                   <a:srgbClr val="622B14"/>
                 </a:solidFill>
-                <a:latin typeface="Trebuchet MS"/>
+                <a:latin typeface="Segoe UI"/>
               </a:rPr>
               <a:t>Q</a:t>
             </a:r>
@@ -47339,7 +47339,7 @@
                 <a:solidFill>
                   <a:srgbClr val="622B14"/>
                 </a:solidFill>
-                <a:latin typeface="Trebuchet MS"/>
+                <a:latin typeface="Segoe UI"/>
               </a:rPr>
               <a:t>L</a:t>
             </a:r>
@@ -47660,7 +47660,7 @@
                 <a:solidFill>
                   <a:srgbClr val="622B14"/>
                 </a:solidFill>
-                <a:latin typeface="Trebuchet MS"/>
+                <a:latin typeface="Segoe UI"/>
               </a:rPr>
               <a:t>H</a:t>
             </a:r>
@@ -47981,7 +47981,7 @@
                 <a:solidFill>
                   <a:srgbClr val="622B14"/>
                 </a:solidFill>
-                <a:latin typeface="Trebuchet MS"/>
+                <a:latin typeface="Segoe UI"/>
               </a:rPr>
               <a:t>T</a:t>
             </a:r>
